--- a/docs/FogEdge_5min_Presentation.pptx
+++ b/docs/FogEdge_5min_Presentation.pptx
@@ -5,11 +5,12 @@
     <p:sldMasterId id="2147483648" r:id="rId1"/>
   </p:sldMasterIdLst>
   <p:sldIdLst>
-    <p:sldId id="256" r:id="rId7"/>
-    <p:sldId id="257" r:id="rId8"/>
-    <p:sldId id="258" r:id="rId9"/>
-    <p:sldId id="259" r:id="rId10"/>
-    <p:sldId id="260" r:id="rId11"/>
+    <p:sldId id="256" r:id="rId2"/>
+    <p:sldId id="257" r:id="rId3"/>
+    <p:sldId id="258" r:id="rId4"/>
+    <p:sldId id="261" r:id="rId5"/>
+    <p:sldId id="259" r:id="rId6"/>
+    <p:sldId id="260" r:id="rId7"/>
   </p:sldIdLst>
   <p:sldSz cx="9144000" cy="6858000" type="screen4x3"/>
   <p:notesSz cx="6858000" cy="9144000"/>
@@ -108,6 +109,22 @@
       </a:defRPr>
     </a:lvl9pPr>
   </p:defaultTextStyle>
+  <p:extLst>
+    <p:ext uri="{EFAFB233-063F-42B5-8137-9DF3F51BA10A}">
+      <p15:sldGuideLst xmlns:p15="http://schemas.microsoft.com/office/powerpoint/2012/main">
+        <p15:guide id="1" orient="horz" pos="2160">
+          <p15:clr>
+            <a:srgbClr val="A4A3A4"/>
+          </p15:clr>
+        </p15:guide>
+        <p15:guide id="2" pos="2880">
+          <p15:clr>
+            <a:srgbClr val="A4A3A4"/>
+          </p15:clr>
+        </p15:guide>
+      </p15:sldGuideLst>
+    </p:ext>
+  </p:extLst>
 </p:presentation>
 </file>
 
@@ -149,10 +166,9 @@
           <a:lstStyle/>
           <a:p>
             <a:r>
-              <a:rPr lang="en-US" smtClean="0"/>
+              <a:rPr lang="en-US"/>
               <a:t>Click to edit Master title style</a:t>
             </a:r>
-            <a:endParaRPr lang="en-US"/>
           </a:p>
         </p:txBody>
       </p:sp>
@@ -268,10 +284,9 @@
           </a:lstStyle>
           <a:p>
             <a:r>
-              <a:rPr lang="en-US" smtClean="0"/>
+              <a:rPr lang="en-US"/>
               <a:t>Click to edit Master subtitle style</a:t>
             </a:r>
-            <a:endParaRPr lang="en-US"/>
           </a:p>
         </p:txBody>
       </p:sp>
@@ -292,7 +307,7 @@
           <a:p>
             <a:fld id="{5BCAD085-E8A6-8845-BD4E-CB4CCA059FC4}" type="datetimeFigureOut">
               <a:rPr lang="en-US" smtClean="0"/>
-              <a:t>1/27/13</a:t>
+              <a:t>4/13/26</a:t>
             </a:fld>
             <a:endParaRPr lang="en-US"/>
           </a:p>
@@ -386,10 +401,9 @@
           <a:lstStyle/>
           <a:p>
             <a:r>
-              <a:rPr lang="en-US" smtClean="0"/>
+              <a:rPr lang="en-US"/>
               <a:t>Click to edit Master title style</a:t>
             </a:r>
-            <a:endParaRPr lang="en-US"/>
           </a:p>
         </p:txBody>
       </p:sp>
@@ -410,38 +424,37 @@
           <a:p>
             <a:pPr lvl="0"/>
             <a:r>
-              <a:rPr lang="en-US" smtClean="0"/>
+              <a:rPr lang="en-US"/>
               <a:t>Click to edit Master text styles</a:t>
             </a:r>
           </a:p>
           <a:p>
             <a:pPr lvl="1"/>
             <a:r>
-              <a:rPr lang="en-US" smtClean="0"/>
+              <a:rPr lang="en-US"/>
               <a:t>Second level</a:t>
             </a:r>
           </a:p>
           <a:p>
             <a:pPr lvl="2"/>
             <a:r>
-              <a:rPr lang="en-US" smtClean="0"/>
+              <a:rPr lang="en-US"/>
               <a:t>Third level</a:t>
             </a:r>
           </a:p>
           <a:p>
             <a:pPr lvl="3"/>
             <a:r>
-              <a:rPr lang="en-US" smtClean="0"/>
+              <a:rPr lang="en-US"/>
               <a:t>Fourth level</a:t>
             </a:r>
           </a:p>
           <a:p>
             <a:pPr lvl="4"/>
             <a:r>
-              <a:rPr lang="en-US" smtClean="0"/>
+              <a:rPr lang="en-US"/>
               <a:t>Fifth level</a:t>
             </a:r>
-            <a:endParaRPr lang="en-US"/>
           </a:p>
         </p:txBody>
       </p:sp>
@@ -462,7 +475,7 @@
           <a:p>
             <a:fld id="{5BCAD085-E8A6-8845-BD4E-CB4CCA059FC4}" type="datetimeFigureOut">
               <a:rPr lang="en-US" smtClean="0"/>
-              <a:t>1/27/13</a:t>
+              <a:t>4/13/26</a:t>
             </a:fld>
             <a:endParaRPr lang="en-US"/>
           </a:p>
@@ -561,10 +574,9 @@
           <a:lstStyle/>
           <a:p>
             <a:r>
-              <a:rPr lang="en-US" smtClean="0"/>
+              <a:rPr lang="en-US"/>
               <a:t>Click to edit Master title style</a:t>
             </a:r>
-            <a:endParaRPr lang="en-US"/>
           </a:p>
         </p:txBody>
       </p:sp>
@@ -590,38 +602,37 @@
           <a:p>
             <a:pPr lvl="0"/>
             <a:r>
-              <a:rPr lang="en-US" smtClean="0"/>
+              <a:rPr lang="en-US"/>
               <a:t>Click to edit Master text styles</a:t>
             </a:r>
           </a:p>
           <a:p>
             <a:pPr lvl="1"/>
             <a:r>
-              <a:rPr lang="en-US" smtClean="0"/>
+              <a:rPr lang="en-US"/>
               <a:t>Second level</a:t>
             </a:r>
           </a:p>
           <a:p>
             <a:pPr lvl="2"/>
             <a:r>
-              <a:rPr lang="en-US" smtClean="0"/>
+              <a:rPr lang="en-US"/>
               <a:t>Third level</a:t>
             </a:r>
           </a:p>
           <a:p>
             <a:pPr lvl="3"/>
             <a:r>
-              <a:rPr lang="en-US" smtClean="0"/>
+              <a:rPr lang="en-US"/>
               <a:t>Fourth level</a:t>
             </a:r>
           </a:p>
           <a:p>
             <a:pPr lvl="4"/>
             <a:r>
-              <a:rPr lang="en-US" smtClean="0"/>
+              <a:rPr lang="en-US"/>
               <a:t>Fifth level</a:t>
             </a:r>
-            <a:endParaRPr lang="en-US"/>
           </a:p>
         </p:txBody>
       </p:sp>
@@ -642,7 +653,7 @@
           <a:p>
             <a:fld id="{5BCAD085-E8A6-8845-BD4E-CB4CCA059FC4}" type="datetimeFigureOut">
               <a:rPr lang="en-US" smtClean="0"/>
-              <a:t>1/27/13</a:t>
+              <a:t>4/13/26</a:t>
             </a:fld>
             <a:endParaRPr lang="en-US"/>
           </a:p>
@@ -736,10 +747,9 @@
           <a:lstStyle/>
           <a:p>
             <a:r>
-              <a:rPr lang="en-US" smtClean="0"/>
+              <a:rPr lang="en-US"/>
               <a:t>Click to edit Master title style</a:t>
             </a:r>
-            <a:endParaRPr lang="en-US"/>
           </a:p>
         </p:txBody>
       </p:sp>
@@ -760,38 +770,37 @@
           <a:p>
             <a:pPr lvl="0"/>
             <a:r>
-              <a:rPr lang="en-US" smtClean="0"/>
+              <a:rPr lang="en-US"/>
               <a:t>Click to edit Master text styles</a:t>
             </a:r>
           </a:p>
           <a:p>
             <a:pPr lvl="1"/>
             <a:r>
-              <a:rPr lang="en-US" smtClean="0"/>
+              <a:rPr lang="en-US"/>
               <a:t>Second level</a:t>
             </a:r>
           </a:p>
           <a:p>
             <a:pPr lvl="2"/>
             <a:r>
-              <a:rPr lang="en-US" smtClean="0"/>
+              <a:rPr lang="en-US"/>
               <a:t>Third level</a:t>
             </a:r>
           </a:p>
           <a:p>
             <a:pPr lvl="3"/>
             <a:r>
-              <a:rPr lang="en-US" smtClean="0"/>
+              <a:rPr lang="en-US"/>
               <a:t>Fourth level</a:t>
             </a:r>
           </a:p>
           <a:p>
             <a:pPr lvl="4"/>
             <a:r>
-              <a:rPr lang="en-US" smtClean="0"/>
+              <a:rPr lang="en-US"/>
               <a:t>Fifth level</a:t>
             </a:r>
-            <a:endParaRPr lang="en-US"/>
           </a:p>
         </p:txBody>
       </p:sp>
@@ -812,7 +821,7 @@
           <a:p>
             <a:fld id="{5BCAD085-E8A6-8845-BD4E-CB4CCA059FC4}" type="datetimeFigureOut">
               <a:rPr lang="en-US" smtClean="0"/>
-              <a:t>1/27/13</a:t>
+              <a:t>4/13/26</a:t>
             </a:fld>
             <a:endParaRPr lang="en-US"/>
           </a:p>
@@ -915,10 +924,9 @@
           </a:lstStyle>
           <a:p>
             <a:r>
-              <a:rPr lang="en-US" smtClean="0"/>
+              <a:rPr lang="en-US"/>
               <a:t>Click to edit Master title style</a:t>
             </a:r>
-            <a:endParaRPr lang="en-US"/>
           </a:p>
         </p:txBody>
       </p:sp>
@@ -1035,7 +1043,7 @@
           <a:p>
             <a:pPr lvl="0"/>
             <a:r>
-              <a:rPr lang="en-US" smtClean="0"/>
+              <a:rPr lang="en-US"/>
               <a:t>Click to edit Master text styles</a:t>
             </a:r>
           </a:p>
@@ -1058,7 +1066,7 @@
           <a:p>
             <a:fld id="{5BCAD085-E8A6-8845-BD4E-CB4CCA059FC4}" type="datetimeFigureOut">
               <a:rPr lang="en-US" smtClean="0"/>
-              <a:t>1/27/13</a:t>
+              <a:t>4/13/26</a:t>
             </a:fld>
             <a:endParaRPr lang="en-US"/>
           </a:p>
@@ -1152,10 +1160,9 @@
           <a:lstStyle/>
           <a:p>
             <a:r>
-              <a:rPr lang="en-US" smtClean="0"/>
+              <a:rPr lang="en-US"/>
               <a:t>Click to edit Master title style</a:t>
             </a:r>
-            <a:endParaRPr lang="en-US"/>
           </a:p>
         </p:txBody>
       </p:sp>
@@ -1209,38 +1216,37 @@
           <a:p>
             <a:pPr lvl="0"/>
             <a:r>
-              <a:rPr lang="en-US" smtClean="0"/>
+              <a:rPr lang="en-US"/>
               <a:t>Click to edit Master text styles</a:t>
             </a:r>
           </a:p>
           <a:p>
             <a:pPr lvl="1"/>
             <a:r>
-              <a:rPr lang="en-US" smtClean="0"/>
+              <a:rPr lang="en-US"/>
               <a:t>Second level</a:t>
             </a:r>
           </a:p>
           <a:p>
             <a:pPr lvl="2"/>
             <a:r>
-              <a:rPr lang="en-US" smtClean="0"/>
+              <a:rPr lang="en-US"/>
               <a:t>Third level</a:t>
             </a:r>
           </a:p>
           <a:p>
             <a:pPr lvl="3"/>
             <a:r>
-              <a:rPr lang="en-US" smtClean="0"/>
+              <a:rPr lang="en-US"/>
               <a:t>Fourth level</a:t>
             </a:r>
           </a:p>
           <a:p>
             <a:pPr lvl="4"/>
             <a:r>
-              <a:rPr lang="en-US" smtClean="0"/>
+              <a:rPr lang="en-US"/>
               <a:t>Fifth level</a:t>
             </a:r>
-            <a:endParaRPr lang="en-US"/>
           </a:p>
         </p:txBody>
       </p:sp>
@@ -1294,38 +1300,37 @@
           <a:p>
             <a:pPr lvl="0"/>
             <a:r>
-              <a:rPr lang="en-US" smtClean="0"/>
+              <a:rPr lang="en-US"/>
               <a:t>Click to edit Master text styles</a:t>
             </a:r>
           </a:p>
           <a:p>
             <a:pPr lvl="1"/>
             <a:r>
-              <a:rPr lang="en-US" smtClean="0"/>
+              <a:rPr lang="en-US"/>
               <a:t>Second level</a:t>
             </a:r>
           </a:p>
           <a:p>
             <a:pPr lvl="2"/>
             <a:r>
-              <a:rPr lang="en-US" smtClean="0"/>
+              <a:rPr lang="en-US"/>
               <a:t>Third level</a:t>
             </a:r>
           </a:p>
           <a:p>
             <a:pPr lvl="3"/>
             <a:r>
-              <a:rPr lang="en-US" smtClean="0"/>
+              <a:rPr lang="en-US"/>
               <a:t>Fourth level</a:t>
             </a:r>
           </a:p>
           <a:p>
             <a:pPr lvl="4"/>
             <a:r>
-              <a:rPr lang="en-US" smtClean="0"/>
+              <a:rPr lang="en-US"/>
               <a:t>Fifth level</a:t>
             </a:r>
-            <a:endParaRPr lang="en-US"/>
           </a:p>
         </p:txBody>
       </p:sp>
@@ -1346,7 +1351,7 @@
           <a:p>
             <a:fld id="{5BCAD085-E8A6-8845-BD4E-CB4CCA059FC4}" type="datetimeFigureOut">
               <a:rPr lang="en-US" smtClean="0"/>
-              <a:t>1/27/13</a:t>
+              <a:t>4/13/26</a:t>
             </a:fld>
             <a:endParaRPr lang="en-US"/>
           </a:p>
@@ -1444,10 +1449,9 @@
           </a:lstStyle>
           <a:p>
             <a:r>
-              <a:rPr lang="en-US" smtClean="0"/>
+              <a:rPr lang="en-US"/>
               <a:t>Click to edit Master title style</a:t>
             </a:r>
-            <a:endParaRPr lang="en-US"/>
           </a:p>
         </p:txBody>
       </p:sp>
@@ -1510,7 +1514,7 @@
           <a:p>
             <a:pPr lvl="0"/>
             <a:r>
-              <a:rPr lang="en-US" smtClean="0"/>
+              <a:rPr lang="en-US"/>
               <a:t>Click to edit Master text styles</a:t>
             </a:r>
           </a:p>
@@ -1566,38 +1570,37 @@
           <a:p>
             <a:pPr lvl="0"/>
             <a:r>
-              <a:rPr lang="en-US" smtClean="0"/>
+              <a:rPr lang="en-US"/>
               <a:t>Click to edit Master text styles</a:t>
             </a:r>
           </a:p>
           <a:p>
             <a:pPr lvl="1"/>
             <a:r>
-              <a:rPr lang="en-US" smtClean="0"/>
+              <a:rPr lang="en-US"/>
               <a:t>Second level</a:t>
             </a:r>
           </a:p>
           <a:p>
             <a:pPr lvl="2"/>
             <a:r>
-              <a:rPr lang="en-US" smtClean="0"/>
+              <a:rPr lang="en-US"/>
               <a:t>Third level</a:t>
             </a:r>
           </a:p>
           <a:p>
             <a:pPr lvl="3"/>
             <a:r>
-              <a:rPr lang="en-US" smtClean="0"/>
+              <a:rPr lang="en-US"/>
               <a:t>Fourth level</a:t>
             </a:r>
           </a:p>
           <a:p>
             <a:pPr lvl="4"/>
             <a:r>
-              <a:rPr lang="en-US" smtClean="0"/>
+              <a:rPr lang="en-US"/>
               <a:t>Fifth level</a:t>
             </a:r>
-            <a:endParaRPr lang="en-US"/>
           </a:p>
         </p:txBody>
       </p:sp>
@@ -1660,7 +1663,7 @@
           <a:p>
             <a:pPr lvl="0"/>
             <a:r>
-              <a:rPr lang="en-US" smtClean="0"/>
+              <a:rPr lang="en-US"/>
               <a:t>Click to edit Master text styles</a:t>
             </a:r>
           </a:p>
@@ -1716,38 +1719,37 @@
           <a:p>
             <a:pPr lvl="0"/>
             <a:r>
-              <a:rPr lang="en-US" smtClean="0"/>
+              <a:rPr lang="en-US"/>
               <a:t>Click to edit Master text styles</a:t>
             </a:r>
           </a:p>
           <a:p>
             <a:pPr lvl="1"/>
             <a:r>
-              <a:rPr lang="en-US" smtClean="0"/>
+              <a:rPr lang="en-US"/>
               <a:t>Second level</a:t>
             </a:r>
           </a:p>
           <a:p>
             <a:pPr lvl="2"/>
             <a:r>
-              <a:rPr lang="en-US" smtClean="0"/>
+              <a:rPr lang="en-US"/>
               <a:t>Third level</a:t>
             </a:r>
           </a:p>
           <a:p>
             <a:pPr lvl="3"/>
             <a:r>
-              <a:rPr lang="en-US" smtClean="0"/>
+              <a:rPr lang="en-US"/>
               <a:t>Fourth level</a:t>
             </a:r>
           </a:p>
           <a:p>
             <a:pPr lvl="4"/>
             <a:r>
-              <a:rPr lang="en-US" smtClean="0"/>
+              <a:rPr lang="en-US"/>
               <a:t>Fifth level</a:t>
             </a:r>
-            <a:endParaRPr lang="en-US"/>
           </a:p>
         </p:txBody>
       </p:sp>
@@ -1768,7 +1770,7 @@
           <a:p>
             <a:fld id="{5BCAD085-E8A6-8845-BD4E-CB4CCA059FC4}" type="datetimeFigureOut">
               <a:rPr lang="en-US" smtClean="0"/>
-              <a:t>1/27/13</a:t>
+              <a:t>4/13/26</a:t>
             </a:fld>
             <a:endParaRPr lang="en-US"/>
           </a:p>
@@ -1862,10 +1864,9 @@
           <a:lstStyle/>
           <a:p>
             <a:r>
-              <a:rPr lang="en-US" smtClean="0"/>
+              <a:rPr lang="en-US"/>
               <a:t>Click to edit Master title style</a:t>
             </a:r>
-            <a:endParaRPr lang="en-US"/>
           </a:p>
         </p:txBody>
       </p:sp>
@@ -1886,7 +1887,7 @@
           <a:p>
             <a:fld id="{5BCAD085-E8A6-8845-BD4E-CB4CCA059FC4}" type="datetimeFigureOut">
               <a:rPr lang="en-US" smtClean="0"/>
-              <a:t>1/27/13</a:t>
+              <a:t>4/13/26</a:t>
             </a:fld>
             <a:endParaRPr lang="en-US"/>
           </a:p>
@@ -1981,7 +1982,7 @@
           <a:p>
             <a:fld id="{5BCAD085-E8A6-8845-BD4E-CB4CCA059FC4}" type="datetimeFigureOut">
               <a:rPr lang="en-US" smtClean="0"/>
-              <a:t>1/27/13</a:t>
+              <a:t>4/13/26</a:t>
             </a:fld>
             <a:endParaRPr lang="en-US"/>
           </a:p>
@@ -2084,10 +2085,9 @@
           </a:lstStyle>
           <a:p>
             <a:r>
-              <a:rPr lang="en-US" smtClean="0"/>
+              <a:rPr lang="en-US"/>
               <a:t>Click to edit Master title style</a:t>
             </a:r>
-            <a:endParaRPr lang="en-US"/>
           </a:p>
         </p:txBody>
       </p:sp>
@@ -2141,38 +2141,37 @@
           <a:p>
             <a:pPr lvl="0"/>
             <a:r>
-              <a:rPr lang="en-US" smtClean="0"/>
+              <a:rPr lang="en-US"/>
               <a:t>Click to edit Master text styles</a:t>
             </a:r>
           </a:p>
           <a:p>
             <a:pPr lvl="1"/>
             <a:r>
-              <a:rPr lang="en-US" smtClean="0"/>
+              <a:rPr lang="en-US"/>
               <a:t>Second level</a:t>
             </a:r>
           </a:p>
           <a:p>
             <a:pPr lvl="2"/>
             <a:r>
-              <a:rPr lang="en-US" smtClean="0"/>
+              <a:rPr lang="en-US"/>
               <a:t>Third level</a:t>
             </a:r>
           </a:p>
           <a:p>
             <a:pPr lvl="3"/>
             <a:r>
-              <a:rPr lang="en-US" smtClean="0"/>
+              <a:rPr lang="en-US"/>
               <a:t>Fourth level</a:t>
             </a:r>
           </a:p>
           <a:p>
             <a:pPr lvl="4"/>
             <a:r>
-              <a:rPr lang="en-US" smtClean="0"/>
+              <a:rPr lang="en-US"/>
               <a:t>Fifth level</a:t>
             </a:r>
-            <a:endParaRPr lang="en-US"/>
           </a:p>
         </p:txBody>
       </p:sp>
@@ -2235,7 +2234,7 @@
           <a:p>
             <a:pPr lvl="0"/>
             <a:r>
-              <a:rPr lang="en-US" smtClean="0"/>
+              <a:rPr lang="en-US"/>
               <a:t>Click to edit Master text styles</a:t>
             </a:r>
           </a:p>
@@ -2258,7 +2257,7 @@
           <a:p>
             <a:fld id="{5BCAD085-E8A6-8845-BD4E-CB4CCA059FC4}" type="datetimeFigureOut">
               <a:rPr lang="en-US" smtClean="0"/>
-              <a:t>1/27/13</a:t>
+              <a:t>4/13/26</a:t>
             </a:fld>
             <a:endParaRPr lang="en-US"/>
           </a:p>
@@ -2361,10 +2360,9 @@
           </a:lstStyle>
           <a:p>
             <a:r>
-              <a:rPr lang="en-US" smtClean="0"/>
+              <a:rPr lang="en-US"/>
               <a:t>Click to edit Master title style</a:t>
             </a:r>
-            <a:endParaRPr lang="en-US"/>
           </a:p>
         </p:txBody>
       </p:sp>
@@ -2488,7 +2486,7 @@
           <a:p>
             <a:pPr lvl="0"/>
             <a:r>
-              <a:rPr lang="en-US" smtClean="0"/>
+              <a:rPr lang="en-US"/>
               <a:t>Click to edit Master text styles</a:t>
             </a:r>
           </a:p>
@@ -2511,7 +2509,7 @@
           <a:p>
             <a:fld id="{5BCAD085-E8A6-8845-BD4E-CB4CCA059FC4}" type="datetimeFigureOut">
               <a:rPr lang="en-US" smtClean="0"/>
-              <a:t>1/27/13</a:t>
+              <a:t>4/13/26</a:t>
             </a:fld>
             <a:endParaRPr lang="en-US"/>
           </a:p>
@@ -2620,10 +2618,9 @@
           <a:lstStyle/>
           <a:p>
             <a:r>
-              <a:rPr lang="en-US" smtClean="0"/>
+              <a:rPr lang="en-US"/>
               <a:t>Click to edit Master title style</a:t>
             </a:r>
-            <a:endParaRPr lang="en-US"/>
           </a:p>
         </p:txBody>
       </p:sp>
@@ -2654,38 +2651,37 @@
           <a:p>
             <a:pPr lvl="0"/>
             <a:r>
-              <a:rPr lang="en-US" smtClean="0"/>
+              <a:rPr lang="en-US"/>
               <a:t>Click to edit Master text styles</a:t>
             </a:r>
           </a:p>
           <a:p>
             <a:pPr lvl="1"/>
             <a:r>
-              <a:rPr lang="en-US" smtClean="0"/>
+              <a:rPr lang="en-US"/>
               <a:t>Second level</a:t>
             </a:r>
           </a:p>
           <a:p>
             <a:pPr lvl="2"/>
             <a:r>
-              <a:rPr lang="en-US" smtClean="0"/>
+              <a:rPr lang="en-US"/>
               <a:t>Third level</a:t>
             </a:r>
           </a:p>
           <a:p>
             <a:pPr lvl="3"/>
             <a:r>
-              <a:rPr lang="en-US" smtClean="0"/>
+              <a:rPr lang="en-US"/>
               <a:t>Fourth level</a:t>
             </a:r>
           </a:p>
           <a:p>
             <a:pPr lvl="4"/>
             <a:r>
-              <a:rPr lang="en-US" smtClean="0"/>
+              <a:rPr lang="en-US"/>
               <a:t>Fifth level</a:t>
             </a:r>
-            <a:endParaRPr lang="en-US"/>
           </a:p>
         </p:txBody>
       </p:sp>
@@ -2724,7 +2720,7 @@
           <a:p>
             <a:fld id="{5BCAD085-E8A6-8845-BD4E-CB4CCA059FC4}" type="datetimeFigureOut">
               <a:rPr lang="en-US" smtClean="0"/>
-              <a:t>1/27/13</a:t>
+              <a:t>4/13/26</a:t>
             </a:fld>
             <a:endParaRPr lang="en-US"/>
           </a:p>
@@ -3083,7 +3079,7 @@
 </file>
 
 <file path=ppt/slides/slide1.xml><?xml version="1.0" encoding="utf-8"?>
-<p:sld xmlns:a="http://schemas.openxmlformats.org/drawingml/2006/main" xmlns:p="http://schemas.openxmlformats.org/presentationml/2006/main" xmlns:r="http://schemas.openxmlformats.org/officeDocument/2006/relationships">
+<p:sld xmlns:a="http://schemas.openxmlformats.org/drawingml/2006/main" xmlns:r="http://schemas.openxmlformats.org/officeDocument/2006/relationships" xmlns:p="http://schemas.openxmlformats.org/presentationml/2006/main">
   <p:cSld>
     <p:spTree>
       <p:nvGrpSpPr>
@@ -3091,7 +3087,14 @@
         <p:cNvGrpSpPr/>
         <p:nvPr/>
       </p:nvGrpSpPr>
-      <p:grpSpPr/>
+      <p:grpSpPr>
+        <a:xfrm>
+          <a:off x="0" y="0"/>
+          <a:ext cx="0" cy="0"/>
+          <a:chOff x="0" y="0"/>
+          <a:chExt cx="0" cy="0"/>
+        </a:xfrm>
+      </p:grpSpPr>
       <p:sp>
         <p:nvSpPr>
           <p:cNvPr id="2" name="Rectangle 1"/>
@@ -3132,6 +3135,7 @@
           <a:lstStyle/>
           <a:p>
             <a:pPr algn="ctr"/>
+            <a:endParaRPr/>
           </a:p>
         </p:txBody>
       </p:sp>
@@ -3190,8 +3194,8 @@
         </p:nvSpPr>
         <p:spPr>
           <a:xfrm>
-            <a:off x="731520" y="3611880"/>
-            <a:ext cx="7680960" cy="1463040"/>
+            <a:off x="2618196" y="3611880"/>
+            <a:ext cx="3907608" cy="892552"/>
           </a:xfrm>
           <a:prstGeom prst="rect">
             <a:avLst/>
@@ -3212,6 +3216,7 @@
               </a:defRPr>
             </a:pPr>
             <a:r>
+              <a:rPr dirty="0"/>
               <a:t>Wasiullah Khan</a:t>
             </a:r>
           </a:p>
@@ -3224,7 +3229,12 @@
               </a:defRPr>
             </a:pPr>
             <a:r>
-              <a:t>Scalable Cloud Programming · x24217760</a:t>
+              <a:rPr lang="en-US" dirty="0"/>
+              <a:t>Fog and Edge Computing</a:t>
+            </a:r>
+            <a:r>
+              <a:rPr dirty="0"/>
+              <a:t>· x24217760</a:t>
             </a:r>
           </a:p>
           <a:p>
@@ -3236,6 +3246,7 @@
               </a:defRPr>
             </a:pPr>
             <a:r>
+              <a:rPr dirty="0"/>
               <a:t>National College of Ireland · Fog &amp; Edge Computing</a:t>
             </a:r>
           </a:p>
@@ -3285,7 +3296,7 @@
 </file>
 
 <file path=ppt/slides/slide2.xml><?xml version="1.0" encoding="utf-8"?>
-<p:sld xmlns:a="http://schemas.openxmlformats.org/drawingml/2006/main" xmlns:p="http://schemas.openxmlformats.org/presentationml/2006/main" xmlns:r="http://schemas.openxmlformats.org/officeDocument/2006/relationships">
+<p:sld xmlns:a="http://schemas.openxmlformats.org/drawingml/2006/main" xmlns:r="http://schemas.openxmlformats.org/officeDocument/2006/relationships" xmlns:p="http://schemas.openxmlformats.org/presentationml/2006/main">
   <p:cSld>
     <p:spTree>
       <p:nvGrpSpPr>
@@ -3293,7 +3304,14 @@
         <p:cNvGrpSpPr/>
         <p:nvPr/>
       </p:nvGrpSpPr>
-      <p:grpSpPr/>
+      <p:grpSpPr>
+        <a:xfrm>
+          <a:off x="0" y="0"/>
+          <a:ext cx="0" cy="0"/>
+          <a:chOff x="0" y="0"/>
+          <a:chExt cx="0" cy="0"/>
+        </a:xfrm>
+      </p:grpSpPr>
       <p:sp>
         <p:nvSpPr>
           <p:cNvPr id="2" name="Rectangle 1"/>
@@ -3330,7 +3348,7 @@
           </a:fontRef>
         </p:style>
         <p:txBody>
-          <a:bodyPr rtlCol="0" anchor="ctr" lIns="457200"/>
+          <a:bodyPr lIns="457200" rtlCol="0" anchor="ctr"/>
           <a:lstStyle/>
           <a:p>
             <a:pPr algn="ctr">
@@ -3438,7 +3456,7 @@
 </file>
 
 <file path=ppt/slides/slide3.xml><?xml version="1.0" encoding="utf-8"?>
-<p:sld xmlns:a="http://schemas.openxmlformats.org/drawingml/2006/main" xmlns:p="http://schemas.openxmlformats.org/presentationml/2006/main" xmlns:r="http://schemas.openxmlformats.org/officeDocument/2006/relationships">
+<p:sld xmlns:a="http://schemas.openxmlformats.org/drawingml/2006/main" xmlns:r="http://schemas.openxmlformats.org/officeDocument/2006/relationships" xmlns:p="http://schemas.openxmlformats.org/presentationml/2006/main">
   <p:cSld>
     <p:spTree>
       <p:nvGrpSpPr>
@@ -3446,7 +3464,14 @@
         <p:cNvGrpSpPr/>
         <p:nvPr/>
       </p:nvGrpSpPr>
-      <p:grpSpPr/>
+      <p:grpSpPr>
+        <a:xfrm>
+          <a:off x="0" y="0"/>
+          <a:ext cx="0" cy="0"/>
+          <a:chOff x="0" y="0"/>
+          <a:chExt cx="0" cy="0"/>
+        </a:xfrm>
+      </p:grpSpPr>
       <p:sp>
         <p:nvSpPr>
           <p:cNvPr id="2" name="Rectangle 1"/>
@@ -3483,7 +3508,7 @@
           </a:fontRef>
         </p:style>
         <p:txBody>
-          <a:bodyPr rtlCol="0" anchor="ctr" lIns="457200"/>
+          <a:bodyPr lIns="457200" rtlCol="0" anchor="ctr"/>
           <a:lstStyle/>
           <a:p>
             <a:pPr algn="ctr">
@@ -3494,6 +3519,7 @@
               </a:defRPr>
             </a:pPr>
             <a:r>
+              <a:rPr lang="en-IN"/>
               <a:t>End-to-end architecture</a:t>
             </a:r>
           </a:p>
@@ -3507,8 +3533,8 @@
         </p:nvSpPr>
         <p:spPr>
           <a:xfrm>
-            <a:off x="502920" y="960120"/>
-            <a:ext cx="8138160" cy="5394960"/>
+            <a:off x="447835" y="1136390"/>
+            <a:ext cx="4994497" cy="3477875"/>
           </a:xfrm>
           <a:prstGeom prst="rect">
             <a:avLst/>
@@ -3532,6 +3558,7 @@
               </a:defRPr>
             </a:pPr>
             <a:r>
+              <a:rPr lang="en-IN" dirty="0"/>
               <a:t>Edge: synthetic multi-signal readings (zones / bins) as NDJSON.</a:t>
             </a:r>
           </a:p>
@@ -3547,7 +3574,16 @@
               </a:defRPr>
             </a:pPr>
             <a:r>
-              <a:t>Fog: moving-average smoothing → priority score → statuses (e.g. warning, fire_risk) → versioned JSON POST.</a:t>
+              <a:rPr lang="en-IN" dirty="0"/>
+              <a:t>Fog: moving-average smoothing → priority score → statuses (e.g. warning, </a:t>
+            </a:r>
+            <a:r>
+              <a:rPr lang="en-IN" dirty="0" err="1"/>
+              <a:t>fire_risk</a:t>
+            </a:r>
+            <a:r>
+              <a:rPr lang="en-IN" dirty="0"/>
+              <a:t>) → versioned JSON POST.</a:t>
             </a:r>
           </a:p>
           <a:p>
@@ -3562,6 +3598,7 @@
               </a:defRPr>
             </a:pPr>
             <a:r>
+              <a:rPr lang="en-IN" dirty="0"/>
               <a:t>Cloud: API Gateway → ingest Lambda → SQS → processor Lambda → DynamoDB (history + latest + zone GSI).</a:t>
             </a:r>
           </a:p>
@@ -3577,11 +3614,42 @@
               </a:defRPr>
             </a:pPr>
             <a:r>
+              <a:rPr lang="en-IN" dirty="0"/>
               <a:t>Read: dedicated Lambda for REST; React SPA on Amplify polls fleet / detail / critical views.</a:t>
             </a:r>
           </a:p>
         </p:txBody>
       </p:sp>
+      <p:pic>
+        <p:nvPicPr>
+          <p:cNvPr id="4" name="Picture 3">
+            <a:extLst>
+              <a:ext uri="{FF2B5EF4-FFF2-40B4-BE49-F238E27FC236}">
+                <a16:creationId xmlns:a16="http://schemas.microsoft.com/office/drawing/2014/main" id="{775F297E-A72A-4633-BA14-FBFC4F8EFD4E}"/>
+              </a:ext>
+            </a:extLst>
+          </p:cNvPr>
+          <p:cNvPicPr>
+            <a:picLocks noChangeAspect="1"/>
+          </p:cNvPicPr>
+          <p:nvPr/>
+        </p:nvPicPr>
+        <p:blipFill>
+          <a:blip r:embed="rId2"/>
+          <a:stretch>
+            <a:fillRect/>
+          </a:stretch>
+        </p:blipFill>
+        <p:spPr>
+          <a:xfrm>
+            <a:off x="5695720" y="777239"/>
+            <a:ext cx="3448280" cy="6080761"/>
+          </a:xfrm>
+          <a:prstGeom prst="rect">
+            <a:avLst/>
+          </a:prstGeom>
+        </p:spPr>
+      </p:pic>
     </p:spTree>
   </p:cSld>
   <p:clrMapOvr>
@@ -3591,7 +3659,102 @@
 </file>
 
 <file path=ppt/slides/slide4.xml><?xml version="1.0" encoding="utf-8"?>
-<p:sld xmlns:a="http://schemas.openxmlformats.org/drawingml/2006/main" xmlns:p="http://schemas.openxmlformats.org/presentationml/2006/main" xmlns:r="http://schemas.openxmlformats.org/officeDocument/2006/relationships">
+<p:sld xmlns:a="http://schemas.openxmlformats.org/drawingml/2006/main" xmlns:r="http://schemas.openxmlformats.org/officeDocument/2006/relationships" xmlns:p="http://schemas.openxmlformats.org/presentationml/2006/main">
+  <p:cSld>
+    <p:spTree>
+      <p:nvGrpSpPr>
+        <p:cNvPr id="1" name="">
+          <a:extLst>
+            <a:ext uri="{FF2B5EF4-FFF2-40B4-BE49-F238E27FC236}">
+              <a16:creationId xmlns:a16="http://schemas.microsoft.com/office/drawing/2014/main" id="{BEBA5A75-B93F-3714-2E2D-4FE1E960EC68}"/>
+            </a:ext>
+          </a:extLst>
+        </p:cNvPr>
+        <p:cNvGrpSpPr/>
+        <p:nvPr/>
+      </p:nvGrpSpPr>
+      <p:grpSpPr>
+        <a:xfrm>
+          <a:off x="0" y="0"/>
+          <a:ext cx="0" cy="0"/>
+          <a:chOff x="0" y="0"/>
+          <a:chExt cx="0" cy="0"/>
+        </a:xfrm>
+      </p:grpSpPr>
+      <p:sp>
+        <p:nvSpPr>
+          <p:cNvPr id="2" name="Rectangle 1">
+            <a:extLst>
+              <a:ext uri="{FF2B5EF4-FFF2-40B4-BE49-F238E27FC236}">
+                <a16:creationId xmlns:a16="http://schemas.microsoft.com/office/drawing/2014/main" id="{30214956-E43C-7DA3-8077-7071F6FB46FF}"/>
+              </a:ext>
+            </a:extLst>
+          </p:cNvPr>
+          <p:cNvSpPr/>
+          <p:nvPr/>
+        </p:nvSpPr>
+        <p:spPr>
+          <a:xfrm>
+            <a:off x="0" y="2651761"/>
+            <a:ext cx="9144000" cy="777239"/>
+          </a:xfrm>
+          <a:prstGeom prst="rect">
+            <a:avLst/>
+          </a:prstGeom>
+          <a:solidFill>
+            <a:srgbClr val="00696B"/>
+          </a:solidFill>
+          <a:ln>
+            <a:noFill/>
+          </a:ln>
+        </p:spPr>
+        <p:style>
+          <a:lnRef idx="1">
+            <a:schemeClr val="accent1"/>
+          </a:lnRef>
+          <a:fillRef idx="3">
+            <a:schemeClr val="accent1"/>
+          </a:fillRef>
+          <a:effectRef idx="2">
+            <a:schemeClr val="accent1"/>
+          </a:effectRef>
+          <a:fontRef idx="minor">
+            <a:schemeClr val="lt1"/>
+          </a:fontRef>
+        </p:style>
+        <p:txBody>
+          <a:bodyPr lIns="457200" rtlCol="0" anchor="ctr"/>
+          <a:lstStyle/>
+          <a:p>
+            <a:pPr algn="ctr">
+              <a:defRPr sz="2400" b="1">
+                <a:solidFill>
+                  <a:srgbClr val="FFFFFF"/>
+                </a:solidFill>
+              </a:defRPr>
+            </a:pPr>
+            <a:r>
+              <a:rPr lang="en-IN" dirty="0"/>
+              <a:t>Project --- DEMO</a:t>
+            </a:r>
+          </a:p>
+        </p:txBody>
+      </p:sp>
+    </p:spTree>
+    <p:extLst>
+      <p:ext uri="{BB962C8B-B14F-4D97-AF65-F5344CB8AC3E}">
+        <p14:creationId xmlns:p14="http://schemas.microsoft.com/office/powerpoint/2010/main" val="1459694698"/>
+      </p:ext>
+    </p:extLst>
+  </p:cSld>
+  <p:clrMapOvr>
+    <a:masterClrMapping/>
+  </p:clrMapOvr>
+</p:sld>
+</file>
+
+<file path=ppt/slides/slide5.xml><?xml version="1.0" encoding="utf-8"?>
+<p:sld xmlns:a="http://schemas.openxmlformats.org/drawingml/2006/main" xmlns:r="http://schemas.openxmlformats.org/officeDocument/2006/relationships" xmlns:p="http://schemas.openxmlformats.org/presentationml/2006/main">
   <p:cSld>
     <p:spTree>
       <p:nvGrpSpPr>
@@ -3599,7 +3762,14 @@
         <p:cNvGrpSpPr/>
         <p:nvPr/>
       </p:nvGrpSpPr>
-      <p:grpSpPr/>
+      <p:grpSpPr>
+        <a:xfrm>
+          <a:off x="0" y="0"/>
+          <a:ext cx="0" cy="0"/>
+          <a:chOff x="0" y="0"/>
+          <a:chExt cx="0" cy="0"/>
+        </a:xfrm>
+      </p:grpSpPr>
       <p:sp>
         <p:nvSpPr>
           <p:cNvPr id="2" name="Rectangle 1"/>
@@ -3636,7 +3806,7 @@
           </a:fontRef>
         </p:style>
         <p:txBody>
-          <a:bodyPr rtlCol="0" anchor="ctr" lIns="457200"/>
+          <a:bodyPr lIns="457200" rtlCol="0" anchor="ctr"/>
           <a:lstStyle/>
           <a:p>
             <a:pPr algn="ctr">
@@ -3743,8 +3913,8 @@
 </p:sld>
 </file>
 
-<file path=ppt/slides/slide5.xml><?xml version="1.0" encoding="utf-8"?>
-<p:sld xmlns:a="http://schemas.openxmlformats.org/drawingml/2006/main" xmlns:p="http://schemas.openxmlformats.org/presentationml/2006/main" xmlns:r="http://schemas.openxmlformats.org/officeDocument/2006/relationships">
+<file path=ppt/slides/slide6.xml><?xml version="1.0" encoding="utf-8"?>
+<p:sld xmlns:a="http://schemas.openxmlformats.org/drawingml/2006/main" xmlns:r="http://schemas.openxmlformats.org/officeDocument/2006/relationships" xmlns:p="http://schemas.openxmlformats.org/presentationml/2006/main">
   <p:cSld>
     <p:spTree>
       <p:nvGrpSpPr>
@@ -3752,7 +3922,14 @@
         <p:cNvGrpSpPr/>
         <p:nvPr/>
       </p:nvGrpSpPr>
-      <p:grpSpPr/>
+      <p:grpSpPr>
+        <a:xfrm>
+          <a:off x="0" y="0"/>
+          <a:ext cx="0" cy="0"/>
+          <a:chOff x="0" y="0"/>
+          <a:chExt cx="0" cy="0"/>
+        </a:xfrm>
+      </p:grpSpPr>
       <p:sp>
         <p:nvSpPr>
           <p:cNvPr id="2" name="Rectangle 1"/>
@@ -3789,7 +3966,7 @@
           </a:fontRef>
         </p:style>
         <p:txBody>
-          <a:bodyPr rtlCol="0" anchor="ctr" lIns="457200"/>
+          <a:bodyPr lIns="457200" rtlCol="0" anchor="ctr"/>
           <a:lstStyle/>
           <a:p>
             <a:pPr algn="ctr">
@@ -3882,7 +4059,7 @@
         <p:spPr>
           <a:xfrm>
             <a:off x="502920" y="4617720"/>
-            <a:ext cx="8138160" cy="1828800"/>
+            <a:ext cx="8138160" cy="1092607"/>
           </a:xfrm>
           <a:prstGeom prst="rect">
             <a:avLst/>
@@ -3895,6 +4072,39 @@
           </a:bodyPr>
           <a:lstStyle/>
           <a:p>
+            <a:r>
+              <a:rPr dirty="0"/>
+              <a:t>Links</a:t>
+            </a:r>
+            <a:br>
+              <a:rPr lang="en-US" dirty="0"/>
+            </a:br>
+            <a:r>
+              <a:rPr lang="en-IN" sz="1100" dirty="0"/>
+              <a:t>Deployed App: https://main.d12jcq31pcipw0.amplifyapp.com/</a:t>
+            </a:r>
+          </a:p>
+          <a:p>
+            <a:r>
+              <a:rPr lang="en-IN" sz="1100" dirty="0"/>
+              <a:t>Base API URL: https://zzxm3e4tq1.execute-api.us-east-1.amazonaws.com</a:t>
+            </a:r>
+          </a:p>
+          <a:p>
+            <a:r>
+              <a:rPr lang="en-IN" sz="1100" dirty="0"/>
+              <a:t>GitHub URL: https://</a:t>
+            </a:r>
+            <a:r>
+              <a:rPr lang="en-IN" sz="1100" dirty="0" err="1"/>
+              <a:t>github.com</a:t>
+            </a:r>
+            <a:r>
+              <a:rPr lang="en-IN" sz="1100" dirty="0"/>
+              <a:t>/Wasiullah26/Smart-waste-bin</a:t>
+            </a:r>
+          </a:p>
+          <a:p>
             <a:pPr>
               <a:defRPr sz="1400" b="1">
                 <a:solidFill>
@@ -3902,45 +4112,7 @@
                 </a:solidFill>
               </a:defRPr>
             </a:pPr>
-            <a:r>
-              <a:t>Links</a:t>
-            </a:r>
-          </a:p>
-          <a:p>
-            <a:pPr>
-              <a:defRPr sz="1100">
-                <a:solidFill>
-                  <a:srgbClr val="54606E"/>
-                </a:solidFill>
-              </a:defRPr>
-            </a:pPr>
-            <a:r>
-              <a:t>Dashboard: https://main.d25pgvgew92bxj.amplifyapp.com</a:t>
-            </a:r>
-          </a:p>
-          <a:p>
-            <a:pPr>
-              <a:defRPr sz="1100">
-                <a:solidFill>
-                  <a:srgbClr val="54606E"/>
-                </a:solidFill>
-              </a:defRPr>
-            </a:pPr>
-            <a:r>
-              <a:t>API: https://t3jb8c44xi.execute-api.us-east-1.amazonaws.com</a:t>
-            </a:r>
-          </a:p>
-          <a:p>
-            <a:pPr>
-              <a:defRPr sz="1100">
-                <a:solidFill>
-                  <a:srgbClr val="54606E"/>
-                </a:solidFill>
-              </a:defRPr>
-            </a:pPr>
-            <a:r>
-              <a:t>GitHub: https://github.com/Wasiullah26/scalable-cloud-project</a:t>
-            </a:r>
+            <a:endParaRPr dirty="0"/>
           </a:p>
         </p:txBody>
       </p:sp>

--- a/docs/FogEdge_5min_Presentation.pptx
+++ b/docs/FogEdge_5min_Presentation.pptx
@@ -9,9 +9,8 @@
     <p:sldId id="257" r:id="rId3"/>
     <p:sldId id="262" r:id="rId4"/>
     <p:sldId id="263" r:id="rId5"/>
-    <p:sldId id="261" r:id="rId6"/>
-    <p:sldId id="259" r:id="rId7"/>
-    <p:sldId id="260" r:id="rId8"/>
+    <p:sldId id="259" r:id="rId6"/>
+    <p:sldId id="261" r:id="rId7"/>
   </p:sldIdLst>
   <p:sldSz cx="9144000" cy="6858000" type="screen4x3"/>
   <p:notesSz cx="6858000" cy="9144000"/>
@@ -2511,6 +2510,788 @@
     <dgm:fillClrLst meth="repeat">
       <a:schemeClr val="accent1">
         <a:tint val="60000"/>
+      </a:schemeClr>
+    </dgm:fillClrLst>
+    <dgm:linClrLst meth="repeat">
+      <a:schemeClr val="lt1"/>
+    </dgm:linClrLst>
+    <dgm:effectClrLst/>
+    <dgm:txLinClrLst/>
+    <dgm:txFillClrLst meth="repeat">
+      <a:schemeClr val="dk1"/>
+    </dgm:txFillClrLst>
+    <dgm:txEffectClrLst/>
+  </dgm:styleLbl>
+  <dgm:styleLbl name="revTx">
+    <dgm:fillClrLst meth="repeat">
+      <a:schemeClr val="lt1">
+        <a:alpha val="0"/>
+      </a:schemeClr>
+    </dgm:fillClrLst>
+    <dgm:linClrLst meth="repeat">
+      <a:schemeClr val="dk1">
+        <a:alpha val="0"/>
+      </a:schemeClr>
+    </dgm:linClrLst>
+    <dgm:effectClrLst/>
+    <dgm:txLinClrLst/>
+    <dgm:txFillClrLst meth="repeat">
+      <a:schemeClr val="tx1"/>
+    </dgm:txFillClrLst>
+    <dgm:txEffectClrLst/>
+  </dgm:styleLbl>
+</dgm:colorsDef>
+</file>
+
+<file path=ppt/diagrams/colors4.xml><?xml version="1.0" encoding="utf-8"?>
+<dgm:colorsDef xmlns:dgm="http://schemas.openxmlformats.org/drawingml/2006/diagram" xmlns:a="http://schemas.openxmlformats.org/drawingml/2006/main" uniqueId="urn:microsoft.com/office/officeart/2005/8/colors/colorful2">
+  <dgm:title val=""/>
+  <dgm:desc val=""/>
+  <dgm:catLst>
+    <dgm:cat type="colorful" pri="10200"/>
+  </dgm:catLst>
+  <dgm:styleLbl name="node0">
+    <dgm:fillClrLst meth="repeat">
+      <a:schemeClr val="accent1"/>
+    </dgm:fillClrLst>
+    <dgm:linClrLst meth="repeat">
+      <a:schemeClr val="lt1"/>
+    </dgm:linClrLst>
+    <dgm:effectClrLst/>
+    <dgm:txLinClrLst/>
+    <dgm:txFillClrLst/>
+    <dgm:txEffectClrLst/>
+  </dgm:styleLbl>
+  <dgm:styleLbl name="node1">
+    <dgm:fillClrLst>
+      <a:schemeClr val="accent2"/>
+      <a:schemeClr val="accent3"/>
+    </dgm:fillClrLst>
+    <dgm:linClrLst meth="repeat">
+      <a:schemeClr val="lt1"/>
+    </dgm:linClrLst>
+    <dgm:effectClrLst/>
+    <dgm:txLinClrLst/>
+    <dgm:txFillClrLst/>
+    <dgm:txEffectClrLst/>
+  </dgm:styleLbl>
+  <dgm:styleLbl name="alignNode1">
+    <dgm:fillClrLst>
+      <a:schemeClr val="accent2"/>
+      <a:schemeClr val="accent3"/>
+    </dgm:fillClrLst>
+    <dgm:linClrLst>
+      <a:schemeClr val="accent2"/>
+      <a:schemeClr val="accent3"/>
+    </dgm:linClrLst>
+    <dgm:effectClrLst/>
+    <dgm:txLinClrLst/>
+    <dgm:txFillClrLst/>
+    <dgm:txEffectClrLst/>
+  </dgm:styleLbl>
+  <dgm:styleLbl name="lnNode1">
+    <dgm:fillClrLst>
+      <a:schemeClr val="accent2"/>
+      <a:schemeClr val="accent3"/>
+    </dgm:fillClrLst>
+    <dgm:linClrLst meth="repeat">
+      <a:schemeClr val="lt1"/>
+    </dgm:linClrLst>
+    <dgm:effectClrLst/>
+    <dgm:txLinClrLst/>
+    <dgm:txFillClrLst/>
+    <dgm:txEffectClrLst/>
+  </dgm:styleLbl>
+  <dgm:styleLbl name="vennNode1">
+    <dgm:fillClrLst>
+      <a:schemeClr val="accent2">
+        <a:alpha val="50000"/>
+      </a:schemeClr>
+      <a:schemeClr val="accent3">
+        <a:alpha val="50000"/>
+      </a:schemeClr>
+    </dgm:fillClrLst>
+    <dgm:linClrLst meth="repeat">
+      <a:schemeClr val="lt1"/>
+    </dgm:linClrLst>
+    <dgm:effectClrLst/>
+    <dgm:txLinClrLst/>
+    <dgm:txFillClrLst/>
+    <dgm:txEffectClrLst/>
+  </dgm:styleLbl>
+  <dgm:styleLbl name="node2">
+    <dgm:fillClrLst>
+      <a:schemeClr val="accent3"/>
+    </dgm:fillClrLst>
+    <dgm:linClrLst meth="repeat">
+      <a:schemeClr val="lt1"/>
+    </dgm:linClrLst>
+    <dgm:effectClrLst/>
+    <dgm:txLinClrLst/>
+    <dgm:txFillClrLst/>
+    <dgm:txEffectClrLst/>
+  </dgm:styleLbl>
+  <dgm:styleLbl name="node3">
+    <dgm:fillClrLst>
+      <a:schemeClr val="accent4"/>
+    </dgm:fillClrLst>
+    <dgm:linClrLst meth="repeat">
+      <a:schemeClr val="lt1"/>
+    </dgm:linClrLst>
+    <dgm:effectClrLst/>
+    <dgm:txLinClrLst/>
+    <dgm:txFillClrLst/>
+    <dgm:txEffectClrLst/>
+  </dgm:styleLbl>
+  <dgm:styleLbl name="node4">
+    <dgm:fillClrLst>
+      <a:schemeClr val="accent5"/>
+    </dgm:fillClrLst>
+    <dgm:linClrLst meth="repeat">
+      <a:schemeClr val="lt1"/>
+    </dgm:linClrLst>
+    <dgm:effectClrLst/>
+    <dgm:txLinClrLst/>
+    <dgm:txFillClrLst/>
+    <dgm:txEffectClrLst/>
+  </dgm:styleLbl>
+  <dgm:styleLbl name="fgImgPlace1">
+    <dgm:fillClrLst>
+      <a:schemeClr val="accent2">
+        <a:tint val="50000"/>
+      </a:schemeClr>
+      <a:schemeClr val="accent3">
+        <a:tint val="50000"/>
+      </a:schemeClr>
+    </dgm:fillClrLst>
+    <dgm:linClrLst meth="repeat">
+      <a:schemeClr val="lt1"/>
+    </dgm:linClrLst>
+    <dgm:effectClrLst/>
+    <dgm:txLinClrLst/>
+    <dgm:txFillClrLst meth="repeat">
+      <a:schemeClr val="lt1"/>
+    </dgm:txFillClrLst>
+    <dgm:txEffectClrLst/>
+  </dgm:styleLbl>
+  <dgm:styleLbl name="alignImgPlace1">
+    <dgm:fillClrLst>
+      <a:schemeClr val="accent2">
+        <a:tint val="50000"/>
+      </a:schemeClr>
+      <a:schemeClr val="accent3">
+        <a:tint val="20000"/>
+      </a:schemeClr>
+    </dgm:fillClrLst>
+    <dgm:linClrLst meth="repeat">
+      <a:schemeClr val="lt1"/>
+    </dgm:linClrLst>
+    <dgm:effectClrLst/>
+    <dgm:txLinClrLst/>
+    <dgm:txFillClrLst meth="repeat">
+      <a:schemeClr val="lt1"/>
+    </dgm:txFillClrLst>
+    <dgm:txEffectClrLst/>
+  </dgm:styleLbl>
+  <dgm:styleLbl name="bgImgPlace1">
+    <dgm:fillClrLst>
+      <a:schemeClr val="accent2">
+        <a:tint val="50000"/>
+      </a:schemeClr>
+      <a:schemeClr val="accent3">
+        <a:tint val="20000"/>
+      </a:schemeClr>
+    </dgm:fillClrLst>
+    <dgm:linClrLst meth="repeat">
+      <a:schemeClr val="lt1"/>
+    </dgm:linClrLst>
+    <dgm:effectClrLst/>
+    <dgm:txLinClrLst/>
+    <dgm:txFillClrLst meth="repeat">
+      <a:schemeClr val="lt1"/>
+    </dgm:txFillClrLst>
+    <dgm:txEffectClrLst/>
+  </dgm:styleLbl>
+  <dgm:styleLbl name="sibTrans2D1">
+    <dgm:fillClrLst>
+      <a:schemeClr val="accent2"/>
+      <a:schemeClr val="accent3"/>
+    </dgm:fillClrLst>
+    <dgm:linClrLst meth="repeat">
+      <a:schemeClr val="lt1"/>
+    </dgm:linClrLst>
+    <dgm:effectClrLst/>
+    <dgm:txLinClrLst/>
+    <dgm:txFillClrLst/>
+    <dgm:txEffectClrLst/>
+  </dgm:styleLbl>
+  <dgm:styleLbl name="fgSibTrans2D1">
+    <dgm:fillClrLst>
+      <a:schemeClr val="accent2"/>
+      <a:schemeClr val="accent3"/>
+    </dgm:fillClrLst>
+    <dgm:linClrLst meth="repeat">
+      <a:schemeClr val="lt1"/>
+    </dgm:linClrLst>
+    <dgm:effectClrLst/>
+    <dgm:txLinClrLst/>
+    <dgm:txFillClrLst meth="repeat">
+      <a:schemeClr val="lt1"/>
+    </dgm:txFillClrLst>
+    <dgm:txEffectClrLst/>
+  </dgm:styleLbl>
+  <dgm:styleLbl name="bgSibTrans2D1">
+    <dgm:fillClrLst>
+      <a:schemeClr val="accent2"/>
+      <a:schemeClr val="accent3"/>
+    </dgm:fillClrLst>
+    <dgm:linClrLst meth="repeat">
+      <a:schemeClr val="lt1"/>
+    </dgm:linClrLst>
+    <dgm:effectClrLst/>
+    <dgm:txLinClrLst/>
+    <dgm:txFillClrLst meth="repeat">
+      <a:schemeClr val="lt1"/>
+    </dgm:txFillClrLst>
+    <dgm:txEffectClrLst/>
+  </dgm:styleLbl>
+  <dgm:styleLbl name="sibTrans1D1">
+    <dgm:fillClrLst/>
+    <dgm:linClrLst>
+      <a:schemeClr val="accent2"/>
+      <a:schemeClr val="accent3"/>
+    </dgm:linClrLst>
+    <dgm:effectClrLst/>
+    <dgm:txLinClrLst/>
+    <dgm:txFillClrLst meth="repeat">
+      <a:schemeClr val="tx1"/>
+    </dgm:txFillClrLst>
+    <dgm:txEffectClrLst/>
+  </dgm:styleLbl>
+  <dgm:styleLbl name="callout">
+    <dgm:fillClrLst meth="repeat">
+      <a:schemeClr val="accent2"/>
+    </dgm:fillClrLst>
+    <dgm:linClrLst meth="repeat">
+      <a:schemeClr val="accent2">
+        <a:tint val="50000"/>
+      </a:schemeClr>
+    </dgm:linClrLst>
+    <dgm:effectClrLst/>
+    <dgm:txLinClrLst/>
+    <dgm:txFillClrLst meth="repeat">
+      <a:schemeClr val="tx1"/>
+    </dgm:txFillClrLst>
+    <dgm:txEffectClrLst/>
+  </dgm:styleLbl>
+  <dgm:styleLbl name="asst0">
+    <dgm:fillClrLst meth="repeat">
+      <a:schemeClr val="accent2"/>
+    </dgm:fillClrLst>
+    <dgm:linClrLst meth="repeat">
+      <a:schemeClr val="lt1">
+        <a:shade val="80000"/>
+      </a:schemeClr>
+    </dgm:linClrLst>
+    <dgm:effectClrLst/>
+    <dgm:txLinClrLst/>
+    <dgm:txFillClrLst/>
+    <dgm:txEffectClrLst/>
+  </dgm:styleLbl>
+  <dgm:styleLbl name="asst1">
+    <dgm:fillClrLst meth="repeat">
+      <a:schemeClr val="accent3"/>
+    </dgm:fillClrLst>
+    <dgm:linClrLst meth="repeat">
+      <a:schemeClr val="lt1">
+        <a:shade val="80000"/>
+      </a:schemeClr>
+    </dgm:linClrLst>
+    <dgm:effectClrLst/>
+    <dgm:txLinClrLst/>
+    <dgm:txFillClrLst/>
+    <dgm:txEffectClrLst/>
+  </dgm:styleLbl>
+  <dgm:styleLbl name="asst2">
+    <dgm:fillClrLst>
+      <a:schemeClr val="accent4"/>
+    </dgm:fillClrLst>
+    <dgm:linClrLst meth="repeat">
+      <a:schemeClr val="lt1"/>
+    </dgm:linClrLst>
+    <dgm:effectClrLst/>
+    <dgm:txLinClrLst/>
+    <dgm:txFillClrLst/>
+    <dgm:txEffectClrLst/>
+  </dgm:styleLbl>
+  <dgm:styleLbl name="asst3">
+    <dgm:fillClrLst>
+      <a:schemeClr val="accent5"/>
+    </dgm:fillClrLst>
+    <dgm:linClrLst meth="repeat">
+      <a:schemeClr val="lt1"/>
+    </dgm:linClrLst>
+    <dgm:effectClrLst/>
+    <dgm:txLinClrLst/>
+    <dgm:txFillClrLst/>
+    <dgm:txEffectClrLst/>
+  </dgm:styleLbl>
+  <dgm:styleLbl name="asst4">
+    <dgm:fillClrLst>
+      <a:schemeClr val="accent6"/>
+    </dgm:fillClrLst>
+    <dgm:linClrLst meth="repeat">
+      <a:schemeClr val="lt1"/>
+    </dgm:linClrLst>
+    <dgm:effectClrLst/>
+    <dgm:txLinClrLst/>
+    <dgm:txFillClrLst/>
+    <dgm:txEffectClrLst/>
+  </dgm:styleLbl>
+  <dgm:styleLbl name="parChTrans2D1">
+    <dgm:fillClrLst meth="repeat">
+      <a:schemeClr val="accent2"/>
+    </dgm:fillClrLst>
+    <dgm:linClrLst meth="repeat">
+      <a:schemeClr val="lt1"/>
+    </dgm:linClrLst>
+    <dgm:effectClrLst/>
+    <dgm:txLinClrLst/>
+    <dgm:txFillClrLst meth="repeat">
+      <a:schemeClr val="lt1"/>
+    </dgm:txFillClrLst>
+    <dgm:txEffectClrLst/>
+  </dgm:styleLbl>
+  <dgm:styleLbl name="parChTrans2D2">
+    <dgm:fillClrLst meth="repeat">
+      <a:schemeClr val="accent3"/>
+    </dgm:fillClrLst>
+    <dgm:linClrLst meth="repeat">
+      <a:schemeClr val="lt1"/>
+    </dgm:linClrLst>
+    <dgm:effectClrLst/>
+    <dgm:txLinClrLst/>
+    <dgm:txFillClrLst/>
+    <dgm:txEffectClrLst/>
+  </dgm:styleLbl>
+  <dgm:styleLbl name="parChTrans2D3">
+    <dgm:fillClrLst meth="repeat">
+      <a:schemeClr val="accent4"/>
+    </dgm:fillClrLst>
+    <dgm:linClrLst meth="repeat">
+      <a:schemeClr val="lt1"/>
+    </dgm:linClrLst>
+    <dgm:effectClrLst/>
+    <dgm:txLinClrLst/>
+    <dgm:txFillClrLst/>
+    <dgm:txEffectClrLst/>
+  </dgm:styleLbl>
+  <dgm:styleLbl name="parChTrans2D4">
+    <dgm:fillClrLst meth="repeat">
+      <a:schemeClr val="accent5"/>
+    </dgm:fillClrLst>
+    <dgm:linClrLst meth="repeat">
+      <a:schemeClr val="lt1"/>
+    </dgm:linClrLst>
+    <dgm:effectClrLst/>
+    <dgm:txLinClrLst/>
+    <dgm:txFillClrLst meth="repeat">
+      <a:schemeClr val="lt1"/>
+    </dgm:txFillClrLst>
+    <dgm:txEffectClrLst/>
+  </dgm:styleLbl>
+  <dgm:styleLbl name="parChTrans1D1">
+    <dgm:fillClrLst meth="repeat">
+      <a:schemeClr val="accent2"/>
+    </dgm:fillClrLst>
+    <dgm:linClrLst meth="repeat">
+      <a:schemeClr val="accent2"/>
+    </dgm:linClrLst>
+    <dgm:effectClrLst/>
+    <dgm:txLinClrLst/>
+    <dgm:txFillClrLst meth="repeat">
+      <a:schemeClr val="tx1"/>
+    </dgm:txFillClrLst>
+    <dgm:txEffectClrLst/>
+  </dgm:styleLbl>
+  <dgm:styleLbl name="parChTrans1D2">
+    <dgm:fillClrLst meth="repeat">
+      <a:schemeClr val="accent2">
+        <a:tint val="90000"/>
+      </a:schemeClr>
+    </dgm:fillClrLst>
+    <dgm:linClrLst meth="repeat">
+      <a:schemeClr val="accent3"/>
+    </dgm:linClrLst>
+    <dgm:effectClrLst/>
+    <dgm:txLinClrLst/>
+    <dgm:txFillClrLst meth="repeat">
+      <a:schemeClr val="tx1"/>
+    </dgm:txFillClrLst>
+    <dgm:txEffectClrLst/>
+  </dgm:styleLbl>
+  <dgm:styleLbl name="parChTrans1D3">
+    <dgm:fillClrLst meth="repeat">
+      <a:schemeClr val="accent2">
+        <a:tint val="70000"/>
+      </a:schemeClr>
+    </dgm:fillClrLst>
+    <dgm:linClrLst meth="repeat">
+      <a:schemeClr val="accent4"/>
+    </dgm:linClrLst>
+    <dgm:effectClrLst/>
+    <dgm:txLinClrLst/>
+    <dgm:txFillClrLst meth="repeat">
+      <a:schemeClr val="tx1"/>
+    </dgm:txFillClrLst>
+    <dgm:txEffectClrLst/>
+  </dgm:styleLbl>
+  <dgm:styleLbl name="parChTrans1D4">
+    <dgm:fillClrLst meth="repeat">
+      <a:schemeClr val="accent2">
+        <a:tint val="50000"/>
+      </a:schemeClr>
+    </dgm:fillClrLst>
+    <dgm:linClrLst meth="repeat">
+      <a:schemeClr val="accent5"/>
+    </dgm:linClrLst>
+    <dgm:effectClrLst/>
+    <dgm:txLinClrLst/>
+    <dgm:txFillClrLst meth="repeat">
+      <a:schemeClr val="tx1"/>
+    </dgm:txFillClrLst>
+    <dgm:txEffectClrLst/>
+  </dgm:styleLbl>
+  <dgm:styleLbl name="fgAcc1">
+    <dgm:fillClrLst meth="repeat">
+      <a:schemeClr val="lt1">
+        <a:alpha val="90000"/>
+      </a:schemeClr>
+    </dgm:fillClrLst>
+    <dgm:linClrLst>
+      <a:schemeClr val="accent2"/>
+      <a:schemeClr val="accent3"/>
+    </dgm:linClrLst>
+    <dgm:effectClrLst/>
+    <dgm:txLinClrLst/>
+    <dgm:txFillClrLst meth="repeat">
+      <a:schemeClr val="dk1"/>
+    </dgm:txFillClrLst>
+    <dgm:txEffectClrLst/>
+  </dgm:styleLbl>
+  <dgm:styleLbl name="conFgAcc1">
+    <dgm:fillClrLst meth="repeat">
+      <a:schemeClr val="lt1">
+        <a:alpha val="90000"/>
+      </a:schemeClr>
+    </dgm:fillClrLst>
+    <dgm:linClrLst>
+      <a:schemeClr val="accent2"/>
+      <a:schemeClr val="accent3"/>
+    </dgm:linClrLst>
+    <dgm:effectClrLst/>
+    <dgm:txLinClrLst/>
+    <dgm:txFillClrLst meth="repeat">
+      <a:schemeClr val="dk1"/>
+    </dgm:txFillClrLst>
+    <dgm:txEffectClrLst/>
+  </dgm:styleLbl>
+  <dgm:styleLbl name="alignAcc1">
+    <dgm:fillClrLst meth="repeat">
+      <a:schemeClr val="lt1">
+        <a:alpha val="90000"/>
+      </a:schemeClr>
+    </dgm:fillClrLst>
+    <dgm:linClrLst>
+      <a:schemeClr val="accent2"/>
+      <a:schemeClr val="accent3"/>
+    </dgm:linClrLst>
+    <dgm:effectClrLst/>
+    <dgm:txLinClrLst/>
+    <dgm:txFillClrLst meth="repeat">
+      <a:schemeClr val="dk1"/>
+    </dgm:txFillClrLst>
+    <dgm:txEffectClrLst/>
+  </dgm:styleLbl>
+  <dgm:styleLbl name="trAlignAcc1">
+    <dgm:fillClrLst meth="repeat">
+      <a:schemeClr val="lt1">
+        <a:alpha val="40000"/>
+      </a:schemeClr>
+    </dgm:fillClrLst>
+    <dgm:linClrLst meth="repeat">
+      <a:schemeClr val="accent2"/>
+    </dgm:linClrLst>
+    <dgm:effectClrLst/>
+    <dgm:txLinClrLst/>
+    <dgm:txFillClrLst meth="repeat">
+      <a:schemeClr val="dk1"/>
+    </dgm:txFillClrLst>
+    <dgm:txEffectClrLst/>
+  </dgm:styleLbl>
+  <dgm:styleLbl name="bgAcc1">
+    <dgm:fillClrLst meth="repeat">
+      <a:schemeClr val="lt1">
+        <a:alpha val="90000"/>
+      </a:schemeClr>
+    </dgm:fillClrLst>
+    <dgm:linClrLst>
+      <a:schemeClr val="accent2"/>
+      <a:schemeClr val="accent3"/>
+    </dgm:linClrLst>
+    <dgm:effectClrLst/>
+    <dgm:txLinClrLst/>
+    <dgm:txFillClrLst meth="repeat">
+      <a:schemeClr val="dk1"/>
+    </dgm:txFillClrLst>
+    <dgm:txEffectClrLst/>
+  </dgm:styleLbl>
+  <dgm:styleLbl name="solidFgAcc1">
+    <dgm:fillClrLst meth="repeat">
+      <a:schemeClr val="lt1"/>
+    </dgm:fillClrLst>
+    <dgm:linClrLst>
+      <a:schemeClr val="accent2"/>
+      <a:schemeClr val="accent3"/>
+    </dgm:linClrLst>
+    <dgm:effectClrLst/>
+    <dgm:txLinClrLst/>
+    <dgm:txFillClrLst meth="repeat">
+      <a:schemeClr val="dk1"/>
+    </dgm:txFillClrLst>
+    <dgm:txEffectClrLst/>
+  </dgm:styleLbl>
+  <dgm:styleLbl name="solidAlignAcc1">
+    <dgm:fillClrLst meth="repeat">
+      <a:schemeClr val="lt1"/>
+    </dgm:fillClrLst>
+    <dgm:linClrLst>
+      <a:schemeClr val="accent2"/>
+      <a:schemeClr val="accent3"/>
+    </dgm:linClrLst>
+    <dgm:effectClrLst/>
+    <dgm:txLinClrLst/>
+    <dgm:txFillClrLst meth="repeat">
+      <a:schemeClr val="dk1"/>
+    </dgm:txFillClrLst>
+    <dgm:txEffectClrLst/>
+  </dgm:styleLbl>
+  <dgm:styleLbl name="solidBgAcc1">
+    <dgm:fillClrLst meth="repeat">
+      <a:schemeClr val="lt1"/>
+    </dgm:fillClrLst>
+    <dgm:linClrLst>
+      <a:schemeClr val="accent2"/>
+      <a:schemeClr val="accent3"/>
+    </dgm:linClrLst>
+    <dgm:effectClrLst/>
+    <dgm:txLinClrLst/>
+    <dgm:txFillClrLst meth="repeat">
+      <a:schemeClr val="dk1"/>
+    </dgm:txFillClrLst>
+    <dgm:txEffectClrLst/>
+  </dgm:styleLbl>
+  <dgm:styleLbl name="fgAccFollowNode1">
+    <dgm:fillClrLst>
+      <a:schemeClr val="accent2">
+        <a:tint val="40000"/>
+        <a:alpha val="90000"/>
+      </a:schemeClr>
+      <a:schemeClr val="accent3">
+        <a:tint val="40000"/>
+        <a:alpha val="90000"/>
+      </a:schemeClr>
+    </dgm:fillClrLst>
+    <dgm:linClrLst>
+      <a:schemeClr val="accent2">
+        <a:tint val="40000"/>
+        <a:alpha val="90000"/>
+      </a:schemeClr>
+      <a:schemeClr val="accent3">
+        <a:tint val="40000"/>
+        <a:alpha val="90000"/>
+      </a:schemeClr>
+    </dgm:linClrLst>
+    <dgm:effectClrLst/>
+    <dgm:txLinClrLst/>
+    <dgm:txFillClrLst meth="repeat">
+      <a:schemeClr val="dk1"/>
+    </dgm:txFillClrLst>
+    <dgm:txEffectClrLst/>
+  </dgm:styleLbl>
+  <dgm:styleLbl name="alignAccFollowNode1">
+    <dgm:fillClrLst>
+      <a:schemeClr val="accent2">
+        <a:tint val="40000"/>
+        <a:alpha val="90000"/>
+      </a:schemeClr>
+      <a:schemeClr val="accent3">
+        <a:tint val="40000"/>
+        <a:alpha val="90000"/>
+      </a:schemeClr>
+    </dgm:fillClrLst>
+    <dgm:linClrLst>
+      <a:schemeClr val="accent2">
+        <a:tint val="40000"/>
+        <a:alpha val="90000"/>
+      </a:schemeClr>
+      <a:schemeClr val="accent3">
+        <a:tint val="40000"/>
+        <a:alpha val="90000"/>
+      </a:schemeClr>
+    </dgm:linClrLst>
+    <dgm:effectClrLst/>
+    <dgm:txLinClrLst/>
+    <dgm:txFillClrLst meth="repeat">
+      <a:schemeClr val="dk1"/>
+    </dgm:txFillClrLst>
+    <dgm:txEffectClrLst/>
+  </dgm:styleLbl>
+  <dgm:styleLbl name="bgAccFollowNode1">
+    <dgm:fillClrLst>
+      <a:schemeClr val="accent2">
+        <a:tint val="40000"/>
+        <a:alpha val="90000"/>
+      </a:schemeClr>
+      <a:schemeClr val="accent3">
+        <a:tint val="40000"/>
+        <a:alpha val="90000"/>
+      </a:schemeClr>
+    </dgm:fillClrLst>
+    <dgm:linClrLst>
+      <a:schemeClr val="accent2">
+        <a:tint val="40000"/>
+        <a:alpha val="90000"/>
+      </a:schemeClr>
+      <a:schemeClr val="accent3">
+        <a:tint val="40000"/>
+        <a:alpha val="90000"/>
+      </a:schemeClr>
+    </dgm:linClrLst>
+    <dgm:effectClrLst/>
+    <dgm:txLinClrLst/>
+    <dgm:txFillClrLst meth="repeat">
+      <a:schemeClr val="dk1"/>
+    </dgm:txFillClrLst>
+    <dgm:txEffectClrLst/>
+  </dgm:styleLbl>
+  <dgm:styleLbl name="fgAcc0">
+    <dgm:fillClrLst meth="repeat">
+      <a:schemeClr val="lt1">
+        <a:alpha val="90000"/>
+      </a:schemeClr>
+    </dgm:fillClrLst>
+    <dgm:linClrLst>
+      <a:schemeClr val="accent1"/>
+    </dgm:linClrLst>
+    <dgm:effectClrLst/>
+    <dgm:txLinClrLst/>
+    <dgm:txFillClrLst meth="repeat">
+      <a:schemeClr val="dk1"/>
+    </dgm:txFillClrLst>
+    <dgm:txEffectClrLst/>
+  </dgm:styleLbl>
+  <dgm:styleLbl name="fgAcc2">
+    <dgm:fillClrLst meth="repeat">
+      <a:schemeClr val="lt1">
+        <a:alpha val="90000"/>
+      </a:schemeClr>
+    </dgm:fillClrLst>
+    <dgm:linClrLst>
+      <a:schemeClr val="accent3"/>
+    </dgm:linClrLst>
+    <dgm:effectClrLst/>
+    <dgm:txLinClrLst/>
+    <dgm:txFillClrLst meth="repeat">
+      <a:schemeClr val="dk1"/>
+    </dgm:txFillClrLst>
+    <dgm:txEffectClrLst/>
+  </dgm:styleLbl>
+  <dgm:styleLbl name="fgAcc3">
+    <dgm:fillClrLst meth="repeat">
+      <a:schemeClr val="lt1">
+        <a:alpha val="90000"/>
+      </a:schemeClr>
+    </dgm:fillClrLst>
+    <dgm:linClrLst>
+      <a:schemeClr val="accent4"/>
+    </dgm:linClrLst>
+    <dgm:effectClrLst/>
+    <dgm:txLinClrLst/>
+    <dgm:txFillClrLst meth="repeat">
+      <a:schemeClr val="dk1"/>
+    </dgm:txFillClrLst>
+    <dgm:txEffectClrLst/>
+  </dgm:styleLbl>
+  <dgm:styleLbl name="fgAcc4">
+    <dgm:fillClrLst meth="repeat">
+      <a:schemeClr val="lt1">
+        <a:alpha val="90000"/>
+      </a:schemeClr>
+    </dgm:fillClrLst>
+    <dgm:linClrLst>
+      <a:schemeClr val="accent5"/>
+    </dgm:linClrLst>
+    <dgm:effectClrLst/>
+    <dgm:txLinClrLst/>
+    <dgm:txFillClrLst meth="repeat">
+      <a:schemeClr val="dk1"/>
+    </dgm:txFillClrLst>
+    <dgm:txEffectClrLst/>
+  </dgm:styleLbl>
+  <dgm:styleLbl name="bgShp">
+    <dgm:fillClrLst meth="repeat">
+      <a:schemeClr val="accent2">
+        <a:tint val="40000"/>
+      </a:schemeClr>
+    </dgm:fillClrLst>
+    <dgm:linClrLst meth="repeat">
+      <a:schemeClr val="dk1"/>
+    </dgm:linClrLst>
+    <dgm:effectClrLst/>
+    <dgm:txLinClrLst/>
+    <dgm:txFillClrLst meth="repeat">
+      <a:schemeClr val="dk1"/>
+    </dgm:txFillClrLst>
+    <dgm:txEffectClrLst/>
+  </dgm:styleLbl>
+  <dgm:styleLbl name="dkBgShp">
+    <dgm:fillClrLst meth="repeat">
+      <a:schemeClr val="accent2">
+        <a:shade val="90000"/>
+      </a:schemeClr>
+    </dgm:fillClrLst>
+    <dgm:linClrLst meth="repeat">
+      <a:schemeClr val="dk1"/>
+    </dgm:linClrLst>
+    <dgm:effectClrLst/>
+    <dgm:txLinClrLst/>
+    <dgm:txFillClrLst meth="repeat">
+      <a:schemeClr val="lt1"/>
+    </dgm:txFillClrLst>
+    <dgm:txEffectClrLst/>
+  </dgm:styleLbl>
+  <dgm:styleLbl name="trBgShp">
+    <dgm:fillClrLst meth="repeat">
+      <a:schemeClr val="accent2">
+        <a:tint val="50000"/>
+        <a:alpha val="40000"/>
+      </a:schemeClr>
+    </dgm:fillClrLst>
+    <dgm:linClrLst meth="repeat">
+      <a:schemeClr val="accent2"/>
+    </dgm:linClrLst>
+    <dgm:effectClrLst/>
+    <dgm:txLinClrLst/>
+    <dgm:txFillClrLst meth="repeat">
+      <a:schemeClr val="lt1"/>
+    </dgm:txFillClrLst>
+    <dgm:txEffectClrLst/>
+  </dgm:styleLbl>
+  <dgm:styleLbl name="fgShp">
+    <dgm:fillClrLst meth="repeat">
+      <a:schemeClr val="accent2">
+        <a:tint val="40000"/>
       </a:schemeClr>
     </dgm:fillClrLst>
     <dgm:linClrLst meth="repeat">
@@ -4008,6 +4789,558 @@
 </dgm:dataModel>
 </file>
 
+<file path=ppt/diagrams/data4.xml><?xml version="1.0" encoding="utf-8"?>
+<dgm:dataModel xmlns:dgm="http://schemas.openxmlformats.org/drawingml/2006/diagram" xmlns:a="http://schemas.openxmlformats.org/drawingml/2006/main">
+  <dgm:ptLst>
+    <dgm:pt modelId="{72A5A29F-9576-40A1-9957-B7E1EFB68D4D}" type="doc">
+      <dgm:prSet loTypeId="urn:microsoft.com/office/officeart/2018/2/layout/IconVerticalSolidList" loCatId="icon" qsTypeId="urn:microsoft.com/office/officeart/2005/8/quickstyle/simple1" qsCatId="simple" csTypeId="urn:microsoft.com/office/officeart/2005/8/colors/colorful2" csCatId="colorful" phldr="1"/>
+      <dgm:spPr/>
+      <dgm:t>
+        <a:bodyPr/>
+        <a:lstStyle/>
+        <a:p>
+          <a:endParaRPr lang="en-US"/>
+        </a:p>
+      </dgm:t>
+    </dgm:pt>
+    <dgm:pt modelId="{7B5ED5F6-CE2B-4898-A3B1-4F3D60DA8672}">
+      <dgm:prSet/>
+      <dgm:spPr/>
+      <dgm:t>
+        <a:bodyPr/>
+        <a:lstStyle/>
+        <a:p>
+          <a:pPr>
+            <a:lnSpc>
+              <a:spcPct val="100000"/>
+            </a:lnSpc>
+          </a:pPr>
+          <a:r>
+            <a:rPr lang="en-IN" b="1"/>
+            <a:t>Fog needs memory</a:t>
+          </a:r>
+          <a:r>
+            <a:rPr lang="en-IN"/>
+            <a:t> — We don’t only look at the latest reading; we </a:t>
+          </a:r>
+          <a:r>
+            <a:rPr lang="en-IN" b="1"/>
+            <a:t>smooth</a:t>
+          </a:r>
+          <a:r>
+            <a:rPr lang="en-IN"/>
+            <a:t> readings over time, send </a:t>
+          </a:r>
+          <a:r>
+            <a:rPr lang="en-IN" b="1"/>
+            <a:t>summaries on a timer</a:t>
+          </a:r>
+          <a:r>
+            <a:rPr lang="en-IN"/>
+            <a:t>, and fire </a:t>
+          </a:r>
+          <a:r>
+            <a:rPr lang="en-IN" b="1"/>
+            <a:t>alerts when something gets worse</a:t>
+          </a:r>
+          <a:r>
+            <a:rPr lang="en-IN"/>
+            <a:t>, so the code must remember past values and previous alert levels.</a:t>
+          </a:r>
+          <a:endParaRPr lang="en-US"/>
+        </a:p>
+      </dgm:t>
+    </dgm:pt>
+    <dgm:pt modelId="{3F22494F-F627-49E4-99A7-12DDDF6D93C0}" type="parTrans" cxnId="{7165BAA6-A367-4CAE-8E5E-BC7141C0C76C}">
+      <dgm:prSet/>
+      <dgm:spPr/>
+      <dgm:t>
+        <a:bodyPr/>
+        <a:lstStyle/>
+        <a:p>
+          <a:endParaRPr lang="en-US"/>
+        </a:p>
+      </dgm:t>
+    </dgm:pt>
+    <dgm:pt modelId="{73E445AF-01CA-4E3E-940B-799F40A81AC8}" type="sibTrans" cxnId="{7165BAA6-A367-4CAE-8E5E-BC7141C0C76C}">
+      <dgm:prSet/>
+      <dgm:spPr/>
+      <dgm:t>
+        <a:bodyPr/>
+        <a:lstStyle/>
+        <a:p>
+          <a:endParaRPr lang="en-US"/>
+        </a:p>
+      </dgm:t>
+    </dgm:pt>
+    <dgm:pt modelId="{545492FA-5D0D-4B5D-ADCF-31FDF2FC7474}">
+      <dgm:prSet/>
+      <dgm:spPr/>
+      <dgm:t>
+        <a:bodyPr/>
+        <a:lstStyle/>
+        <a:p>
+          <a:pPr>
+            <a:lnSpc>
+              <a:spcPct val="100000"/>
+            </a:lnSpc>
+          </a:pPr>
+          <a:r>
+            <a:rPr lang="en-IN" b="1"/>
+            <a:t>Lambdas don’t keep memory</a:t>
+          </a:r>
+          <a:r>
+            <a:rPr lang="en-IN"/>
+            <a:t> — Each run can be a </a:t>
+          </a:r>
+          <a:r>
+            <a:rPr lang="en-IN" b="1"/>
+            <a:t>new, empty</a:t>
+          </a:r>
+          <a:r>
+            <a:rPr lang="en-IN"/>
+            <a:t> process, so anything we only stored in RAM would be </a:t>
+          </a:r>
+          <a:r>
+            <a:rPr lang="en-IN" b="1"/>
+            <a:t>lost</a:t>
+          </a:r>
+          <a:r>
+            <a:rPr lang="en-IN"/>
+            <a:t> between MQTT messages.</a:t>
+          </a:r>
+          <a:endParaRPr lang="en-US"/>
+        </a:p>
+      </dgm:t>
+    </dgm:pt>
+    <dgm:pt modelId="{17908F0F-C627-4981-88BC-4085A8F99B39}" type="parTrans" cxnId="{47BFC162-0AD6-4E5E-AE4A-34A50396533B}">
+      <dgm:prSet/>
+      <dgm:spPr/>
+      <dgm:t>
+        <a:bodyPr/>
+        <a:lstStyle/>
+        <a:p>
+          <a:endParaRPr lang="en-US"/>
+        </a:p>
+      </dgm:t>
+    </dgm:pt>
+    <dgm:pt modelId="{A6B94D18-C419-4395-8661-0570E40E7E68}" type="sibTrans" cxnId="{47BFC162-0AD6-4E5E-AE4A-34A50396533B}">
+      <dgm:prSet/>
+      <dgm:spPr/>
+      <dgm:t>
+        <a:bodyPr/>
+        <a:lstStyle/>
+        <a:p>
+          <a:endParaRPr lang="en-US"/>
+        </a:p>
+      </dgm:t>
+    </dgm:pt>
+    <dgm:pt modelId="{F520CC15-C418-4C2D-B2A1-262C77AC64EF}">
+      <dgm:prSet/>
+      <dgm:spPr/>
+      <dgm:t>
+        <a:bodyPr/>
+        <a:lstStyle/>
+        <a:p>
+          <a:pPr>
+            <a:lnSpc>
+              <a:spcPct val="100000"/>
+            </a:lnSpc>
+          </a:pPr>
+          <a:r>
+            <a:rPr lang="en-IN" b="1"/>
+            <a:t>We save fog state in DynamoDB</a:t>
+          </a:r>
+          <a:r>
+            <a:rPr lang="en-IN"/>
+            <a:t> — After each run we store a </a:t>
+          </a:r>
+          <a:r>
+            <a:rPr lang="en-IN" b="1"/>
+            <a:t>snapshot</a:t>
+          </a:r>
+          <a:r>
+            <a:rPr lang="en-IN"/>
+            <a:t> of that memory (smoothing buffers, timers, last alert levels) in </a:t>
+          </a:r>
+          <a:r>
+            <a:rPr lang="en-IN" b="1"/>
+            <a:t>FogStateTable</a:t>
+          </a:r>
+          <a:r>
+            <a:rPr lang="en-IN"/>
+            <a:t>, and </a:t>
+          </a:r>
+          <a:r>
+            <a:rPr lang="en-IN" b="1"/>
+            <a:t>load it back</a:t>
+          </a:r>
+          <a:r>
+            <a:rPr lang="en-IN"/>
+            <a:t> at the start of the next run so behaviour stays </a:t>
+          </a:r>
+          <a:r>
+            <a:rPr lang="en-IN" b="1"/>
+            <a:t>continuous</a:t>
+          </a:r>
+          <a:r>
+            <a:rPr lang="en-IN"/>
+            <a:t>.</a:t>
+          </a:r>
+          <a:endParaRPr lang="en-US"/>
+        </a:p>
+      </dgm:t>
+    </dgm:pt>
+    <dgm:pt modelId="{A0D35AFD-AA2B-4907-9CCB-6E9ED932190F}" type="parTrans" cxnId="{E3130B1B-665B-40FB-8D81-887FCAA0069C}">
+      <dgm:prSet/>
+      <dgm:spPr/>
+      <dgm:t>
+        <a:bodyPr/>
+        <a:lstStyle/>
+        <a:p>
+          <a:endParaRPr lang="en-US"/>
+        </a:p>
+      </dgm:t>
+    </dgm:pt>
+    <dgm:pt modelId="{0A3C037F-9367-40D9-8DCA-E0BC6DEEFCEB}" type="sibTrans" cxnId="{E3130B1B-665B-40FB-8D81-887FCAA0069C}">
+      <dgm:prSet/>
+      <dgm:spPr/>
+      <dgm:t>
+        <a:bodyPr/>
+        <a:lstStyle/>
+        <a:p>
+          <a:endParaRPr lang="en-US"/>
+        </a:p>
+      </dgm:t>
+    </dgm:pt>
+    <dgm:pt modelId="{FC839217-52FB-4069-B98A-5FB7FD8DE6B8}">
+      <dgm:prSet/>
+      <dgm:spPr/>
+      <dgm:t>
+        <a:bodyPr/>
+        <a:lstStyle/>
+        <a:p>
+          <a:pPr>
+            <a:lnSpc>
+              <a:spcPct val="100000"/>
+            </a:lnSpc>
+          </a:pPr>
+          <a:r>
+            <a:rPr lang="en-IN" b="1"/>
+            <a:t>Same messages as HTTPS</a:t>
+          </a:r>
+          <a:r>
+            <a:rPr lang="en-IN"/>
+            <a:t> — What we send to the queue is the </a:t>
+          </a:r>
+          <a:r>
+            <a:rPr lang="en-IN" b="1"/>
+            <a:t>same JSON</a:t>
+          </a:r>
+          <a:r>
+            <a:rPr lang="en-IN"/>
+            <a:t> as </a:t>
+          </a:r>
+          <a:r>
+            <a:rPr lang="en-IN" b="1"/>
+            <a:t>POST /ingest</a:t>
+          </a:r>
+          <a:r>
+            <a:rPr lang="en-IN"/>
+            <a:t>, so </a:t>
+          </a:r>
+          <a:r>
+            <a:rPr lang="en-IN" b="1"/>
+            <a:t>MQTT and HTTPS</a:t>
+          </a:r>
+          <a:r>
+            <a:rPr lang="en-IN"/>
+            <a:t> both use </a:t>
+          </a:r>
+          <a:r>
+            <a:rPr lang="en-IN" b="1"/>
+            <a:t>one</a:t>
+          </a:r>
+          <a:r>
+            <a:rPr lang="en-IN"/>
+            <a:t> downstream pipeline (SQS → processor → storage).</a:t>
+          </a:r>
+          <a:endParaRPr lang="en-US"/>
+        </a:p>
+      </dgm:t>
+    </dgm:pt>
+    <dgm:pt modelId="{9925EE01-CCB9-4B1D-B89A-317C7B666AA9}" type="parTrans" cxnId="{7059CB2C-B06A-4ED9-A13E-0D5711D7F136}">
+      <dgm:prSet/>
+      <dgm:spPr/>
+      <dgm:t>
+        <a:bodyPr/>
+        <a:lstStyle/>
+        <a:p>
+          <a:endParaRPr lang="en-US"/>
+        </a:p>
+      </dgm:t>
+    </dgm:pt>
+    <dgm:pt modelId="{37CB16F4-3164-43F6-95F0-8F37E64705A4}" type="sibTrans" cxnId="{7059CB2C-B06A-4ED9-A13E-0D5711D7F136}">
+      <dgm:prSet/>
+      <dgm:spPr/>
+      <dgm:t>
+        <a:bodyPr/>
+        <a:lstStyle/>
+        <a:p>
+          <a:endParaRPr lang="en-US"/>
+        </a:p>
+      </dgm:t>
+    </dgm:pt>
+    <dgm:pt modelId="{DB3CB4C5-C4E3-40DD-A83A-8631F1B42C39}" type="pres">
+      <dgm:prSet presAssocID="{72A5A29F-9576-40A1-9957-B7E1EFB68D4D}" presName="root" presStyleCnt="0">
+        <dgm:presLayoutVars>
+          <dgm:dir/>
+          <dgm:resizeHandles val="exact"/>
+        </dgm:presLayoutVars>
+      </dgm:prSet>
+      <dgm:spPr/>
+    </dgm:pt>
+    <dgm:pt modelId="{3956C5D0-BF42-4770-B432-B23C6C04F436}" type="pres">
+      <dgm:prSet presAssocID="{7B5ED5F6-CE2B-4898-A3B1-4F3D60DA8672}" presName="compNode" presStyleCnt="0"/>
+      <dgm:spPr/>
+    </dgm:pt>
+    <dgm:pt modelId="{65897E9B-8A11-4D8E-BD23-05886CBE13F1}" type="pres">
+      <dgm:prSet presAssocID="{7B5ED5F6-CE2B-4898-A3B1-4F3D60DA8672}" presName="bgRect" presStyleLbl="bgShp" presStyleIdx="0" presStyleCnt="4"/>
+      <dgm:spPr/>
+    </dgm:pt>
+    <dgm:pt modelId="{7B67D3AE-32A4-4FAA-9F7A-09AE73CA0D85}" type="pres">
+      <dgm:prSet presAssocID="{7B5ED5F6-CE2B-4898-A3B1-4F3D60DA8672}" presName="iconRect" presStyleLbl="node1" presStyleIdx="0" presStyleCnt="4"/>
+      <dgm:spPr>
+        <a:blipFill>
+          <a:blip xmlns:r="http://schemas.openxmlformats.org/officeDocument/2006/relationships" r:embed="rId1">
+            <a:extLst>
+              <a:ext uri="{28A0092B-C50C-407E-A947-70E740481C1C}">
+                <a14:useLocalDpi xmlns:a14="http://schemas.microsoft.com/office/drawing/2010/main" val="0"/>
+              </a:ext>
+              <a:ext uri="{96DAC541-7B7A-43D3-8B79-37D633B846F1}">
+                <asvg:svgBlip xmlns:asvg="http://schemas.microsoft.com/office/drawing/2016/SVG/main" r:embed="rId2"/>
+              </a:ext>
+            </a:extLst>
+          </a:blip>
+          <a:stretch>
+            <a:fillRect/>
+          </a:stretch>
+        </a:blipFill>
+      </dgm:spPr>
+      <dgm:extLst>
+        <a:ext uri="{E40237B7-FDA0-4F09-8148-C483321AD2D9}">
+          <dgm14:cNvPr xmlns:dgm14="http://schemas.microsoft.com/office/drawing/2010/diagram" id="0" name="" descr="Ear"/>
+        </a:ext>
+      </dgm:extLst>
+    </dgm:pt>
+    <dgm:pt modelId="{32415E29-7F5B-4403-ACDD-9EA9869906EE}" type="pres">
+      <dgm:prSet presAssocID="{7B5ED5F6-CE2B-4898-A3B1-4F3D60DA8672}" presName="spaceRect" presStyleCnt="0"/>
+      <dgm:spPr/>
+    </dgm:pt>
+    <dgm:pt modelId="{19D97CC4-F7C2-4658-B714-98EFAE6DC47F}" type="pres">
+      <dgm:prSet presAssocID="{7B5ED5F6-CE2B-4898-A3B1-4F3D60DA8672}" presName="parTx" presStyleLbl="revTx" presStyleIdx="0" presStyleCnt="4">
+        <dgm:presLayoutVars>
+          <dgm:chMax val="0"/>
+          <dgm:chPref val="0"/>
+        </dgm:presLayoutVars>
+      </dgm:prSet>
+      <dgm:spPr/>
+    </dgm:pt>
+    <dgm:pt modelId="{7D26FEB9-8F92-49F1-A8C0-99D9A655FBB2}" type="pres">
+      <dgm:prSet presAssocID="{73E445AF-01CA-4E3E-940B-799F40A81AC8}" presName="sibTrans" presStyleCnt="0"/>
+      <dgm:spPr/>
+    </dgm:pt>
+    <dgm:pt modelId="{BDDFC97E-26F3-4CF1-9CB8-183A1A39965C}" type="pres">
+      <dgm:prSet presAssocID="{545492FA-5D0D-4B5D-ADCF-31FDF2FC7474}" presName="compNode" presStyleCnt="0"/>
+      <dgm:spPr/>
+    </dgm:pt>
+    <dgm:pt modelId="{EA902BD7-4285-4624-8E82-A7B57F9E24CE}" type="pres">
+      <dgm:prSet presAssocID="{545492FA-5D0D-4B5D-ADCF-31FDF2FC7474}" presName="bgRect" presStyleLbl="bgShp" presStyleIdx="1" presStyleCnt="4"/>
+      <dgm:spPr/>
+    </dgm:pt>
+    <dgm:pt modelId="{2D38FB9A-076A-4532-82A1-5B03A9F86DF6}" type="pres">
+      <dgm:prSet presAssocID="{545492FA-5D0D-4B5D-ADCF-31FDF2FC7474}" presName="iconRect" presStyleLbl="node1" presStyleIdx="1" presStyleCnt="4"/>
+      <dgm:spPr>
+        <a:blipFill>
+          <a:blip xmlns:r="http://schemas.openxmlformats.org/officeDocument/2006/relationships" r:embed="rId3">
+            <a:extLst>
+              <a:ext uri="{28A0092B-C50C-407E-A947-70E740481C1C}">
+                <a14:useLocalDpi xmlns:a14="http://schemas.microsoft.com/office/drawing/2010/main" val="0"/>
+              </a:ext>
+              <a:ext uri="{96DAC541-7B7A-43D3-8B79-37D633B846F1}">
+                <asvg:svgBlip xmlns:asvg="http://schemas.microsoft.com/office/drawing/2016/SVG/main" r:embed="rId4"/>
+              </a:ext>
+            </a:extLst>
+          </a:blip>
+          <a:stretch>
+            <a:fillRect/>
+          </a:stretch>
+        </a:blipFill>
+      </dgm:spPr>
+      <dgm:extLst>
+        <a:ext uri="{E40237B7-FDA0-4F09-8148-C483321AD2D9}">
+          <dgm14:cNvPr xmlns:dgm14="http://schemas.microsoft.com/office/drawing/2010/diagram" id="0" name="" descr="Processor"/>
+        </a:ext>
+      </dgm:extLst>
+    </dgm:pt>
+    <dgm:pt modelId="{DFA75CF6-5CCB-4497-9509-1835EA79D6C4}" type="pres">
+      <dgm:prSet presAssocID="{545492FA-5D0D-4B5D-ADCF-31FDF2FC7474}" presName="spaceRect" presStyleCnt="0"/>
+      <dgm:spPr/>
+    </dgm:pt>
+    <dgm:pt modelId="{70BC7816-6721-459C-AE1A-8BEBE20B4430}" type="pres">
+      <dgm:prSet presAssocID="{545492FA-5D0D-4B5D-ADCF-31FDF2FC7474}" presName="parTx" presStyleLbl="revTx" presStyleIdx="1" presStyleCnt="4">
+        <dgm:presLayoutVars>
+          <dgm:chMax val="0"/>
+          <dgm:chPref val="0"/>
+        </dgm:presLayoutVars>
+      </dgm:prSet>
+      <dgm:spPr/>
+    </dgm:pt>
+    <dgm:pt modelId="{EE6E74C3-0A5A-4EBB-9636-E09DF03264C9}" type="pres">
+      <dgm:prSet presAssocID="{A6B94D18-C419-4395-8661-0570E40E7E68}" presName="sibTrans" presStyleCnt="0"/>
+      <dgm:spPr/>
+    </dgm:pt>
+    <dgm:pt modelId="{11CD1FEF-3A45-4F86-90E3-B3E3E23C5C61}" type="pres">
+      <dgm:prSet presAssocID="{F520CC15-C418-4C2D-B2A1-262C77AC64EF}" presName="compNode" presStyleCnt="0"/>
+      <dgm:spPr/>
+    </dgm:pt>
+    <dgm:pt modelId="{720B6B5F-ADD7-4FB5-9E4C-7857516D4661}" type="pres">
+      <dgm:prSet presAssocID="{F520CC15-C418-4C2D-B2A1-262C77AC64EF}" presName="bgRect" presStyleLbl="bgShp" presStyleIdx="2" presStyleCnt="4"/>
+      <dgm:spPr/>
+    </dgm:pt>
+    <dgm:pt modelId="{A6A82B0F-4721-4E90-A38E-F50D874BABF1}" type="pres">
+      <dgm:prSet presAssocID="{F520CC15-C418-4C2D-B2A1-262C77AC64EF}" presName="iconRect" presStyleLbl="node1" presStyleIdx="2" presStyleCnt="4"/>
+      <dgm:spPr>
+        <a:blipFill>
+          <a:blip xmlns:r="http://schemas.openxmlformats.org/officeDocument/2006/relationships" r:embed="rId5">
+            <a:extLst>
+              <a:ext uri="{28A0092B-C50C-407E-A947-70E740481C1C}">
+                <a14:useLocalDpi xmlns:a14="http://schemas.microsoft.com/office/drawing/2010/main" val="0"/>
+              </a:ext>
+              <a:ext uri="{96DAC541-7B7A-43D3-8B79-37D633B846F1}">
+                <asvg:svgBlip xmlns:asvg="http://schemas.microsoft.com/office/drawing/2016/SVG/main" r:embed="rId6"/>
+              </a:ext>
+            </a:extLst>
+          </a:blip>
+          <a:stretch>
+            <a:fillRect/>
+          </a:stretch>
+        </a:blipFill>
+      </dgm:spPr>
+      <dgm:extLst>
+        <a:ext uri="{E40237B7-FDA0-4F09-8148-C483321AD2D9}">
+          <dgm14:cNvPr xmlns:dgm14="http://schemas.microsoft.com/office/drawing/2010/diagram" id="0" name="" descr="Rainy scene"/>
+        </a:ext>
+      </dgm:extLst>
+    </dgm:pt>
+    <dgm:pt modelId="{C11CC188-FBF3-4D49-88B7-50CBCF633F43}" type="pres">
+      <dgm:prSet presAssocID="{F520CC15-C418-4C2D-B2A1-262C77AC64EF}" presName="spaceRect" presStyleCnt="0"/>
+      <dgm:spPr/>
+    </dgm:pt>
+    <dgm:pt modelId="{51EA83F8-7F34-4CF2-ABBF-2254FE904512}" type="pres">
+      <dgm:prSet presAssocID="{F520CC15-C418-4C2D-B2A1-262C77AC64EF}" presName="parTx" presStyleLbl="revTx" presStyleIdx="2" presStyleCnt="4">
+        <dgm:presLayoutVars>
+          <dgm:chMax val="0"/>
+          <dgm:chPref val="0"/>
+        </dgm:presLayoutVars>
+      </dgm:prSet>
+      <dgm:spPr/>
+    </dgm:pt>
+    <dgm:pt modelId="{C9DF96A8-9608-4B10-8694-515B3E358CD3}" type="pres">
+      <dgm:prSet presAssocID="{0A3C037F-9367-40D9-8DCA-E0BC6DEEFCEB}" presName="sibTrans" presStyleCnt="0"/>
+      <dgm:spPr/>
+    </dgm:pt>
+    <dgm:pt modelId="{3160F95E-F4F7-4CED-948C-8FAFB87E64C3}" type="pres">
+      <dgm:prSet presAssocID="{FC839217-52FB-4069-B98A-5FB7FD8DE6B8}" presName="compNode" presStyleCnt="0"/>
+      <dgm:spPr/>
+    </dgm:pt>
+    <dgm:pt modelId="{2EEE7D38-BE83-4163-AE6B-C532A6BCA87B}" type="pres">
+      <dgm:prSet presAssocID="{FC839217-52FB-4069-B98A-5FB7FD8DE6B8}" presName="bgRect" presStyleLbl="bgShp" presStyleIdx="3" presStyleCnt="4"/>
+      <dgm:spPr/>
+    </dgm:pt>
+    <dgm:pt modelId="{2076DEA3-2913-45E9-BA80-CC860118E91D}" type="pres">
+      <dgm:prSet presAssocID="{FC839217-52FB-4069-B98A-5FB7FD8DE6B8}" presName="iconRect" presStyleLbl="node1" presStyleIdx="3" presStyleCnt="4"/>
+      <dgm:spPr>
+        <a:blipFill>
+          <a:blip xmlns:r="http://schemas.openxmlformats.org/officeDocument/2006/relationships" r:embed="rId7">
+            <a:extLst>
+              <a:ext uri="{28A0092B-C50C-407E-A947-70E740481C1C}">
+                <a14:useLocalDpi xmlns:a14="http://schemas.microsoft.com/office/drawing/2010/main" val="0"/>
+              </a:ext>
+              <a:ext uri="{96DAC541-7B7A-43D3-8B79-37D633B846F1}">
+                <asvg:svgBlip xmlns:asvg="http://schemas.microsoft.com/office/drawing/2016/SVG/main" r:embed="rId8"/>
+              </a:ext>
+            </a:extLst>
+          </a:blip>
+          <a:stretch>
+            <a:fillRect/>
+          </a:stretch>
+        </a:blipFill>
+      </dgm:spPr>
+      <dgm:extLst>
+        <a:ext uri="{E40237B7-FDA0-4F09-8148-C483321AD2D9}">
+          <dgm14:cNvPr xmlns:dgm14="http://schemas.microsoft.com/office/drawing/2010/diagram" id="0" name="" descr="Filter"/>
+        </a:ext>
+      </dgm:extLst>
+    </dgm:pt>
+    <dgm:pt modelId="{591A3B4C-1655-4717-87FB-6A496251E1F6}" type="pres">
+      <dgm:prSet presAssocID="{FC839217-52FB-4069-B98A-5FB7FD8DE6B8}" presName="spaceRect" presStyleCnt="0"/>
+      <dgm:spPr/>
+    </dgm:pt>
+    <dgm:pt modelId="{51880AF0-0D78-47C7-A2DB-D39B86614A8B}" type="pres">
+      <dgm:prSet presAssocID="{FC839217-52FB-4069-B98A-5FB7FD8DE6B8}" presName="parTx" presStyleLbl="revTx" presStyleIdx="3" presStyleCnt="4">
+        <dgm:presLayoutVars>
+          <dgm:chMax val="0"/>
+          <dgm:chPref val="0"/>
+        </dgm:presLayoutVars>
+      </dgm:prSet>
+      <dgm:spPr/>
+    </dgm:pt>
+  </dgm:ptLst>
+  <dgm:cxnLst>
+    <dgm:cxn modelId="{E3130B1B-665B-40FB-8D81-887FCAA0069C}" srcId="{72A5A29F-9576-40A1-9957-B7E1EFB68D4D}" destId="{F520CC15-C418-4C2D-B2A1-262C77AC64EF}" srcOrd="2" destOrd="0" parTransId="{A0D35AFD-AA2B-4907-9CCB-6E9ED932190F}" sibTransId="{0A3C037F-9367-40D9-8DCA-E0BC6DEEFCEB}"/>
+    <dgm:cxn modelId="{7059CB2C-B06A-4ED9-A13E-0D5711D7F136}" srcId="{72A5A29F-9576-40A1-9957-B7E1EFB68D4D}" destId="{FC839217-52FB-4069-B98A-5FB7FD8DE6B8}" srcOrd="3" destOrd="0" parTransId="{9925EE01-CCB9-4B1D-B89A-317C7B666AA9}" sibTransId="{37CB16F4-3164-43F6-95F0-8F37E64705A4}"/>
+    <dgm:cxn modelId="{47BFC162-0AD6-4E5E-AE4A-34A50396533B}" srcId="{72A5A29F-9576-40A1-9957-B7E1EFB68D4D}" destId="{545492FA-5D0D-4B5D-ADCF-31FDF2FC7474}" srcOrd="1" destOrd="0" parTransId="{17908F0F-C627-4981-88BC-4085A8F99B39}" sibTransId="{A6B94D18-C419-4395-8661-0570E40E7E68}"/>
+    <dgm:cxn modelId="{8C6BA975-FCAE-B84D-94F1-BC81C8D8895B}" type="presOf" srcId="{FC839217-52FB-4069-B98A-5FB7FD8DE6B8}" destId="{51880AF0-0D78-47C7-A2DB-D39B86614A8B}" srcOrd="0" destOrd="0" presId="urn:microsoft.com/office/officeart/2018/2/layout/IconVerticalSolidList"/>
+    <dgm:cxn modelId="{491CAA84-C030-3748-9512-7AE68970430F}" type="presOf" srcId="{7B5ED5F6-CE2B-4898-A3B1-4F3D60DA8672}" destId="{19D97CC4-F7C2-4658-B714-98EFAE6DC47F}" srcOrd="0" destOrd="0" presId="urn:microsoft.com/office/officeart/2018/2/layout/IconVerticalSolidList"/>
+    <dgm:cxn modelId="{F220CBA4-9F56-4844-B0D2-840725324D1F}" type="presOf" srcId="{545492FA-5D0D-4B5D-ADCF-31FDF2FC7474}" destId="{70BC7816-6721-459C-AE1A-8BEBE20B4430}" srcOrd="0" destOrd="0" presId="urn:microsoft.com/office/officeart/2018/2/layout/IconVerticalSolidList"/>
+    <dgm:cxn modelId="{7165BAA6-A367-4CAE-8E5E-BC7141C0C76C}" srcId="{72A5A29F-9576-40A1-9957-B7E1EFB68D4D}" destId="{7B5ED5F6-CE2B-4898-A3B1-4F3D60DA8672}" srcOrd="0" destOrd="0" parTransId="{3F22494F-F627-49E4-99A7-12DDDF6D93C0}" sibTransId="{73E445AF-01CA-4E3E-940B-799F40A81AC8}"/>
+    <dgm:cxn modelId="{41E344D5-2022-AB4B-9C77-589562775A33}" type="presOf" srcId="{72A5A29F-9576-40A1-9957-B7E1EFB68D4D}" destId="{DB3CB4C5-C4E3-40DD-A83A-8631F1B42C39}" srcOrd="0" destOrd="0" presId="urn:microsoft.com/office/officeart/2018/2/layout/IconVerticalSolidList"/>
+    <dgm:cxn modelId="{6D7BC7FB-E1F4-E949-9E9F-856C158AE954}" type="presOf" srcId="{F520CC15-C418-4C2D-B2A1-262C77AC64EF}" destId="{51EA83F8-7F34-4CF2-ABBF-2254FE904512}" srcOrd="0" destOrd="0" presId="urn:microsoft.com/office/officeart/2018/2/layout/IconVerticalSolidList"/>
+    <dgm:cxn modelId="{3B25DF6F-8C5E-3C4F-AD21-EA0AC3C2CB63}" type="presParOf" srcId="{DB3CB4C5-C4E3-40DD-A83A-8631F1B42C39}" destId="{3956C5D0-BF42-4770-B432-B23C6C04F436}" srcOrd="0" destOrd="0" presId="urn:microsoft.com/office/officeart/2018/2/layout/IconVerticalSolidList"/>
+    <dgm:cxn modelId="{6033FECA-17B3-D542-B572-93288C47ACF7}" type="presParOf" srcId="{3956C5D0-BF42-4770-B432-B23C6C04F436}" destId="{65897E9B-8A11-4D8E-BD23-05886CBE13F1}" srcOrd="0" destOrd="0" presId="urn:microsoft.com/office/officeart/2018/2/layout/IconVerticalSolidList"/>
+    <dgm:cxn modelId="{AD89EAE6-638D-504B-B0A2-15F8D51140FE}" type="presParOf" srcId="{3956C5D0-BF42-4770-B432-B23C6C04F436}" destId="{7B67D3AE-32A4-4FAA-9F7A-09AE73CA0D85}" srcOrd="1" destOrd="0" presId="urn:microsoft.com/office/officeart/2018/2/layout/IconVerticalSolidList"/>
+    <dgm:cxn modelId="{F5D2D039-CC50-4648-8069-C91525B97260}" type="presParOf" srcId="{3956C5D0-BF42-4770-B432-B23C6C04F436}" destId="{32415E29-7F5B-4403-ACDD-9EA9869906EE}" srcOrd="2" destOrd="0" presId="urn:microsoft.com/office/officeart/2018/2/layout/IconVerticalSolidList"/>
+    <dgm:cxn modelId="{F1C9C4D7-61C0-7A40-894D-D4A3BD31BBAA}" type="presParOf" srcId="{3956C5D0-BF42-4770-B432-B23C6C04F436}" destId="{19D97CC4-F7C2-4658-B714-98EFAE6DC47F}" srcOrd="3" destOrd="0" presId="urn:microsoft.com/office/officeart/2018/2/layout/IconVerticalSolidList"/>
+    <dgm:cxn modelId="{E870B7A6-0D46-5044-B774-46A5E2E204A9}" type="presParOf" srcId="{DB3CB4C5-C4E3-40DD-A83A-8631F1B42C39}" destId="{7D26FEB9-8F92-49F1-A8C0-99D9A655FBB2}" srcOrd="1" destOrd="0" presId="urn:microsoft.com/office/officeart/2018/2/layout/IconVerticalSolidList"/>
+    <dgm:cxn modelId="{D19663A9-761D-2142-BECD-C27A1A0B24C2}" type="presParOf" srcId="{DB3CB4C5-C4E3-40DD-A83A-8631F1B42C39}" destId="{BDDFC97E-26F3-4CF1-9CB8-183A1A39965C}" srcOrd="2" destOrd="0" presId="urn:microsoft.com/office/officeart/2018/2/layout/IconVerticalSolidList"/>
+    <dgm:cxn modelId="{5609337B-D880-354E-96FC-59156315B3ED}" type="presParOf" srcId="{BDDFC97E-26F3-4CF1-9CB8-183A1A39965C}" destId="{EA902BD7-4285-4624-8E82-A7B57F9E24CE}" srcOrd="0" destOrd="0" presId="urn:microsoft.com/office/officeart/2018/2/layout/IconVerticalSolidList"/>
+    <dgm:cxn modelId="{311B6FD2-15AF-C74E-AA2B-87F7F4F70A9C}" type="presParOf" srcId="{BDDFC97E-26F3-4CF1-9CB8-183A1A39965C}" destId="{2D38FB9A-076A-4532-82A1-5B03A9F86DF6}" srcOrd="1" destOrd="0" presId="urn:microsoft.com/office/officeart/2018/2/layout/IconVerticalSolidList"/>
+    <dgm:cxn modelId="{A2F4F1C3-5760-2641-AE67-6BE2BE11097D}" type="presParOf" srcId="{BDDFC97E-26F3-4CF1-9CB8-183A1A39965C}" destId="{DFA75CF6-5CCB-4497-9509-1835EA79D6C4}" srcOrd="2" destOrd="0" presId="urn:microsoft.com/office/officeart/2018/2/layout/IconVerticalSolidList"/>
+    <dgm:cxn modelId="{E711D32F-4485-D944-A0A6-C4F9FE83B89D}" type="presParOf" srcId="{BDDFC97E-26F3-4CF1-9CB8-183A1A39965C}" destId="{70BC7816-6721-459C-AE1A-8BEBE20B4430}" srcOrd="3" destOrd="0" presId="urn:microsoft.com/office/officeart/2018/2/layout/IconVerticalSolidList"/>
+    <dgm:cxn modelId="{FE47B42B-80EA-3C40-91C1-1712E106C893}" type="presParOf" srcId="{DB3CB4C5-C4E3-40DD-A83A-8631F1B42C39}" destId="{EE6E74C3-0A5A-4EBB-9636-E09DF03264C9}" srcOrd="3" destOrd="0" presId="urn:microsoft.com/office/officeart/2018/2/layout/IconVerticalSolidList"/>
+    <dgm:cxn modelId="{A1380353-2A41-834D-83F5-C9DFC6D3987F}" type="presParOf" srcId="{DB3CB4C5-C4E3-40DD-A83A-8631F1B42C39}" destId="{11CD1FEF-3A45-4F86-90E3-B3E3E23C5C61}" srcOrd="4" destOrd="0" presId="urn:microsoft.com/office/officeart/2018/2/layout/IconVerticalSolidList"/>
+    <dgm:cxn modelId="{05090395-BE00-F14E-B115-A0FB5ADFB095}" type="presParOf" srcId="{11CD1FEF-3A45-4F86-90E3-B3E3E23C5C61}" destId="{720B6B5F-ADD7-4FB5-9E4C-7857516D4661}" srcOrd="0" destOrd="0" presId="urn:microsoft.com/office/officeart/2018/2/layout/IconVerticalSolidList"/>
+    <dgm:cxn modelId="{A75A8FA2-8849-0A49-8A90-F30F512479B8}" type="presParOf" srcId="{11CD1FEF-3A45-4F86-90E3-B3E3E23C5C61}" destId="{A6A82B0F-4721-4E90-A38E-F50D874BABF1}" srcOrd="1" destOrd="0" presId="urn:microsoft.com/office/officeart/2018/2/layout/IconVerticalSolidList"/>
+    <dgm:cxn modelId="{F01323F3-D2C5-E64C-8BB7-53C2B44B9301}" type="presParOf" srcId="{11CD1FEF-3A45-4F86-90E3-B3E3E23C5C61}" destId="{C11CC188-FBF3-4D49-88B7-50CBCF633F43}" srcOrd="2" destOrd="0" presId="urn:microsoft.com/office/officeart/2018/2/layout/IconVerticalSolidList"/>
+    <dgm:cxn modelId="{9260F2ED-F149-284E-812A-0687819056F2}" type="presParOf" srcId="{11CD1FEF-3A45-4F86-90E3-B3E3E23C5C61}" destId="{51EA83F8-7F34-4CF2-ABBF-2254FE904512}" srcOrd="3" destOrd="0" presId="urn:microsoft.com/office/officeart/2018/2/layout/IconVerticalSolidList"/>
+    <dgm:cxn modelId="{3402AABF-52FC-EC40-B00B-9393C830A3D9}" type="presParOf" srcId="{DB3CB4C5-C4E3-40DD-A83A-8631F1B42C39}" destId="{C9DF96A8-9608-4B10-8694-515B3E358CD3}" srcOrd="5" destOrd="0" presId="urn:microsoft.com/office/officeart/2018/2/layout/IconVerticalSolidList"/>
+    <dgm:cxn modelId="{4C6EE270-DEB0-FE40-9362-C0D41DDC391B}" type="presParOf" srcId="{DB3CB4C5-C4E3-40DD-A83A-8631F1B42C39}" destId="{3160F95E-F4F7-4CED-948C-8FAFB87E64C3}" srcOrd="6" destOrd="0" presId="urn:microsoft.com/office/officeart/2018/2/layout/IconVerticalSolidList"/>
+    <dgm:cxn modelId="{5320ED12-2D7D-5641-89FC-D31BCCE0BB9C}" type="presParOf" srcId="{3160F95E-F4F7-4CED-948C-8FAFB87E64C3}" destId="{2EEE7D38-BE83-4163-AE6B-C532A6BCA87B}" srcOrd="0" destOrd="0" presId="urn:microsoft.com/office/officeart/2018/2/layout/IconVerticalSolidList"/>
+    <dgm:cxn modelId="{782D1199-8236-FB40-9170-08300EAD2485}" type="presParOf" srcId="{3160F95E-F4F7-4CED-948C-8FAFB87E64C3}" destId="{2076DEA3-2913-45E9-BA80-CC860118E91D}" srcOrd="1" destOrd="0" presId="urn:microsoft.com/office/officeart/2018/2/layout/IconVerticalSolidList"/>
+    <dgm:cxn modelId="{BFEEC07F-6E45-5842-A129-43F572BBCD49}" type="presParOf" srcId="{3160F95E-F4F7-4CED-948C-8FAFB87E64C3}" destId="{591A3B4C-1655-4717-87FB-6A496251E1F6}" srcOrd="2" destOrd="0" presId="urn:microsoft.com/office/officeart/2018/2/layout/IconVerticalSolidList"/>
+    <dgm:cxn modelId="{1A075586-35B6-424C-A391-FAEFFE7F3939}" type="presParOf" srcId="{3160F95E-F4F7-4CED-948C-8FAFB87E64C3}" destId="{51880AF0-0D78-47C7-A2DB-D39B86614A8B}" srcOrd="3" destOrd="0" presId="urn:microsoft.com/office/officeart/2018/2/layout/IconVerticalSolidList"/>
+  </dgm:cxnLst>
+  <dgm:bg/>
+  <dgm:whole/>
+  <dgm:extLst>
+    <a:ext uri="http://schemas.microsoft.com/office/drawing/2008/diagram">
+      <dsp:dataModelExt xmlns:dsp="http://schemas.microsoft.com/office/drawing/2008/diagram" relId="rId6" minVer="http://schemas.openxmlformats.org/drawingml/2006/diagram"/>
+    </a:ext>
+  </dgm:extLst>
+</dgm:dataModel>
+</file>
+
 <file path=ppt/diagrams/drawing1.xml><?xml version="1.0" encoding="utf-8"?>
 <dsp:drawing xmlns:dgm="http://schemas.openxmlformats.org/drawingml/2006/diagram" xmlns:dsp="http://schemas.microsoft.com/office/drawing/2008/diagram" xmlns:a="http://schemas.openxmlformats.org/drawingml/2006/main">
   <dsp:spTree>
@@ -5383,8 +6716,8 @@
       </dsp:nvSpPr>
       <dsp:spPr>
         <a:xfrm>
-          <a:off x="493005" y="2409"/>
-          <a:ext cx="3585990" cy="896497"/>
+          <a:off x="869445" y="2557"/>
+          <a:ext cx="2833108" cy="951555"/>
         </a:xfrm>
         <a:prstGeom prst="roundRect">
           <a:avLst>
@@ -5467,8 +6800,8 @@
         </a:p>
       </dsp:txBody>
       <dsp:txXfrm>
-        <a:off x="519263" y="28667"/>
-        <a:ext cx="3533474" cy="843981"/>
+        <a:off x="897315" y="30427"/>
+        <a:ext cx="2777368" cy="895815"/>
       </dsp:txXfrm>
     </dsp:sp>
     <dsp:sp modelId="{124020F6-EBFD-9E45-AFC9-FF0D2F5392D2}">
@@ -5478,8 +6811,8 @@
       </dsp:nvSpPr>
       <dsp:spPr>
         <a:xfrm rot="5400000">
-          <a:off x="2117907" y="921320"/>
-          <a:ext cx="336186" cy="403423"/>
+          <a:off x="2107583" y="977902"/>
+          <a:ext cx="356833" cy="428200"/>
         </a:xfrm>
         <a:prstGeom prst="rightArrow">
           <a:avLst>
@@ -5537,8 +6870,8 @@
         </a:p>
       </dsp:txBody>
       <dsp:txXfrm rot="-5400000">
-        <a:off x="2164974" y="954938"/>
-        <a:ext cx="242053" cy="235330"/>
+        <a:off x="2157540" y="1013585"/>
+        <a:ext cx="256920" cy="249783"/>
       </dsp:txXfrm>
     </dsp:sp>
     <dsp:sp modelId="{4C3FCE2A-074E-4E43-B891-49A0135B1DA4}">
@@ -5548,8 +6881,8 @@
       </dsp:nvSpPr>
       <dsp:spPr>
         <a:xfrm>
-          <a:off x="493005" y="1347156"/>
-          <a:ext cx="3585990" cy="896497"/>
+          <a:off x="869445" y="1429891"/>
+          <a:ext cx="2833108" cy="951555"/>
         </a:xfrm>
         <a:prstGeom prst="roundRect">
           <a:avLst>
@@ -5644,8 +6977,8 @@
         </a:p>
       </dsp:txBody>
       <dsp:txXfrm>
-        <a:off x="519263" y="1373414"/>
-        <a:ext cx="3533474" cy="843981"/>
+        <a:off x="897315" y="1457761"/>
+        <a:ext cx="2777368" cy="895815"/>
       </dsp:txXfrm>
     </dsp:sp>
     <dsp:sp modelId="{6E23FB77-34D2-2A47-8AF1-B8B4D2539AE7}">
@@ -5655,8 +6988,8 @@
       </dsp:nvSpPr>
       <dsp:spPr>
         <a:xfrm rot="5400000">
-          <a:off x="2117907" y="2266066"/>
-          <a:ext cx="336186" cy="403423"/>
+          <a:off x="2107583" y="2405236"/>
+          <a:ext cx="356833" cy="428200"/>
         </a:xfrm>
         <a:prstGeom prst="rightArrow">
           <a:avLst>
@@ -5714,8 +7047,8 @@
         </a:p>
       </dsp:txBody>
       <dsp:txXfrm rot="-5400000">
-        <a:off x="2164974" y="2299684"/>
-        <a:ext cx="242053" cy="235330"/>
+        <a:off x="2157540" y="2440919"/>
+        <a:ext cx="256920" cy="249783"/>
       </dsp:txXfrm>
     </dsp:sp>
     <dsp:sp modelId="{715F031E-BACA-F246-BCEC-708B0B0EDA25}">
@@ -5725,8 +7058,8 @@
       </dsp:nvSpPr>
       <dsp:spPr>
         <a:xfrm>
-          <a:off x="493005" y="2691902"/>
-          <a:ext cx="3585990" cy="896497"/>
+          <a:off x="869445" y="2857225"/>
+          <a:ext cx="2833108" cy="951555"/>
         </a:xfrm>
         <a:prstGeom prst="roundRect">
           <a:avLst>
@@ -5849,8 +7182,8 @@
         </a:p>
       </dsp:txBody>
       <dsp:txXfrm>
-        <a:off x="519263" y="2718160"/>
-        <a:ext cx="3533474" cy="843981"/>
+        <a:off x="897315" y="2885095"/>
+        <a:ext cx="2777368" cy="895815"/>
       </dsp:txXfrm>
     </dsp:sp>
     <dsp:sp modelId="{09D3147F-6590-EC4A-B235-53EF551D929B}">
@@ -5860,8 +7193,8 @@
       </dsp:nvSpPr>
       <dsp:spPr>
         <a:xfrm rot="5400000">
-          <a:off x="2117907" y="3610813"/>
-          <a:ext cx="336186" cy="403423"/>
+          <a:off x="2107583" y="3832570"/>
+          <a:ext cx="356833" cy="428200"/>
         </a:xfrm>
         <a:prstGeom prst="rightArrow">
           <a:avLst>
@@ -5919,8 +7252,8 @@
         </a:p>
       </dsp:txBody>
       <dsp:txXfrm rot="-5400000">
-        <a:off x="2164974" y="3644431"/>
-        <a:ext cx="242053" cy="235330"/>
+        <a:off x="2157540" y="3868253"/>
+        <a:ext cx="256920" cy="249783"/>
       </dsp:txXfrm>
     </dsp:sp>
     <dsp:sp modelId="{4DF733A8-032B-2D4D-AEC6-C9F3AB5E469C}">
@@ -5930,8 +7263,8 @@
       </dsp:nvSpPr>
       <dsp:spPr>
         <a:xfrm>
-          <a:off x="493005" y="4036649"/>
-          <a:ext cx="3585990" cy="896497"/>
+          <a:off x="869445" y="4284559"/>
+          <a:ext cx="2833108" cy="951555"/>
         </a:xfrm>
         <a:prstGeom prst="roundRect">
           <a:avLst>
@@ -6022,8 +7355,776 @@
         </a:p>
       </dsp:txBody>
       <dsp:txXfrm>
-        <a:off x="519263" y="4062907"/>
-        <a:ext cx="3533474" cy="843981"/>
+        <a:off x="897315" y="4312429"/>
+        <a:ext cx="2777368" cy="895815"/>
+      </dsp:txXfrm>
+    </dsp:sp>
+  </dsp:spTree>
+</dsp:drawing>
+</file>
+
+<file path=ppt/diagrams/drawing4.xml><?xml version="1.0" encoding="utf-8"?>
+<dsp:drawing xmlns:dgm="http://schemas.openxmlformats.org/drawingml/2006/diagram" xmlns:dsp="http://schemas.microsoft.com/office/drawing/2008/diagram" xmlns:a="http://schemas.openxmlformats.org/drawingml/2006/main">
+  <dsp:spTree>
+    <dsp:nvGrpSpPr>
+      <dsp:cNvPr id="0" name=""/>
+      <dsp:cNvGrpSpPr/>
+    </dsp:nvGrpSpPr>
+    <dsp:grpSpPr/>
+    <dsp:sp modelId="{65897E9B-8A11-4D8E-BD23-05886CBE13F1}">
+      <dsp:nvSpPr>
+        <dsp:cNvPr id="0" name=""/>
+        <dsp:cNvSpPr/>
+      </dsp:nvSpPr>
+      <dsp:spPr>
+        <a:xfrm>
+          <a:off x="0" y="1929"/>
+          <a:ext cx="8013192" cy="977756"/>
+        </a:xfrm>
+        <a:prstGeom prst="roundRect">
+          <a:avLst>
+            <a:gd name="adj" fmla="val 10000"/>
+          </a:avLst>
+        </a:prstGeom>
+        <a:solidFill>
+          <a:schemeClr val="accent2">
+            <a:tint val="40000"/>
+            <a:hueOff val="0"/>
+            <a:satOff val="0"/>
+            <a:lumOff val="0"/>
+            <a:alphaOff val="0"/>
+          </a:schemeClr>
+        </a:solidFill>
+        <a:ln>
+          <a:noFill/>
+        </a:ln>
+        <a:effectLst/>
+      </dsp:spPr>
+      <dsp:style>
+        <a:lnRef idx="0">
+          <a:scrgbClr r="0" g="0" b="0"/>
+        </a:lnRef>
+        <a:fillRef idx="1">
+          <a:scrgbClr r="0" g="0" b="0"/>
+        </a:fillRef>
+        <a:effectRef idx="0">
+          <a:scrgbClr r="0" g="0" b="0"/>
+        </a:effectRef>
+        <a:fontRef idx="minor"/>
+      </dsp:style>
+    </dsp:sp>
+    <dsp:sp modelId="{7B67D3AE-32A4-4FAA-9F7A-09AE73CA0D85}">
+      <dsp:nvSpPr>
+        <dsp:cNvPr id="0" name=""/>
+        <dsp:cNvSpPr/>
+      </dsp:nvSpPr>
+      <dsp:spPr>
+        <a:xfrm>
+          <a:off x="295771" y="221924"/>
+          <a:ext cx="537765" cy="537765"/>
+        </a:xfrm>
+        <a:prstGeom prst="rect">
+          <a:avLst/>
+        </a:prstGeom>
+        <a:blipFill>
+          <a:blip xmlns:r="http://schemas.openxmlformats.org/officeDocument/2006/relationships" r:embed="rId1">
+            <a:extLst>
+              <a:ext uri="{28A0092B-C50C-407E-A947-70E740481C1C}">
+                <a14:useLocalDpi xmlns:a14="http://schemas.microsoft.com/office/drawing/2010/main" val="0"/>
+              </a:ext>
+              <a:ext uri="{96DAC541-7B7A-43D3-8B79-37D633B846F1}">
+                <asvg:svgBlip xmlns:asvg="http://schemas.microsoft.com/office/drawing/2016/SVG/main" r:embed="rId2"/>
+              </a:ext>
+            </a:extLst>
+          </a:blip>
+          <a:stretch>
+            <a:fillRect/>
+          </a:stretch>
+        </a:blipFill>
+        <a:ln w="25400" cap="flat" cmpd="sng" algn="ctr">
+          <a:solidFill>
+            <a:schemeClr val="lt1">
+              <a:hueOff val="0"/>
+              <a:satOff val="0"/>
+              <a:lumOff val="0"/>
+              <a:alphaOff val="0"/>
+            </a:schemeClr>
+          </a:solidFill>
+          <a:prstDash val="solid"/>
+        </a:ln>
+        <a:effectLst/>
+      </dsp:spPr>
+      <dsp:style>
+        <a:lnRef idx="2">
+          <a:scrgbClr r="0" g="0" b="0"/>
+        </a:lnRef>
+        <a:fillRef idx="1">
+          <a:scrgbClr r="0" g="0" b="0"/>
+        </a:fillRef>
+        <a:effectRef idx="0">
+          <a:scrgbClr r="0" g="0" b="0"/>
+        </a:effectRef>
+        <a:fontRef idx="minor">
+          <a:schemeClr val="lt1"/>
+        </a:fontRef>
+      </dsp:style>
+    </dsp:sp>
+    <dsp:sp modelId="{19D97CC4-F7C2-4658-B714-98EFAE6DC47F}">
+      <dsp:nvSpPr>
+        <dsp:cNvPr id="0" name=""/>
+        <dsp:cNvSpPr/>
+      </dsp:nvSpPr>
+      <dsp:spPr>
+        <a:xfrm>
+          <a:off x="1129308" y="1929"/>
+          <a:ext cx="6883883" cy="977756"/>
+        </a:xfrm>
+        <a:prstGeom prst="rect">
+          <a:avLst/>
+        </a:prstGeom>
+        <a:noFill/>
+        <a:ln>
+          <a:noFill/>
+        </a:ln>
+        <a:effectLst/>
+      </dsp:spPr>
+      <dsp:style>
+        <a:lnRef idx="0">
+          <a:scrgbClr r="0" g="0" b="0"/>
+        </a:lnRef>
+        <a:fillRef idx="0">
+          <a:scrgbClr r="0" g="0" b="0"/>
+        </a:fillRef>
+        <a:effectRef idx="0">
+          <a:scrgbClr r="0" g="0" b="0"/>
+        </a:effectRef>
+        <a:fontRef idx="minor"/>
+      </dsp:style>
+      <dsp:txBody>
+        <a:bodyPr spcFirstLastPara="0" vert="horz" wrap="square" lIns="103479" tIns="103479" rIns="103479" bIns="103479" numCol="1" spcCol="1270" anchor="ctr" anchorCtr="0">
+          <a:noAutofit/>
+        </a:bodyPr>
+        <a:lstStyle/>
+        <a:p>
+          <a:pPr marL="0" lvl="0" indent="0" algn="l" defTabSz="666750">
+            <a:lnSpc>
+              <a:spcPct val="100000"/>
+            </a:lnSpc>
+            <a:spcBef>
+              <a:spcPct val="0"/>
+            </a:spcBef>
+            <a:spcAft>
+              <a:spcPct val="35000"/>
+            </a:spcAft>
+            <a:buNone/>
+          </a:pPr>
+          <a:r>
+            <a:rPr lang="en-IN" sz="1500" b="1" kern="1200"/>
+            <a:t>Fog needs memory</a:t>
+          </a:r>
+          <a:r>
+            <a:rPr lang="en-IN" sz="1500" kern="1200"/>
+            <a:t> — We don’t only look at the latest reading; we </a:t>
+          </a:r>
+          <a:r>
+            <a:rPr lang="en-IN" sz="1500" b="1" kern="1200"/>
+            <a:t>smooth</a:t>
+          </a:r>
+          <a:r>
+            <a:rPr lang="en-IN" sz="1500" kern="1200"/>
+            <a:t> readings over time, send </a:t>
+          </a:r>
+          <a:r>
+            <a:rPr lang="en-IN" sz="1500" b="1" kern="1200"/>
+            <a:t>summaries on a timer</a:t>
+          </a:r>
+          <a:r>
+            <a:rPr lang="en-IN" sz="1500" kern="1200"/>
+            <a:t>, and fire </a:t>
+          </a:r>
+          <a:r>
+            <a:rPr lang="en-IN" sz="1500" b="1" kern="1200"/>
+            <a:t>alerts when something gets worse</a:t>
+          </a:r>
+          <a:r>
+            <a:rPr lang="en-IN" sz="1500" kern="1200"/>
+            <a:t>, so the code must remember past values and previous alert levels.</a:t>
+          </a:r>
+          <a:endParaRPr lang="en-US" sz="1500" kern="1200"/>
+        </a:p>
+      </dsp:txBody>
+      <dsp:txXfrm>
+        <a:off x="1129308" y="1929"/>
+        <a:ext cx="6883883" cy="977756"/>
+      </dsp:txXfrm>
+    </dsp:sp>
+    <dsp:sp modelId="{EA902BD7-4285-4624-8E82-A7B57F9E24CE}">
+      <dsp:nvSpPr>
+        <dsp:cNvPr id="0" name=""/>
+        <dsp:cNvSpPr/>
+      </dsp:nvSpPr>
+      <dsp:spPr>
+        <a:xfrm>
+          <a:off x="0" y="1224124"/>
+          <a:ext cx="8013192" cy="977756"/>
+        </a:xfrm>
+        <a:prstGeom prst="roundRect">
+          <a:avLst>
+            <a:gd name="adj" fmla="val 10000"/>
+          </a:avLst>
+        </a:prstGeom>
+        <a:solidFill>
+          <a:schemeClr val="accent2">
+            <a:tint val="40000"/>
+            <a:hueOff val="0"/>
+            <a:satOff val="0"/>
+            <a:lumOff val="0"/>
+            <a:alphaOff val="0"/>
+          </a:schemeClr>
+        </a:solidFill>
+        <a:ln>
+          <a:noFill/>
+        </a:ln>
+        <a:effectLst/>
+      </dsp:spPr>
+      <dsp:style>
+        <a:lnRef idx="0">
+          <a:scrgbClr r="0" g="0" b="0"/>
+        </a:lnRef>
+        <a:fillRef idx="1">
+          <a:scrgbClr r="0" g="0" b="0"/>
+        </a:fillRef>
+        <a:effectRef idx="0">
+          <a:scrgbClr r="0" g="0" b="0"/>
+        </a:effectRef>
+        <a:fontRef idx="minor"/>
+      </dsp:style>
+    </dsp:sp>
+    <dsp:sp modelId="{2D38FB9A-076A-4532-82A1-5B03A9F86DF6}">
+      <dsp:nvSpPr>
+        <dsp:cNvPr id="0" name=""/>
+        <dsp:cNvSpPr/>
+      </dsp:nvSpPr>
+      <dsp:spPr>
+        <a:xfrm>
+          <a:off x="295771" y="1444119"/>
+          <a:ext cx="537765" cy="537765"/>
+        </a:xfrm>
+        <a:prstGeom prst="rect">
+          <a:avLst/>
+        </a:prstGeom>
+        <a:blipFill>
+          <a:blip xmlns:r="http://schemas.openxmlformats.org/officeDocument/2006/relationships" r:embed="rId3">
+            <a:extLst>
+              <a:ext uri="{28A0092B-C50C-407E-A947-70E740481C1C}">
+                <a14:useLocalDpi xmlns:a14="http://schemas.microsoft.com/office/drawing/2010/main" val="0"/>
+              </a:ext>
+              <a:ext uri="{96DAC541-7B7A-43D3-8B79-37D633B846F1}">
+                <asvg:svgBlip xmlns:asvg="http://schemas.microsoft.com/office/drawing/2016/SVG/main" r:embed="rId4"/>
+              </a:ext>
+            </a:extLst>
+          </a:blip>
+          <a:stretch>
+            <a:fillRect/>
+          </a:stretch>
+        </a:blipFill>
+        <a:ln w="25400" cap="flat" cmpd="sng" algn="ctr">
+          <a:solidFill>
+            <a:schemeClr val="lt1">
+              <a:hueOff val="0"/>
+              <a:satOff val="0"/>
+              <a:lumOff val="0"/>
+              <a:alphaOff val="0"/>
+            </a:schemeClr>
+          </a:solidFill>
+          <a:prstDash val="solid"/>
+        </a:ln>
+        <a:effectLst/>
+      </dsp:spPr>
+      <dsp:style>
+        <a:lnRef idx="2">
+          <a:scrgbClr r="0" g="0" b="0"/>
+        </a:lnRef>
+        <a:fillRef idx="1">
+          <a:scrgbClr r="0" g="0" b="0"/>
+        </a:fillRef>
+        <a:effectRef idx="0">
+          <a:scrgbClr r="0" g="0" b="0"/>
+        </a:effectRef>
+        <a:fontRef idx="minor">
+          <a:schemeClr val="lt1"/>
+        </a:fontRef>
+      </dsp:style>
+    </dsp:sp>
+    <dsp:sp modelId="{70BC7816-6721-459C-AE1A-8BEBE20B4430}">
+      <dsp:nvSpPr>
+        <dsp:cNvPr id="0" name=""/>
+        <dsp:cNvSpPr/>
+      </dsp:nvSpPr>
+      <dsp:spPr>
+        <a:xfrm>
+          <a:off x="1129308" y="1224124"/>
+          <a:ext cx="6883883" cy="977756"/>
+        </a:xfrm>
+        <a:prstGeom prst="rect">
+          <a:avLst/>
+        </a:prstGeom>
+        <a:noFill/>
+        <a:ln>
+          <a:noFill/>
+        </a:ln>
+        <a:effectLst/>
+      </dsp:spPr>
+      <dsp:style>
+        <a:lnRef idx="0">
+          <a:scrgbClr r="0" g="0" b="0"/>
+        </a:lnRef>
+        <a:fillRef idx="0">
+          <a:scrgbClr r="0" g="0" b="0"/>
+        </a:fillRef>
+        <a:effectRef idx="0">
+          <a:scrgbClr r="0" g="0" b="0"/>
+        </a:effectRef>
+        <a:fontRef idx="minor"/>
+      </dsp:style>
+      <dsp:txBody>
+        <a:bodyPr spcFirstLastPara="0" vert="horz" wrap="square" lIns="103479" tIns="103479" rIns="103479" bIns="103479" numCol="1" spcCol="1270" anchor="ctr" anchorCtr="0">
+          <a:noAutofit/>
+        </a:bodyPr>
+        <a:lstStyle/>
+        <a:p>
+          <a:pPr marL="0" lvl="0" indent="0" algn="l" defTabSz="666750">
+            <a:lnSpc>
+              <a:spcPct val="100000"/>
+            </a:lnSpc>
+            <a:spcBef>
+              <a:spcPct val="0"/>
+            </a:spcBef>
+            <a:spcAft>
+              <a:spcPct val="35000"/>
+            </a:spcAft>
+            <a:buNone/>
+          </a:pPr>
+          <a:r>
+            <a:rPr lang="en-IN" sz="1500" b="1" kern="1200"/>
+            <a:t>Lambdas don’t keep memory</a:t>
+          </a:r>
+          <a:r>
+            <a:rPr lang="en-IN" sz="1500" kern="1200"/>
+            <a:t> — Each run can be a </a:t>
+          </a:r>
+          <a:r>
+            <a:rPr lang="en-IN" sz="1500" b="1" kern="1200"/>
+            <a:t>new, empty</a:t>
+          </a:r>
+          <a:r>
+            <a:rPr lang="en-IN" sz="1500" kern="1200"/>
+            <a:t> process, so anything we only stored in RAM would be </a:t>
+          </a:r>
+          <a:r>
+            <a:rPr lang="en-IN" sz="1500" b="1" kern="1200"/>
+            <a:t>lost</a:t>
+          </a:r>
+          <a:r>
+            <a:rPr lang="en-IN" sz="1500" kern="1200"/>
+            <a:t> between MQTT messages.</a:t>
+          </a:r>
+          <a:endParaRPr lang="en-US" sz="1500" kern="1200"/>
+        </a:p>
+      </dsp:txBody>
+      <dsp:txXfrm>
+        <a:off x="1129308" y="1224124"/>
+        <a:ext cx="6883883" cy="977756"/>
+      </dsp:txXfrm>
+    </dsp:sp>
+    <dsp:sp modelId="{720B6B5F-ADD7-4FB5-9E4C-7857516D4661}">
+      <dsp:nvSpPr>
+        <dsp:cNvPr id="0" name=""/>
+        <dsp:cNvSpPr/>
+      </dsp:nvSpPr>
+      <dsp:spPr>
+        <a:xfrm>
+          <a:off x="0" y="2446319"/>
+          <a:ext cx="8013192" cy="977756"/>
+        </a:xfrm>
+        <a:prstGeom prst="roundRect">
+          <a:avLst>
+            <a:gd name="adj" fmla="val 10000"/>
+          </a:avLst>
+        </a:prstGeom>
+        <a:solidFill>
+          <a:schemeClr val="accent2">
+            <a:tint val="40000"/>
+            <a:hueOff val="0"/>
+            <a:satOff val="0"/>
+            <a:lumOff val="0"/>
+            <a:alphaOff val="0"/>
+          </a:schemeClr>
+        </a:solidFill>
+        <a:ln>
+          <a:noFill/>
+        </a:ln>
+        <a:effectLst/>
+      </dsp:spPr>
+      <dsp:style>
+        <a:lnRef idx="0">
+          <a:scrgbClr r="0" g="0" b="0"/>
+        </a:lnRef>
+        <a:fillRef idx="1">
+          <a:scrgbClr r="0" g="0" b="0"/>
+        </a:fillRef>
+        <a:effectRef idx="0">
+          <a:scrgbClr r="0" g="0" b="0"/>
+        </a:effectRef>
+        <a:fontRef idx="minor"/>
+      </dsp:style>
+    </dsp:sp>
+    <dsp:sp modelId="{A6A82B0F-4721-4E90-A38E-F50D874BABF1}">
+      <dsp:nvSpPr>
+        <dsp:cNvPr id="0" name=""/>
+        <dsp:cNvSpPr/>
+      </dsp:nvSpPr>
+      <dsp:spPr>
+        <a:xfrm>
+          <a:off x="295771" y="2666314"/>
+          <a:ext cx="537765" cy="537765"/>
+        </a:xfrm>
+        <a:prstGeom prst="rect">
+          <a:avLst/>
+        </a:prstGeom>
+        <a:blipFill>
+          <a:blip xmlns:r="http://schemas.openxmlformats.org/officeDocument/2006/relationships" r:embed="rId5">
+            <a:extLst>
+              <a:ext uri="{28A0092B-C50C-407E-A947-70E740481C1C}">
+                <a14:useLocalDpi xmlns:a14="http://schemas.microsoft.com/office/drawing/2010/main" val="0"/>
+              </a:ext>
+              <a:ext uri="{96DAC541-7B7A-43D3-8B79-37D633B846F1}">
+                <asvg:svgBlip xmlns:asvg="http://schemas.microsoft.com/office/drawing/2016/SVG/main" r:embed="rId6"/>
+              </a:ext>
+            </a:extLst>
+          </a:blip>
+          <a:stretch>
+            <a:fillRect/>
+          </a:stretch>
+        </a:blipFill>
+        <a:ln w="25400" cap="flat" cmpd="sng" algn="ctr">
+          <a:solidFill>
+            <a:schemeClr val="lt1">
+              <a:hueOff val="0"/>
+              <a:satOff val="0"/>
+              <a:lumOff val="0"/>
+              <a:alphaOff val="0"/>
+            </a:schemeClr>
+          </a:solidFill>
+          <a:prstDash val="solid"/>
+        </a:ln>
+        <a:effectLst/>
+      </dsp:spPr>
+      <dsp:style>
+        <a:lnRef idx="2">
+          <a:scrgbClr r="0" g="0" b="0"/>
+        </a:lnRef>
+        <a:fillRef idx="1">
+          <a:scrgbClr r="0" g="0" b="0"/>
+        </a:fillRef>
+        <a:effectRef idx="0">
+          <a:scrgbClr r="0" g="0" b="0"/>
+        </a:effectRef>
+        <a:fontRef idx="minor">
+          <a:schemeClr val="lt1"/>
+        </a:fontRef>
+      </dsp:style>
+    </dsp:sp>
+    <dsp:sp modelId="{51EA83F8-7F34-4CF2-ABBF-2254FE904512}">
+      <dsp:nvSpPr>
+        <dsp:cNvPr id="0" name=""/>
+        <dsp:cNvSpPr/>
+      </dsp:nvSpPr>
+      <dsp:spPr>
+        <a:xfrm>
+          <a:off x="1129308" y="2446319"/>
+          <a:ext cx="6883883" cy="977756"/>
+        </a:xfrm>
+        <a:prstGeom prst="rect">
+          <a:avLst/>
+        </a:prstGeom>
+        <a:noFill/>
+        <a:ln>
+          <a:noFill/>
+        </a:ln>
+        <a:effectLst/>
+      </dsp:spPr>
+      <dsp:style>
+        <a:lnRef idx="0">
+          <a:scrgbClr r="0" g="0" b="0"/>
+        </a:lnRef>
+        <a:fillRef idx="0">
+          <a:scrgbClr r="0" g="0" b="0"/>
+        </a:fillRef>
+        <a:effectRef idx="0">
+          <a:scrgbClr r="0" g="0" b="0"/>
+        </a:effectRef>
+        <a:fontRef idx="minor"/>
+      </dsp:style>
+      <dsp:txBody>
+        <a:bodyPr spcFirstLastPara="0" vert="horz" wrap="square" lIns="103479" tIns="103479" rIns="103479" bIns="103479" numCol="1" spcCol="1270" anchor="ctr" anchorCtr="0">
+          <a:noAutofit/>
+        </a:bodyPr>
+        <a:lstStyle/>
+        <a:p>
+          <a:pPr marL="0" lvl="0" indent="0" algn="l" defTabSz="666750">
+            <a:lnSpc>
+              <a:spcPct val="100000"/>
+            </a:lnSpc>
+            <a:spcBef>
+              <a:spcPct val="0"/>
+            </a:spcBef>
+            <a:spcAft>
+              <a:spcPct val="35000"/>
+            </a:spcAft>
+            <a:buNone/>
+          </a:pPr>
+          <a:r>
+            <a:rPr lang="en-IN" sz="1500" b="1" kern="1200"/>
+            <a:t>We save fog state in DynamoDB</a:t>
+          </a:r>
+          <a:r>
+            <a:rPr lang="en-IN" sz="1500" kern="1200"/>
+            <a:t> — After each run we store a </a:t>
+          </a:r>
+          <a:r>
+            <a:rPr lang="en-IN" sz="1500" b="1" kern="1200"/>
+            <a:t>snapshot</a:t>
+          </a:r>
+          <a:r>
+            <a:rPr lang="en-IN" sz="1500" kern="1200"/>
+            <a:t> of that memory (smoothing buffers, timers, last alert levels) in </a:t>
+          </a:r>
+          <a:r>
+            <a:rPr lang="en-IN" sz="1500" b="1" kern="1200"/>
+            <a:t>FogStateTable</a:t>
+          </a:r>
+          <a:r>
+            <a:rPr lang="en-IN" sz="1500" kern="1200"/>
+            <a:t>, and </a:t>
+          </a:r>
+          <a:r>
+            <a:rPr lang="en-IN" sz="1500" b="1" kern="1200"/>
+            <a:t>load it back</a:t>
+          </a:r>
+          <a:r>
+            <a:rPr lang="en-IN" sz="1500" kern="1200"/>
+            <a:t> at the start of the next run so behaviour stays </a:t>
+          </a:r>
+          <a:r>
+            <a:rPr lang="en-IN" sz="1500" b="1" kern="1200"/>
+            <a:t>continuous</a:t>
+          </a:r>
+          <a:r>
+            <a:rPr lang="en-IN" sz="1500" kern="1200"/>
+            <a:t>.</a:t>
+          </a:r>
+          <a:endParaRPr lang="en-US" sz="1500" kern="1200"/>
+        </a:p>
+      </dsp:txBody>
+      <dsp:txXfrm>
+        <a:off x="1129308" y="2446319"/>
+        <a:ext cx="6883883" cy="977756"/>
+      </dsp:txXfrm>
+    </dsp:sp>
+    <dsp:sp modelId="{2EEE7D38-BE83-4163-AE6B-C532A6BCA87B}">
+      <dsp:nvSpPr>
+        <dsp:cNvPr id="0" name=""/>
+        <dsp:cNvSpPr/>
+      </dsp:nvSpPr>
+      <dsp:spPr>
+        <a:xfrm>
+          <a:off x="0" y="3668514"/>
+          <a:ext cx="8013192" cy="977756"/>
+        </a:xfrm>
+        <a:prstGeom prst="roundRect">
+          <a:avLst>
+            <a:gd name="adj" fmla="val 10000"/>
+          </a:avLst>
+        </a:prstGeom>
+        <a:solidFill>
+          <a:schemeClr val="accent2">
+            <a:tint val="40000"/>
+            <a:hueOff val="0"/>
+            <a:satOff val="0"/>
+            <a:lumOff val="0"/>
+            <a:alphaOff val="0"/>
+          </a:schemeClr>
+        </a:solidFill>
+        <a:ln>
+          <a:noFill/>
+        </a:ln>
+        <a:effectLst/>
+      </dsp:spPr>
+      <dsp:style>
+        <a:lnRef idx="0">
+          <a:scrgbClr r="0" g="0" b="0"/>
+        </a:lnRef>
+        <a:fillRef idx="1">
+          <a:scrgbClr r="0" g="0" b="0"/>
+        </a:fillRef>
+        <a:effectRef idx="0">
+          <a:scrgbClr r="0" g="0" b="0"/>
+        </a:effectRef>
+        <a:fontRef idx="minor"/>
+      </dsp:style>
+    </dsp:sp>
+    <dsp:sp modelId="{2076DEA3-2913-45E9-BA80-CC860118E91D}">
+      <dsp:nvSpPr>
+        <dsp:cNvPr id="0" name=""/>
+        <dsp:cNvSpPr/>
+      </dsp:nvSpPr>
+      <dsp:spPr>
+        <a:xfrm>
+          <a:off x="295771" y="3888509"/>
+          <a:ext cx="537765" cy="537765"/>
+        </a:xfrm>
+        <a:prstGeom prst="rect">
+          <a:avLst/>
+        </a:prstGeom>
+        <a:blipFill>
+          <a:blip xmlns:r="http://schemas.openxmlformats.org/officeDocument/2006/relationships" r:embed="rId7">
+            <a:extLst>
+              <a:ext uri="{28A0092B-C50C-407E-A947-70E740481C1C}">
+                <a14:useLocalDpi xmlns:a14="http://schemas.microsoft.com/office/drawing/2010/main" val="0"/>
+              </a:ext>
+              <a:ext uri="{96DAC541-7B7A-43D3-8B79-37D633B846F1}">
+                <asvg:svgBlip xmlns:asvg="http://schemas.microsoft.com/office/drawing/2016/SVG/main" r:embed="rId8"/>
+              </a:ext>
+            </a:extLst>
+          </a:blip>
+          <a:stretch>
+            <a:fillRect/>
+          </a:stretch>
+        </a:blipFill>
+        <a:ln w="25400" cap="flat" cmpd="sng" algn="ctr">
+          <a:solidFill>
+            <a:schemeClr val="lt1">
+              <a:hueOff val="0"/>
+              <a:satOff val="0"/>
+              <a:lumOff val="0"/>
+              <a:alphaOff val="0"/>
+            </a:schemeClr>
+          </a:solidFill>
+          <a:prstDash val="solid"/>
+        </a:ln>
+        <a:effectLst/>
+      </dsp:spPr>
+      <dsp:style>
+        <a:lnRef idx="2">
+          <a:scrgbClr r="0" g="0" b="0"/>
+        </a:lnRef>
+        <a:fillRef idx="1">
+          <a:scrgbClr r="0" g="0" b="0"/>
+        </a:fillRef>
+        <a:effectRef idx="0">
+          <a:scrgbClr r="0" g="0" b="0"/>
+        </a:effectRef>
+        <a:fontRef idx="minor">
+          <a:schemeClr val="lt1"/>
+        </a:fontRef>
+      </dsp:style>
+    </dsp:sp>
+    <dsp:sp modelId="{51880AF0-0D78-47C7-A2DB-D39B86614A8B}">
+      <dsp:nvSpPr>
+        <dsp:cNvPr id="0" name=""/>
+        <dsp:cNvSpPr/>
+      </dsp:nvSpPr>
+      <dsp:spPr>
+        <a:xfrm>
+          <a:off x="1129308" y="3668514"/>
+          <a:ext cx="6883883" cy="977756"/>
+        </a:xfrm>
+        <a:prstGeom prst="rect">
+          <a:avLst/>
+        </a:prstGeom>
+        <a:noFill/>
+        <a:ln>
+          <a:noFill/>
+        </a:ln>
+        <a:effectLst/>
+      </dsp:spPr>
+      <dsp:style>
+        <a:lnRef idx="0">
+          <a:scrgbClr r="0" g="0" b="0"/>
+        </a:lnRef>
+        <a:fillRef idx="0">
+          <a:scrgbClr r="0" g="0" b="0"/>
+        </a:fillRef>
+        <a:effectRef idx="0">
+          <a:scrgbClr r="0" g="0" b="0"/>
+        </a:effectRef>
+        <a:fontRef idx="minor"/>
+      </dsp:style>
+      <dsp:txBody>
+        <a:bodyPr spcFirstLastPara="0" vert="horz" wrap="square" lIns="103479" tIns="103479" rIns="103479" bIns="103479" numCol="1" spcCol="1270" anchor="ctr" anchorCtr="0">
+          <a:noAutofit/>
+        </a:bodyPr>
+        <a:lstStyle/>
+        <a:p>
+          <a:pPr marL="0" lvl="0" indent="0" algn="l" defTabSz="666750">
+            <a:lnSpc>
+              <a:spcPct val="100000"/>
+            </a:lnSpc>
+            <a:spcBef>
+              <a:spcPct val="0"/>
+            </a:spcBef>
+            <a:spcAft>
+              <a:spcPct val="35000"/>
+            </a:spcAft>
+            <a:buNone/>
+          </a:pPr>
+          <a:r>
+            <a:rPr lang="en-IN" sz="1500" b="1" kern="1200"/>
+            <a:t>Same messages as HTTPS</a:t>
+          </a:r>
+          <a:r>
+            <a:rPr lang="en-IN" sz="1500" kern="1200"/>
+            <a:t> — What we send to the queue is the </a:t>
+          </a:r>
+          <a:r>
+            <a:rPr lang="en-IN" sz="1500" b="1" kern="1200"/>
+            <a:t>same JSON</a:t>
+          </a:r>
+          <a:r>
+            <a:rPr lang="en-IN" sz="1500" kern="1200"/>
+            <a:t> as </a:t>
+          </a:r>
+          <a:r>
+            <a:rPr lang="en-IN" sz="1500" b="1" kern="1200"/>
+            <a:t>POST /ingest</a:t>
+          </a:r>
+          <a:r>
+            <a:rPr lang="en-IN" sz="1500" kern="1200"/>
+            <a:t>, so </a:t>
+          </a:r>
+          <a:r>
+            <a:rPr lang="en-IN" sz="1500" b="1" kern="1200"/>
+            <a:t>MQTT and HTTPS</a:t>
+          </a:r>
+          <a:r>
+            <a:rPr lang="en-IN" sz="1500" kern="1200"/>
+            <a:t> both use </a:t>
+          </a:r>
+          <a:r>
+            <a:rPr lang="en-IN" sz="1500" b="1" kern="1200"/>
+            <a:t>one</a:t>
+          </a:r>
+          <a:r>
+            <a:rPr lang="en-IN" sz="1500" kern="1200"/>
+            <a:t> downstream pipeline (SQS → processor → storage).</a:t>
+          </a:r>
+          <a:endParaRPr lang="en-US" sz="1500" kern="1200"/>
+        </a:p>
+      </dsp:txBody>
+      <dsp:txXfrm>
+        <a:off x="1129308" y="3668514"/>
+        <a:ext cx="6883883" cy="977756"/>
       </dsp:txXfrm>
     </dsp:sp>
   </dsp:spTree>
@@ -6603,6 +8704,300 @@
 </dgm:layoutDef>
 </file>
 
+<file path=ppt/diagrams/layout4.xml><?xml version="1.0" encoding="utf-8"?>
+<dgm:layoutDef xmlns:dgm="http://schemas.openxmlformats.org/drawingml/2006/diagram" xmlns:a="http://schemas.openxmlformats.org/drawingml/2006/main" uniqueId="urn:microsoft.com/office/officeart/2018/2/layout/IconVerticalSolidList">
+  <dgm:title val="Icon Vertical Solid List"/>
+  <dgm:desc val="Use to show a series of visuals from top to bottom with Level 1 or Level 1 and Level 2 text grouped in a shape. Works best with icons or small pictures with lengthier descriptions."/>
+  <dgm:catLst>
+    <dgm:cat type="icon" pri="500"/>
+  </dgm:catLst>
+  <dgm:sampData useDef="1">
+    <dgm:dataModel>
+      <dgm:ptLst/>
+      <dgm:bg/>
+      <dgm:whole/>
+    </dgm:dataModel>
+  </dgm:sampData>
+  <dgm:styleData useDef="1">
+    <dgm:dataModel>
+      <dgm:ptLst/>
+      <dgm:bg/>
+      <dgm:whole/>
+    </dgm:dataModel>
+  </dgm:styleData>
+  <dgm:clrData useDef="1">
+    <dgm:dataModel>
+      <dgm:ptLst/>
+      <dgm:bg/>
+      <dgm:whole/>
+    </dgm:dataModel>
+  </dgm:clrData>
+  <dgm:layoutNode name="root">
+    <dgm:varLst>
+      <dgm:dir/>
+      <dgm:resizeHandles val="exact"/>
+    </dgm:varLst>
+    <dgm:choose name="Name0">
+      <dgm:if name="Name1" axis="self" func="var" arg="dir" op="equ" val="norm">
+        <dgm:alg type="lin">
+          <dgm:param type="linDir" val="fromT"/>
+          <dgm:param type="nodeHorzAlign" val="l"/>
+        </dgm:alg>
+      </dgm:if>
+      <dgm:else name="Name2">
+        <dgm:alg type="lin">
+          <dgm:param type="linDir" val="fromT"/>
+          <dgm:param type="nodeHorzAlign" val="r"/>
+        </dgm:alg>
+      </dgm:else>
+    </dgm:choose>
+    <dgm:shape xmlns:r="http://schemas.openxmlformats.org/officeDocument/2006/relationships" r:blip="">
+      <dgm:adjLst/>
+    </dgm:shape>
+    <dgm:presOf/>
+    <dgm:choose name="Name3">
+      <dgm:if name="Name4" axis="ch" ptType="node" func="cnt" op="lte" val="3">
+        <dgm:constrLst>
+          <dgm:constr type="h" for="ch" forName="compNode" refType="h" fact="0.3"/>
+          <dgm:constr type="w" for="ch" forName="compNode" refType="w"/>
+          <dgm:constr type="h" for="ch" forName="sibTrans" refType="h" refFor="ch" refForName="compNode" fact="0.25"/>
+          <dgm:constr type="primFontSz" for="des" forName="parTx" val="25"/>
+          <dgm:constr type="primFontSz" for="des" forName="desTx" refType="primFontSz" refFor="des" refForName="parTx" op="lte" fact="0.75"/>
+          <dgm:constr type="h" for="des" forName="compNode" op="equ"/>
+          <dgm:constr type="h" for="des" forName="bgRect" op="equ"/>
+          <dgm:constr type="h" for="des" forName="iconRect" op="equ"/>
+          <dgm:constr type="w" for="des" forName="iconRect" op="equ"/>
+          <dgm:constr type="h" for="des" forName="spaceRect" op="equ"/>
+          <dgm:constr type="h" for="des" forName="parTx" op="equ"/>
+          <dgm:constr type="h" for="des" forName="desTx" op="equ"/>
+        </dgm:constrLst>
+      </dgm:if>
+      <dgm:if name="Name5" axis="ch" ptType="node" func="cnt" op="lte" val="4">
+        <dgm:constrLst>
+          <dgm:constr type="h" for="ch" forName="compNode" refType="h" fact="0.3"/>
+          <dgm:constr type="w" for="ch" forName="compNode" refType="w"/>
+          <dgm:constr type="h" for="ch" forName="sibTrans" refType="h" refFor="ch" refForName="compNode" fact="0.25"/>
+          <dgm:constr type="primFontSz" for="des" forName="parTx" val="22"/>
+          <dgm:constr type="primFontSz" for="des" forName="desTx" refType="primFontSz" refFor="des" refForName="parTx" op="lte" fact="0.75"/>
+          <dgm:constr type="h" for="des" forName="compNode" op="equ"/>
+          <dgm:constr type="h" for="des" forName="bgRect" op="equ"/>
+          <dgm:constr type="h" for="des" forName="iconRect" op="equ"/>
+          <dgm:constr type="w" for="des" forName="iconRect" op="equ"/>
+          <dgm:constr type="h" for="des" forName="spaceRect" op="equ"/>
+          <dgm:constr type="h" for="des" forName="parTx" op="equ"/>
+          <dgm:constr type="h" for="des" forName="desTx" op="equ"/>
+        </dgm:constrLst>
+      </dgm:if>
+      <dgm:if name="Name6" axis="ch" ptType="node" func="cnt" op="lte" val="6">
+        <dgm:constrLst>
+          <dgm:constr type="h" for="ch" forName="compNode" refType="h" fact="0.3"/>
+          <dgm:constr type="w" for="ch" forName="compNode" refType="w"/>
+          <dgm:constr type="h" for="ch" forName="sibTrans" refType="h" refFor="ch" refForName="compNode" fact="0.25"/>
+          <dgm:constr type="primFontSz" for="des" forName="parTx" val="19"/>
+          <dgm:constr type="primFontSz" for="des" forName="desTx" refType="primFontSz" refFor="des" refForName="parTx" op="lte" fact="0.75"/>
+          <dgm:constr type="h" for="des" forName="compNode" op="equ"/>
+          <dgm:constr type="h" for="des" forName="bgRect" op="equ"/>
+          <dgm:constr type="h" for="des" forName="iconRect" op="equ"/>
+          <dgm:constr type="w" for="des" forName="iconRect" op="equ"/>
+          <dgm:constr type="h" for="des" forName="spaceRect" op="equ"/>
+          <dgm:constr type="h" for="des" forName="parTx" op="equ"/>
+          <dgm:constr type="h" for="des" forName="desTx" op="equ"/>
+        </dgm:constrLst>
+      </dgm:if>
+      <dgm:else name="Name7">
+        <dgm:constrLst>
+          <dgm:constr type="h" for="ch" forName="compNode" refType="h" fact="0.3"/>
+          <dgm:constr type="w" for="ch" forName="compNode" refType="w"/>
+          <dgm:constr type="h" for="ch" forName="sibTrans" refType="h" refFor="ch" refForName="compNode" fact="0.25"/>
+          <dgm:constr type="primFontSz" for="des" forName="parTx" val="16"/>
+          <dgm:constr type="primFontSz" for="des" forName="desTx" refType="primFontSz" refFor="des" refForName="parTx" op="lte" fact="0.75"/>
+          <dgm:constr type="h" for="des" forName="compNode" op="equ"/>
+          <dgm:constr type="h" for="des" forName="bgRect" op="equ"/>
+          <dgm:constr type="h" for="des" forName="iconRect" op="equ"/>
+          <dgm:constr type="w" for="des" forName="iconRect" op="equ"/>
+          <dgm:constr type="h" for="des" forName="spaceRect" op="equ"/>
+          <dgm:constr type="h" for="des" forName="parTx" op="equ"/>
+          <dgm:constr type="h" for="des" forName="desTx" op="equ"/>
+        </dgm:constrLst>
+      </dgm:else>
+    </dgm:choose>
+    <dgm:ruleLst>
+      <dgm:rule type="h" for="ch" forName="compNode" val="0" fact="NaN" max="NaN"/>
+    </dgm:ruleLst>
+    <dgm:forEach name="Name8" axis="ch" ptType="node">
+      <dgm:layoutNode name="compNode">
+        <dgm:alg type="composite"/>
+        <dgm:shape xmlns:r="http://schemas.openxmlformats.org/officeDocument/2006/relationships" r:blip="">
+          <dgm:adjLst/>
+        </dgm:shape>
+        <dgm:presOf axis="self"/>
+        <dgm:choose name="Name9">
+          <dgm:if name="Name10" axis="ch" ptType="node" func="cnt" op="gte" val="1">
+            <dgm:constrLst>
+              <dgm:constr type="w" for="ch" forName="bgRect" refType="w"/>
+              <dgm:constr type="h" for="ch" forName="bgRect" refType="h"/>
+              <dgm:constr type="l" for="ch" forName="bgRect"/>
+              <dgm:constr type="t" for="ch" forName="bgRect"/>
+              <dgm:constr type="h" for="ch" forName="iconRect" refType="h" fact="0.55"/>
+              <dgm:constr type="w" for="ch" forName="iconRect" refType="h" refFor="ch" refForName="iconRect"/>
+              <dgm:constr type="l" for="ch" forName="iconRect" refType="h" refFor="ch" refForName="iconRect" fact="0.55"/>
+              <dgm:constr type="ctrY" for="ch" forName="iconRect" refType="ctrY" refFor="ch" refForName="bgRect"/>
+              <dgm:constr type="w" for="ch" forName="spaceRect" refType="l" refFor="ch" refForName="iconRect"/>
+              <dgm:constr type="h" for="ch" forName="spaceRect" refType="h"/>
+              <dgm:constr type="l" for="ch" forName="spaceRect" refType="r" refFor="ch" refForName="iconRect"/>
+              <dgm:constr type="t" for="ch" forName="spaceRect"/>
+              <dgm:constr type="w" for="ch" forName="parTx" refType="w" fact="0.45"/>
+              <dgm:constr type="h" for="ch" forName="parTx" refType="h"/>
+              <dgm:constr type="l" for="ch" forName="parTx" refType="r" refFor="ch" refForName="spaceRect"/>
+              <dgm:constr type="t" for="ch" forName="parTx"/>
+              <dgm:constr type="h" for="ch" forName="desTx" refType="h"/>
+              <dgm:constr type="l" for="ch" forName="desTx" refType="r" refFor="ch" refForName="parTx"/>
+              <dgm:constr type="t" for="ch" forName="desTx"/>
+            </dgm:constrLst>
+          </dgm:if>
+          <dgm:else name="Name11">
+            <dgm:constrLst>
+              <dgm:constr type="w" for="ch" forName="bgRect" refType="w"/>
+              <dgm:constr type="h" for="ch" forName="bgRect" refType="h"/>
+              <dgm:constr type="l" for="ch" forName="bgRect"/>
+              <dgm:constr type="t" for="ch" forName="bgRect"/>
+              <dgm:constr type="h" for="ch" forName="iconRect" refType="h" fact="0.55"/>
+              <dgm:constr type="w" for="ch" forName="iconRect" refType="h" refFor="ch" refForName="iconRect"/>
+              <dgm:constr type="l" for="ch" forName="iconRect" refType="h" refFor="ch" refForName="iconRect" fact="0.55"/>
+              <dgm:constr type="ctrY" for="ch" forName="iconRect" refType="ctrY" refFor="ch" refForName="bgRect"/>
+              <dgm:constr type="w" for="ch" forName="spaceRect" refType="l" refFor="ch" refForName="iconRect"/>
+              <dgm:constr type="h" for="ch" forName="spaceRect" refType="h"/>
+              <dgm:constr type="l" for="ch" forName="spaceRect" refType="r" refFor="ch" refForName="iconRect"/>
+              <dgm:constr type="t" for="ch" forName="spaceRect"/>
+              <dgm:constr type="h" for="ch" forName="parTx" refType="h"/>
+              <dgm:constr type="l" for="ch" forName="parTx" refType="r" refFor="ch" refForName="spaceRect"/>
+              <dgm:constr type="t" for="ch" forName="parTx"/>
+            </dgm:constrLst>
+          </dgm:else>
+        </dgm:choose>
+        <dgm:ruleLst>
+          <dgm:rule type="h" val="INF" fact="NaN" max="NaN"/>
+        </dgm:ruleLst>
+        <dgm:layoutNode name="bgRect" styleLbl="bgShp">
+          <dgm:alg type="sp"/>
+          <dgm:shape xmlns:r="http://schemas.openxmlformats.org/officeDocument/2006/relationships" type="roundRect" r:blip="">
+            <dgm:adjLst>
+              <dgm:adj idx="1" val="0.1"/>
+            </dgm:adjLst>
+          </dgm:shape>
+          <dgm:presOf/>
+          <dgm:constrLst/>
+          <dgm:ruleLst/>
+        </dgm:layoutNode>
+        <dgm:layoutNode name="iconRect" styleLbl="node1">
+          <dgm:alg type="sp"/>
+          <dgm:shape xmlns:r="http://schemas.openxmlformats.org/officeDocument/2006/relationships" type="rect" r:blip="" blipPhldr="1">
+            <dgm:adjLst/>
+          </dgm:shape>
+          <dgm:presOf/>
+          <dgm:constrLst/>
+          <dgm:ruleLst/>
+        </dgm:layoutNode>
+        <dgm:layoutNode name="spaceRect">
+          <dgm:alg type="sp"/>
+          <dgm:shape xmlns:r="http://schemas.openxmlformats.org/officeDocument/2006/relationships" r:blip="">
+            <dgm:adjLst/>
+          </dgm:shape>
+          <dgm:presOf/>
+          <dgm:constrLst/>
+          <dgm:ruleLst/>
+        </dgm:layoutNode>
+        <dgm:layoutNode name="parTx" styleLbl="revTx">
+          <dgm:varLst>
+            <dgm:chMax val="0"/>
+            <dgm:chPref val="0"/>
+          </dgm:varLst>
+          <dgm:alg type="tx">
+            <dgm:param type="txAnchorVert" val="mid"/>
+            <dgm:param type="parTxLTRAlign" val="l"/>
+            <dgm:param type="shpTxLTRAlignCh" val="l"/>
+            <dgm:param type="parTxRTLAlign" val="r"/>
+            <dgm:param type="shpTxRTLAlignCh" val="r"/>
+          </dgm:alg>
+          <dgm:shape xmlns:r="http://schemas.openxmlformats.org/officeDocument/2006/relationships" type="rect" r:blip="">
+            <dgm:adjLst/>
+          </dgm:shape>
+          <dgm:presOf axis="self" ptType="node"/>
+          <dgm:constrLst>
+            <dgm:constr type="lMarg" refType="h" fact="0.3"/>
+            <dgm:constr type="rMarg" refType="h" fact="0.3"/>
+            <dgm:constr type="tMarg" refType="h" fact="0.3"/>
+            <dgm:constr type="bMarg" refType="h" fact="0.3"/>
+          </dgm:constrLst>
+          <dgm:ruleLst>
+            <dgm:rule type="primFontSz" val="14" fact="NaN" max="NaN"/>
+            <dgm:rule type="h" val="INF" fact="NaN" max="NaN"/>
+          </dgm:ruleLst>
+        </dgm:layoutNode>
+        <dgm:choose name="Name12">
+          <dgm:if name="Name13" axis="ch" ptType="node" func="cnt" op="gte" val="1">
+            <dgm:layoutNode name="desTx" styleLbl="revTx">
+              <dgm:varLst/>
+              <dgm:alg type="tx">
+                <dgm:param type="txAnchorVertCh" val="mid"/>
+                <dgm:param type="parTxLTRAlign" val="l"/>
+                <dgm:param type="shpTxLTRAlignCh" val="l"/>
+                <dgm:param type="parTxRTLAlign" val="r"/>
+                <dgm:param type="shpTxRTLAlignCh" val="r"/>
+                <dgm:param type="stBulletLvl" val="0"/>
+              </dgm:alg>
+              <dgm:shape xmlns:r="http://schemas.openxmlformats.org/officeDocument/2006/relationships" type="rect" r:blip="">
+                <dgm:adjLst/>
+              </dgm:shape>
+              <dgm:presOf axis="des" ptType="node"/>
+              <dgm:constrLst>
+                <dgm:constr type="primFontSz" val="18"/>
+                <dgm:constr type="secFontSz" refType="primFontSz"/>
+                <dgm:constr type="lMarg" refType="h" fact="0.3"/>
+                <dgm:constr type="rMarg" refType="h" fact="0.3"/>
+                <dgm:constr type="tMarg" refType="h" fact="0.3"/>
+                <dgm:constr type="bMarg" refType="h" fact="0.3"/>
+              </dgm:constrLst>
+              <dgm:ruleLst>
+                <dgm:rule type="primFontSz" val="11" fact="NaN" max="NaN"/>
+              </dgm:ruleLst>
+            </dgm:layoutNode>
+          </dgm:if>
+          <dgm:else name="Name14"/>
+        </dgm:choose>
+      </dgm:layoutNode>
+      <dgm:forEach name="Name15" axis="followSib" ptType="sibTrans" cnt="1">
+        <dgm:layoutNode name="sibTrans">
+          <dgm:alg type="sp"/>
+          <dgm:shape xmlns:r="http://schemas.openxmlformats.org/officeDocument/2006/relationships" r:blip="">
+            <dgm:adjLst/>
+          </dgm:shape>
+          <dgm:presOf axis="self"/>
+          <dgm:constrLst/>
+          <dgm:ruleLst/>
+        </dgm:layoutNode>
+      </dgm:forEach>
+    </dgm:forEach>
+  </dgm:layoutNode>
+  <dgm:extLst>
+    <a:ext uri="{68A01E43-0DF5-4B5B-8FA6-DAF915123BFB}">
+      <dgm1612:lstStyle xmlns:dgm1612="http://schemas.microsoft.com/office/drawing/2016/12/diagram">
+        <a:lvl1pPr>
+          <a:lnSpc>
+            <a:spcPct val="100000"/>
+          </a:lnSpc>
+        </a:lvl1pPr>
+        <a:lvl2pPr>
+          <a:lnSpc>
+            <a:spcPct val="100000"/>
+          </a:lnSpc>
+        </a:lvl2pPr>
+      </dgm1612:lstStyle>
+    </a:ext>
+  </dgm:extLst>
+</dgm:layoutDef>
+</file>
+
 <file path=ppt/diagrams/quickStyle1.xml><?xml version="1.0" encoding="utf-8"?>
 <dgm:styleDef xmlns:dgm="http://schemas.openxmlformats.org/drawingml/2006/diagram" xmlns:a="http://schemas.openxmlformats.org/drawingml/2006/main" uniqueId="urn:microsoft.com/office/officeart/2005/8/quickstyle/simple1">
   <dgm:title val=""/>
@@ -8672,6 +11067,1040 @@
 </file>
 
 <file path=ppt/diagrams/quickStyle3.xml><?xml version="1.0" encoding="utf-8"?>
+<dgm:styleDef xmlns:dgm="http://schemas.openxmlformats.org/drawingml/2006/diagram" xmlns:a="http://schemas.openxmlformats.org/drawingml/2006/main" uniqueId="urn:microsoft.com/office/officeart/2005/8/quickstyle/simple1">
+  <dgm:title val=""/>
+  <dgm:desc val=""/>
+  <dgm:catLst>
+    <dgm:cat type="simple" pri="10100"/>
+  </dgm:catLst>
+  <dgm:scene3d>
+    <a:camera prst="orthographicFront"/>
+    <a:lightRig rig="threePt" dir="t"/>
+  </dgm:scene3d>
+  <dgm:styleLbl name="node0">
+    <dgm:scene3d>
+      <a:camera prst="orthographicFront"/>
+      <a:lightRig rig="threePt" dir="t"/>
+    </dgm:scene3d>
+    <dgm:sp3d/>
+    <dgm:txPr/>
+    <dgm:style>
+      <a:lnRef idx="2">
+        <a:scrgbClr r="0" g="0" b="0"/>
+      </a:lnRef>
+      <a:fillRef idx="1">
+        <a:scrgbClr r="0" g="0" b="0"/>
+      </a:fillRef>
+      <a:effectRef idx="0">
+        <a:scrgbClr r="0" g="0" b="0"/>
+      </a:effectRef>
+      <a:fontRef idx="minor">
+        <a:schemeClr val="lt1"/>
+      </a:fontRef>
+    </dgm:style>
+  </dgm:styleLbl>
+  <dgm:styleLbl name="lnNode1">
+    <dgm:scene3d>
+      <a:camera prst="orthographicFront"/>
+      <a:lightRig rig="threePt" dir="t"/>
+    </dgm:scene3d>
+    <dgm:sp3d/>
+    <dgm:txPr/>
+    <dgm:style>
+      <a:lnRef idx="2">
+        <a:scrgbClr r="0" g="0" b="0"/>
+      </a:lnRef>
+      <a:fillRef idx="1">
+        <a:scrgbClr r="0" g="0" b="0"/>
+      </a:fillRef>
+      <a:effectRef idx="0">
+        <a:scrgbClr r="0" g="0" b="0"/>
+      </a:effectRef>
+      <a:fontRef idx="minor">
+        <a:schemeClr val="lt1"/>
+      </a:fontRef>
+    </dgm:style>
+  </dgm:styleLbl>
+  <dgm:styleLbl name="vennNode1">
+    <dgm:scene3d>
+      <a:camera prst="orthographicFront"/>
+      <a:lightRig rig="threePt" dir="t"/>
+    </dgm:scene3d>
+    <dgm:sp3d/>
+    <dgm:txPr/>
+    <dgm:style>
+      <a:lnRef idx="2">
+        <a:scrgbClr r="0" g="0" b="0"/>
+      </a:lnRef>
+      <a:fillRef idx="1">
+        <a:scrgbClr r="0" g="0" b="0"/>
+      </a:fillRef>
+      <a:effectRef idx="0">
+        <a:scrgbClr r="0" g="0" b="0"/>
+      </a:effectRef>
+      <a:fontRef idx="minor">
+        <a:schemeClr val="tx1"/>
+      </a:fontRef>
+    </dgm:style>
+  </dgm:styleLbl>
+  <dgm:styleLbl name="alignNode1">
+    <dgm:scene3d>
+      <a:camera prst="orthographicFront"/>
+      <a:lightRig rig="threePt" dir="t"/>
+    </dgm:scene3d>
+    <dgm:sp3d/>
+    <dgm:txPr/>
+    <dgm:style>
+      <a:lnRef idx="2">
+        <a:scrgbClr r="0" g="0" b="0"/>
+      </a:lnRef>
+      <a:fillRef idx="1">
+        <a:scrgbClr r="0" g="0" b="0"/>
+      </a:fillRef>
+      <a:effectRef idx="0">
+        <a:scrgbClr r="0" g="0" b="0"/>
+      </a:effectRef>
+      <a:fontRef idx="minor">
+        <a:schemeClr val="lt1"/>
+      </a:fontRef>
+    </dgm:style>
+  </dgm:styleLbl>
+  <dgm:styleLbl name="node1">
+    <dgm:scene3d>
+      <a:camera prst="orthographicFront"/>
+      <a:lightRig rig="threePt" dir="t"/>
+    </dgm:scene3d>
+    <dgm:sp3d/>
+    <dgm:txPr/>
+    <dgm:style>
+      <a:lnRef idx="2">
+        <a:scrgbClr r="0" g="0" b="0"/>
+      </a:lnRef>
+      <a:fillRef idx="1">
+        <a:scrgbClr r="0" g="0" b="0"/>
+      </a:fillRef>
+      <a:effectRef idx="0">
+        <a:scrgbClr r="0" g="0" b="0"/>
+      </a:effectRef>
+      <a:fontRef idx="minor">
+        <a:schemeClr val="lt1"/>
+      </a:fontRef>
+    </dgm:style>
+  </dgm:styleLbl>
+  <dgm:styleLbl name="node2">
+    <dgm:scene3d>
+      <a:camera prst="orthographicFront"/>
+      <a:lightRig rig="threePt" dir="t"/>
+    </dgm:scene3d>
+    <dgm:sp3d/>
+    <dgm:txPr/>
+    <dgm:style>
+      <a:lnRef idx="2">
+        <a:scrgbClr r="0" g="0" b="0"/>
+      </a:lnRef>
+      <a:fillRef idx="1">
+        <a:scrgbClr r="0" g="0" b="0"/>
+      </a:fillRef>
+      <a:effectRef idx="0">
+        <a:scrgbClr r="0" g="0" b="0"/>
+      </a:effectRef>
+      <a:fontRef idx="minor">
+        <a:schemeClr val="lt1"/>
+      </a:fontRef>
+    </dgm:style>
+  </dgm:styleLbl>
+  <dgm:styleLbl name="node3">
+    <dgm:scene3d>
+      <a:camera prst="orthographicFront"/>
+      <a:lightRig rig="threePt" dir="t"/>
+    </dgm:scene3d>
+    <dgm:sp3d/>
+    <dgm:txPr/>
+    <dgm:style>
+      <a:lnRef idx="2">
+        <a:scrgbClr r="0" g="0" b="0"/>
+      </a:lnRef>
+      <a:fillRef idx="1">
+        <a:scrgbClr r="0" g="0" b="0"/>
+      </a:fillRef>
+      <a:effectRef idx="0">
+        <a:scrgbClr r="0" g="0" b="0"/>
+      </a:effectRef>
+      <a:fontRef idx="minor">
+        <a:schemeClr val="lt1"/>
+      </a:fontRef>
+    </dgm:style>
+  </dgm:styleLbl>
+  <dgm:styleLbl name="node4">
+    <dgm:scene3d>
+      <a:camera prst="orthographicFront"/>
+      <a:lightRig rig="threePt" dir="t"/>
+    </dgm:scene3d>
+    <dgm:sp3d/>
+    <dgm:txPr/>
+    <dgm:style>
+      <a:lnRef idx="2">
+        <a:scrgbClr r="0" g="0" b="0"/>
+      </a:lnRef>
+      <a:fillRef idx="1">
+        <a:scrgbClr r="0" g="0" b="0"/>
+      </a:fillRef>
+      <a:effectRef idx="0">
+        <a:scrgbClr r="0" g="0" b="0"/>
+      </a:effectRef>
+      <a:fontRef idx="minor">
+        <a:schemeClr val="lt1"/>
+      </a:fontRef>
+    </dgm:style>
+  </dgm:styleLbl>
+  <dgm:styleLbl name="fgImgPlace1">
+    <dgm:scene3d>
+      <a:camera prst="orthographicFront"/>
+      <a:lightRig rig="threePt" dir="t"/>
+    </dgm:scene3d>
+    <dgm:sp3d/>
+    <dgm:txPr/>
+    <dgm:style>
+      <a:lnRef idx="2">
+        <a:scrgbClr r="0" g="0" b="0"/>
+      </a:lnRef>
+      <a:fillRef idx="1">
+        <a:scrgbClr r="0" g="0" b="0"/>
+      </a:fillRef>
+      <a:effectRef idx="0">
+        <a:scrgbClr r="0" g="0" b="0"/>
+      </a:effectRef>
+      <a:fontRef idx="minor"/>
+    </dgm:style>
+  </dgm:styleLbl>
+  <dgm:styleLbl name="alignImgPlace1">
+    <dgm:scene3d>
+      <a:camera prst="orthographicFront"/>
+      <a:lightRig rig="threePt" dir="t"/>
+    </dgm:scene3d>
+    <dgm:sp3d/>
+    <dgm:txPr/>
+    <dgm:style>
+      <a:lnRef idx="2">
+        <a:scrgbClr r="0" g="0" b="0"/>
+      </a:lnRef>
+      <a:fillRef idx="1">
+        <a:scrgbClr r="0" g="0" b="0"/>
+      </a:fillRef>
+      <a:effectRef idx="0">
+        <a:scrgbClr r="0" g="0" b="0"/>
+      </a:effectRef>
+      <a:fontRef idx="minor"/>
+    </dgm:style>
+  </dgm:styleLbl>
+  <dgm:styleLbl name="bgImgPlace1">
+    <dgm:scene3d>
+      <a:camera prst="orthographicFront"/>
+      <a:lightRig rig="threePt" dir="t"/>
+    </dgm:scene3d>
+    <dgm:sp3d/>
+    <dgm:txPr/>
+    <dgm:style>
+      <a:lnRef idx="2">
+        <a:scrgbClr r="0" g="0" b="0"/>
+      </a:lnRef>
+      <a:fillRef idx="1">
+        <a:scrgbClr r="0" g="0" b="0"/>
+      </a:fillRef>
+      <a:effectRef idx="0">
+        <a:scrgbClr r="0" g="0" b="0"/>
+      </a:effectRef>
+      <a:fontRef idx="minor"/>
+    </dgm:style>
+  </dgm:styleLbl>
+  <dgm:styleLbl name="sibTrans2D1">
+    <dgm:scene3d>
+      <a:camera prst="orthographicFront"/>
+      <a:lightRig rig="threePt" dir="t"/>
+    </dgm:scene3d>
+    <dgm:sp3d/>
+    <dgm:txPr/>
+    <dgm:style>
+      <a:lnRef idx="0">
+        <a:scrgbClr r="0" g="0" b="0"/>
+      </a:lnRef>
+      <a:fillRef idx="1">
+        <a:scrgbClr r="0" g="0" b="0"/>
+      </a:fillRef>
+      <a:effectRef idx="0">
+        <a:scrgbClr r="0" g="0" b="0"/>
+      </a:effectRef>
+      <a:fontRef idx="minor">
+        <a:schemeClr val="lt1"/>
+      </a:fontRef>
+    </dgm:style>
+  </dgm:styleLbl>
+  <dgm:styleLbl name="fgSibTrans2D1">
+    <dgm:scene3d>
+      <a:camera prst="orthographicFront"/>
+      <a:lightRig rig="threePt" dir="t"/>
+    </dgm:scene3d>
+    <dgm:sp3d/>
+    <dgm:txPr/>
+    <dgm:style>
+      <a:lnRef idx="0">
+        <a:scrgbClr r="0" g="0" b="0"/>
+      </a:lnRef>
+      <a:fillRef idx="1">
+        <a:scrgbClr r="0" g="0" b="0"/>
+      </a:fillRef>
+      <a:effectRef idx="0">
+        <a:scrgbClr r="0" g="0" b="0"/>
+      </a:effectRef>
+      <a:fontRef idx="minor">
+        <a:schemeClr val="lt1"/>
+      </a:fontRef>
+    </dgm:style>
+  </dgm:styleLbl>
+  <dgm:styleLbl name="bgSibTrans2D1">
+    <dgm:scene3d>
+      <a:camera prst="orthographicFront"/>
+      <a:lightRig rig="threePt" dir="t"/>
+    </dgm:scene3d>
+    <dgm:sp3d/>
+    <dgm:txPr/>
+    <dgm:style>
+      <a:lnRef idx="0">
+        <a:scrgbClr r="0" g="0" b="0"/>
+      </a:lnRef>
+      <a:fillRef idx="1">
+        <a:scrgbClr r="0" g="0" b="0"/>
+      </a:fillRef>
+      <a:effectRef idx="0">
+        <a:scrgbClr r="0" g="0" b="0"/>
+      </a:effectRef>
+      <a:fontRef idx="minor">
+        <a:schemeClr val="lt1"/>
+      </a:fontRef>
+    </dgm:style>
+  </dgm:styleLbl>
+  <dgm:styleLbl name="sibTrans1D1">
+    <dgm:scene3d>
+      <a:camera prst="orthographicFront"/>
+      <a:lightRig rig="threePt" dir="t"/>
+    </dgm:scene3d>
+    <dgm:sp3d/>
+    <dgm:txPr/>
+    <dgm:style>
+      <a:lnRef idx="1">
+        <a:scrgbClr r="0" g="0" b="0"/>
+      </a:lnRef>
+      <a:fillRef idx="0">
+        <a:scrgbClr r="0" g="0" b="0"/>
+      </a:fillRef>
+      <a:effectRef idx="0">
+        <a:scrgbClr r="0" g="0" b="0"/>
+      </a:effectRef>
+      <a:fontRef idx="minor"/>
+    </dgm:style>
+  </dgm:styleLbl>
+  <dgm:styleLbl name="callout">
+    <dgm:scene3d>
+      <a:camera prst="orthographicFront"/>
+      <a:lightRig rig="threePt" dir="t"/>
+    </dgm:scene3d>
+    <dgm:sp3d/>
+    <dgm:txPr/>
+    <dgm:style>
+      <a:lnRef idx="2">
+        <a:scrgbClr r="0" g="0" b="0"/>
+      </a:lnRef>
+      <a:fillRef idx="1">
+        <a:scrgbClr r="0" g="0" b="0"/>
+      </a:fillRef>
+      <a:effectRef idx="0">
+        <a:scrgbClr r="0" g="0" b="0"/>
+      </a:effectRef>
+      <a:fontRef idx="minor"/>
+    </dgm:style>
+  </dgm:styleLbl>
+  <dgm:styleLbl name="asst0">
+    <dgm:scene3d>
+      <a:camera prst="orthographicFront"/>
+      <a:lightRig rig="threePt" dir="t"/>
+    </dgm:scene3d>
+    <dgm:sp3d/>
+    <dgm:txPr/>
+    <dgm:style>
+      <a:lnRef idx="2">
+        <a:scrgbClr r="0" g="0" b="0"/>
+      </a:lnRef>
+      <a:fillRef idx="1">
+        <a:scrgbClr r="0" g="0" b="0"/>
+      </a:fillRef>
+      <a:effectRef idx="0">
+        <a:scrgbClr r="0" g="0" b="0"/>
+      </a:effectRef>
+      <a:fontRef idx="minor">
+        <a:schemeClr val="lt1"/>
+      </a:fontRef>
+    </dgm:style>
+  </dgm:styleLbl>
+  <dgm:styleLbl name="asst1">
+    <dgm:scene3d>
+      <a:camera prst="orthographicFront"/>
+      <a:lightRig rig="threePt" dir="t"/>
+    </dgm:scene3d>
+    <dgm:sp3d/>
+    <dgm:txPr/>
+    <dgm:style>
+      <a:lnRef idx="2">
+        <a:scrgbClr r="0" g="0" b="0"/>
+      </a:lnRef>
+      <a:fillRef idx="1">
+        <a:scrgbClr r="0" g="0" b="0"/>
+      </a:fillRef>
+      <a:effectRef idx="0">
+        <a:scrgbClr r="0" g="0" b="0"/>
+      </a:effectRef>
+      <a:fontRef idx="minor">
+        <a:schemeClr val="lt1"/>
+      </a:fontRef>
+    </dgm:style>
+  </dgm:styleLbl>
+  <dgm:styleLbl name="asst2">
+    <dgm:scene3d>
+      <a:camera prst="orthographicFront"/>
+      <a:lightRig rig="threePt" dir="t"/>
+    </dgm:scene3d>
+    <dgm:sp3d/>
+    <dgm:txPr/>
+    <dgm:style>
+      <a:lnRef idx="2">
+        <a:scrgbClr r="0" g="0" b="0"/>
+      </a:lnRef>
+      <a:fillRef idx="1">
+        <a:scrgbClr r="0" g="0" b="0"/>
+      </a:fillRef>
+      <a:effectRef idx="0">
+        <a:scrgbClr r="0" g="0" b="0"/>
+      </a:effectRef>
+      <a:fontRef idx="minor">
+        <a:schemeClr val="lt1"/>
+      </a:fontRef>
+    </dgm:style>
+  </dgm:styleLbl>
+  <dgm:styleLbl name="asst3">
+    <dgm:scene3d>
+      <a:camera prst="orthographicFront"/>
+      <a:lightRig rig="threePt" dir="t"/>
+    </dgm:scene3d>
+    <dgm:sp3d/>
+    <dgm:txPr/>
+    <dgm:style>
+      <a:lnRef idx="2">
+        <a:scrgbClr r="0" g="0" b="0"/>
+      </a:lnRef>
+      <a:fillRef idx="1">
+        <a:scrgbClr r="0" g="0" b="0"/>
+      </a:fillRef>
+      <a:effectRef idx="0">
+        <a:scrgbClr r="0" g="0" b="0"/>
+      </a:effectRef>
+      <a:fontRef idx="minor">
+        <a:schemeClr val="lt1"/>
+      </a:fontRef>
+    </dgm:style>
+  </dgm:styleLbl>
+  <dgm:styleLbl name="asst4">
+    <dgm:scene3d>
+      <a:camera prst="orthographicFront"/>
+      <a:lightRig rig="threePt" dir="t"/>
+    </dgm:scene3d>
+    <dgm:sp3d/>
+    <dgm:txPr/>
+    <dgm:style>
+      <a:lnRef idx="2">
+        <a:scrgbClr r="0" g="0" b="0"/>
+      </a:lnRef>
+      <a:fillRef idx="1">
+        <a:scrgbClr r="0" g="0" b="0"/>
+      </a:fillRef>
+      <a:effectRef idx="0">
+        <a:scrgbClr r="0" g="0" b="0"/>
+      </a:effectRef>
+      <a:fontRef idx="minor">
+        <a:schemeClr val="lt1"/>
+      </a:fontRef>
+    </dgm:style>
+  </dgm:styleLbl>
+  <dgm:styleLbl name="parChTrans2D1">
+    <dgm:scene3d>
+      <a:camera prst="orthographicFront"/>
+      <a:lightRig rig="threePt" dir="t"/>
+    </dgm:scene3d>
+    <dgm:sp3d/>
+    <dgm:txPr/>
+    <dgm:style>
+      <a:lnRef idx="2">
+        <a:scrgbClr r="0" g="0" b="0"/>
+      </a:lnRef>
+      <a:fillRef idx="1">
+        <a:scrgbClr r="0" g="0" b="0"/>
+      </a:fillRef>
+      <a:effectRef idx="0">
+        <a:scrgbClr r="0" g="0" b="0"/>
+      </a:effectRef>
+      <a:fontRef idx="minor">
+        <a:schemeClr val="lt1"/>
+      </a:fontRef>
+    </dgm:style>
+  </dgm:styleLbl>
+  <dgm:styleLbl name="parChTrans2D2">
+    <dgm:scene3d>
+      <a:camera prst="orthographicFront"/>
+      <a:lightRig rig="threePt" dir="t"/>
+    </dgm:scene3d>
+    <dgm:sp3d/>
+    <dgm:txPr/>
+    <dgm:style>
+      <a:lnRef idx="2">
+        <a:scrgbClr r="0" g="0" b="0"/>
+      </a:lnRef>
+      <a:fillRef idx="1">
+        <a:scrgbClr r="0" g="0" b="0"/>
+      </a:fillRef>
+      <a:effectRef idx="0">
+        <a:scrgbClr r="0" g="0" b="0"/>
+      </a:effectRef>
+      <a:fontRef idx="minor">
+        <a:schemeClr val="lt1"/>
+      </a:fontRef>
+    </dgm:style>
+  </dgm:styleLbl>
+  <dgm:styleLbl name="parChTrans2D3">
+    <dgm:scene3d>
+      <a:camera prst="orthographicFront"/>
+      <a:lightRig rig="threePt" dir="t"/>
+    </dgm:scene3d>
+    <dgm:sp3d/>
+    <dgm:txPr/>
+    <dgm:style>
+      <a:lnRef idx="2">
+        <a:scrgbClr r="0" g="0" b="0"/>
+      </a:lnRef>
+      <a:fillRef idx="1">
+        <a:scrgbClr r="0" g="0" b="0"/>
+      </a:fillRef>
+      <a:effectRef idx="0">
+        <a:scrgbClr r="0" g="0" b="0"/>
+      </a:effectRef>
+      <a:fontRef idx="minor">
+        <a:schemeClr val="lt1"/>
+      </a:fontRef>
+    </dgm:style>
+  </dgm:styleLbl>
+  <dgm:styleLbl name="parChTrans2D4">
+    <dgm:scene3d>
+      <a:camera prst="orthographicFront"/>
+      <a:lightRig rig="threePt" dir="t"/>
+    </dgm:scene3d>
+    <dgm:sp3d/>
+    <dgm:txPr/>
+    <dgm:style>
+      <a:lnRef idx="2">
+        <a:scrgbClr r="0" g="0" b="0"/>
+      </a:lnRef>
+      <a:fillRef idx="1">
+        <a:scrgbClr r="0" g="0" b="0"/>
+      </a:fillRef>
+      <a:effectRef idx="0">
+        <a:scrgbClr r="0" g="0" b="0"/>
+      </a:effectRef>
+      <a:fontRef idx="minor">
+        <a:schemeClr val="lt1"/>
+      </a:fontRef>
+    </dgm:style>
+  </dgm:styleLbl>
+  <dgm:styleLbl name="parChTrans1D1">
+    <dgm:scene3d>
+      <a:camera prst="orthographicFront"/>
+      <a:lightRig rig="threePt" dir="t"/>
+    </dgm:scene3d>
+    <dgm:sp3d/>
+    <dgm:txPr/>
+    <dgm:style>
+      <a:lnRef idx="2">
+        <a:scrgbClr r="0" g="0" b="0"/>
+      </a:lnRef>
+      <a:fillRef idx="0">
+        <a:scrgbClr r="0" g="0" b="0"/>
+      </a:fillRef>
+      <a:effectRef idx="0">
+        <a:scrgbClr r="0" g="0" b="0"/>
+      </a:effectRef>
+      <a:fontRef idx="minor"/>
+    </dgm:style>
+  </dgm:styleLbl>
+  <dgm:styleLbl name="parChTrans1D2">
+    <dgm:scene3d>
+      <a:camera prst="orthographicFront"/>
+      <a:lightRig rig="threePt" dir="t"/>
+    </dgm:scene3d>
+    <dgm:sp3d/>
+    <dgm:txPr/>
+    <dgm:style>
+      <a:lnRef idx="2">
+        <a:scrgbClr r="0" g="0" b="0"/>
+      </a:lnRef>
+      <a:fillRef idx="0">
+        <a:scrgbClr r="0" g="0" b="0"/>
+      </a:fillRef>
+      <a:effectRef idx="0">
+        <a:scrgbClr r="0" g="0" b="0"/>
+      </a:effectRef>
+      <a:fontRef idx="minor"/>
+    </dgm:style>
+  </dgm:styleLbl>
+  <dgm:styleLbl name="parChTrans1D3">
+    <dgm:scene3d>
+      <a:camera prst="orthographicFront"/>
+      <a:lightRig rig="threePt" dir="t"/>
+    </dgm:scene3d>
+    <dgm:sp3d/>
+    <dgm:txPr/>
+    <dgm:style>
+      <a:lnRef idx="2">
+        <a:scrgbClr r="0" g="0" b="0"/>
+      </a:lnRef>
+      <a:fillRef idx="0">
+        <a:scrgbClr r="0" g="0" b="0"/>
+      </a:fillRef>
+      <a:effectRef idx="0">
+        <a:scrgbClr r="0" g="0" b="0"/>
+      </a:effectRef>
+      <a:fontRef idx="minor"/>
+    </dgm:style>
+  </dgm:styleLbl>
+  <dgm:styleLbl name="parChTrans1D4">
+    <dgm:scene3d>
+      <a:camera prst="orthographicFront"/>
+      <a:lightRig rig="threePt" dir="t"/>
+    </dgm:scene3d>
+    <dgm:sp3d/>
+    <dgm:txPr/>
+    <dgm:style>
+      <a:lnRef idx="2">
+        <a:scrgbClr r="0" g="0" b="0"/>
+      </a:lnRef>
+      <a:fillRef idx="0">
+        <a:scrgbClr r="0" g="0" b="0"/>
+      </a:fillRef>
+      <a:effectRef idx="0">
+        <a:scrgbClr r="0" g="0" b="0"/>
+      </a:effectRef>
+      <a:fontRef idx="minor"/>
+    </dgm:style>
+  </dgm:styleLbl>
+  <dgm:styleLbl name="fgAcc1">
+    <dgm:scene3d>
+      <a:camera prst="orthographicFront"/>
+      <a:lightRig rig="threePt" dir="t"/>
+    </dgm:scene3d>
+    <dgm:sp3d/>
+    <dgm:txPr/>
+    <dgm:style>
+      <a:lnRef idx="2">
+        <a:scrgbClr r="0" g="0" b="0"/>
+      </a:lnRef>
+      <a:fillRef idx="1">
+        <a:scrgbClr r="0" g="0" b="0"/>
+      </a:fillRef>
+      <a:effectRef idx="0">
+        <a:scrgbClr r="0" g="0" b="0"/>
+      </a:effectRef>
+      <a:fontRef idx="minor"/>
+    </dgm:style>
+  </dgm:styleLbl>
+  <dgm:styleLbl name="conFgAcc1">
+    <dgm:scene3d>
+      <a:camera prst="orthographicFront"/>
+      <a:lightRig rig="threePt" dir="t"/>
+    </dgm:scene3d>
+    <dgm:sp3d/>
+    <dgm:txPr/>
+    <dgm:style>
+      <a:lnRef idx="2">
+        <a:scrgbClr r="0" g="0" b="0"/>
+      </a:lnRef>
+      <a:fillRef idx="1">
+        <a:scrgbClr r="0" g="0" b="0"/>
+      </a:fillRef>
+      <a:effectRef idx="0">
+        <a:scrgbClr r="0" g="0" b="0"/>
+      </a:effectRef>
+      <a:fontRef idx="minor"/>
+    </dgm:style>
+  </dgm:styleLbl>
+  <dgm:styleLbl name="alignAcc1">
+    <dgm:scene3d>
+      <a:camera prst="orthographicFront"/>
+      <a:lightRig rig="threePt" dir="t"/>
+    </dgm:scene3d>
+    <dgm:sp3d/>
+    <dgm:txPr/>
+    <dgm:style>
+      <a:lnRef idx="2">
+        <a:scrgbClr r="0" g="0" b="0"/>
+      </a:lnRef>
+      <a:fillRef idx="1">
+        <a:scrgbClr r="0" g="0" b="0"/>
+      </a:fillRef>
+      <a:effectRef idx="0">
+        <a:scrgbClr r="0" g="0" b="0"/>
+      </a:effectRef>
+      <a:fontRef idx="minor"/>
+    </dgm:style>
+  </dgm:styleLbl>
+  <dgm:styleLbl name="trAlignAcc1">
+    <dgm:scene3d>
+      <a:camera prst="orthographicFront"/>
+      <a:lightRig rig="threePt" dir="t"/>
+    </dgm:scene3d>
+    <dgm:sp3d/>
+    <dgm:txPr/>
+    <dgm:style>
+      <a:lnRef idx="1">
+        <a:scrgbClr r="0" g="0" b="0"/>
+      </a:lnRef>
+      <a:fillRef idx="1">
+        <a:scrgbClr r="0" g="0" b="0"/>
+      </a:fillRef>
+      <a:effectRef idx="0">
+        <a:scrgbClr r="0" g="0" b="0"/>
+      </a:effectRef>
+      <a:fontRef idx="minor"/>
+    </dgm:style>
+  </dgm:styleLbl>
+  <dgm:styleLbl name="bgAcc1">
+    <dgm:scene3d>
+      <a:camera prst="orthographicFront"/>
+      <a:lightRig rig="threePt" dir="t"/>
+    </dgm:scene3d>
+    <dgm:sp3d/>
+    <dgm:txPr/>
+    <dgm:style>
+      <a:lnRef idx="2">
+        <a:scrgbClr r="0" g="0" b="0"/>
+      </a:lnRef>
+      <a:fillRef idx="1">
+        <a:scrgbClr r="0" g="0" b="0"/>
+      </a:fillRef>
+      <a:effectRef idx="0">
+        <a:scrgbClr r="0" g="0" b="0"/>
+      </a:effectRef>
+      <a:fontRef idx="minor"/>
+    </dgm:style>
+  </dgm:styleLbl>
+  <dgm:styleLbl name="solidFgAcc1">
+    <dgm:scene3d>
+      <a:camera prst="orthographicFront"/>
+      <a:lightRig rig="threePt" dir="t"/>
+    </dgm:scene3d>
+    <dgm:sp3d/>
+    <dgm:txPr/>
+    <dgm:style>
+      <a:lnRef idx="2">
+        <a:scrgbClr r="0" g="0" b="0"/>
+      </a:lnRef>
+      <a:fillRef idx="1">
+        <a:scrgbClr r="0" g="0" b="0"/>
+      </a:fillRef>
+      <a:effectRef idx="0">
+        <a:scrgbClr r="0" g="0" b="0"/>
+      </a:effectRef>
+      <a:fontRef idx="minor"/>
+    </dgm:style>
+  </dgm:styleLbl>
+  <dgm:styleLbl name="solidAlignAcc1">
+    <dgm:scene3d>
+      <a:camera prst="orthographicFront"/>
+      <a:lightRig rig="threePt" dir="t"/>
+    </dgm:scene3d>
+    <dgm:sp3d/>
+    <dgm:txPr/>
+    <dgm:style>
+      <a:lnRef idx="2">
+        <a:scrgbClr r="0" g="0" b="0"/>
+      </a:lnRef>
+      <a:fillRef idx="1">
+        <a:scrgbClr r="0" g="0" b="0"/>
+      </a:fillRef>
+      <a:effectRef idx="0">
+        <a:scrgbClr r="0" g="0" b="0"/>
+      </a:effectRef>
+      <a:fontRef idx="minor"/>
+    </dgm:style>
+  </dgm:styleLbl>
+  <dgm:styleLbl name="solidBgAcc1">
+    <dgm:scene3d>
+      <a:camera prst="orthographicFront"/>
+      <a:lightRig rig="threePt" dir="t"/>
+    </dgm:scene3d>
+    <dgm:sp3d/>
+    <dgm:txPr/>
+    <dgm:style>
+      <a:lnRef idx="2">
+        <a:scrgbClr r="0" g="0" b="0"/>
+      </a:lnRef>
+      <a:fillRef idx="1">
+        <a:scrgbClr r="0" g="0" b="0"/>
+      </a:fillRef>
+      <a:effectRef idx="0">
+        <a:scrgbClr r="0" g="0" b="0"/>
+      </a:effectRef>
+      <a:fontRef idx="minor"/>
+    </dgm:style>
+  </dgm:styleLbl>
+  <dgm:styleLbl name="fgAccFollowNode1">
+    <dgm:scene3d>
+      <a:camera prst="orthographicFront"/>
+      <a:lightRig rig="threePt" dir="t"/>
+    </dgm:scene3d>
+    <dgm:sp3d/>
+    <dgm:txPr/>
+    <dgm:style>
+      <a:lnRef idx="2">
+        <a:scrgbClr r="0" g="0" b="0"/>
+      </a:lnRef>
+      <a:fillRef idx="1">
+        <a:scrgbClr r="0" g="0" b="0"/>
+      </a:fillRef>
+      <a:effectRef idx="0">
+        <a:scrgbClr r="0" g="0" b="0"/>
+      </a:effectRef>
+      <a:fontRef idx="minor"/>
+    </dgm:style>
+  </dgm:styleLbl>
+  <dgm:styleLbl name="alignAccFollowNode1">
+    <dgm:scene3d>
+      <a:camera prst="orthographicFront"/>
+      <a:lightRig rig="threePt" dir="t"/>
+    </dgm:scene3d>
+    <dgm:sp3d/>
+    <dgm:txPr/>
+    <dgm:style>
+      <a:lnRef idx="2">
+        <a:scrgbClr r="0" g="0" b="0"/>
+      </a:lnRef>
+      <a:fillRef idx="1">
+        <a:scrgbClr r="0" g="0" b="0"/>
+      </a:fillRef>
+      <a:effectRef idx="0">
+        <a:scrgbClr r="0" g="0" b="0"/>
+      </a:effectRef>
+      <a:fontRef idx="minor"/>
+    </dgm:style>
+  </dgm:styleLbl>
+  <dgm:styleLbl name="bgAccFollowNode1">
+    <dgm:scene3d>
+      <a:camera prst="orthographicFront"/>
+      <a:lightRig rig="threePt" dir="t"/>
+    </dgm:scene3d>
+    <dgm:sp3d/>
+    <dgm:txPr/>
+    <dgm:style>
+      <a:lnRef idx="2">
+        <a:scrgbClr r="0" g="0" b="0"/>
+      </a:lnRef>
+      <a:fillRef idx="1">
+        <a:scrgbClr r="0" g="0" b="0"/>
+      </a:fillRef>
+      <a:effectRef idx="0">
+        <a:scrgbClr r="0" g="0" b="0"/>
+      </a:effectRef>
+      <a:fontRef idx="minor"/>
+    </dgm:style>
+  </dgm:styleLbl>
+  <dgm:styleLbl name="fgAcc0">
+    <dgm:scene3d>
+      <a:camera prst="orthographicFront"/>
+      <a:lightRig rig="threePt" dir="t"/>
+    </dgm:scene3d>
+    <dgm:sp3d/>
+    <dgm:txPr/>
+    <dgm:style>
+      <a:lnRef idx="2">
+        <a:scrgbClr r="0" g="0" b="0"/>
+      </a:lnRef>
+      <a:fillRef idx="1">
+        <a:scrgbClr r="0" g="0" b="0"/>
+      </a:fillRef>
+      <a:effectRef idx="0">
+        <a:scrgbClr r="0" g="0" b="0"/>
+      </a:effectRef>
+      <a:fontRef idx="minor"/>
+    </dgm:style>
+  </dgm:styleLbl>
+  <dgm:styleLbl name="fgAcc2">
+    <dgm:scene3d>
+      <a:camera prst="orthographicFront"/>
+      <a:lightRig rig="threePt" dir="t"/>
+    </dgm:scene3d>
+    <dgm:sp3d/>
+    <dgm:txPr/>
+    <dgm:style>
+      <a:lnRef idx="2">
+        <a:scrgbClr r="0" g="0" b="0"/>
+      </a:lnRef>
+      <a:fillRef idx="1">
+        <a:scrgbClr r="0" g="0" b="0"/>
+      </a:fillRef>
+      <a:effectRef idx="0">
+        <a:scrgbClr r="0" g="0" b="0"/>
+      </a:effectRef>
+      <a:fontRef idx="minor"/>
+    </dgm:style>
+  </dgm:styleLbl>
+  <dgm:styleLbl name="fgAcc3">
+    <dgm:scene3d>
+      <a:camera prst="orthographicFront"/>
+      <a:lightRig rig="threePt" dir="t"/>
+    </dgm:scene3d>
+    <dgm:sp3d/>
+    <dgm:txPr/>
+    <dgm:style>
+      <a:lnRef idx="2">
+        <a:scrgbClr r="0" g="0" b="0"/>
+      </a:lnRef>
+      <a:fillRef idx="1">
+        <a:scrgbClr r="0" g="0" b="0"/>
+      </a:fillRef>
+      <a:effectRef idx="0">
+        <a:scrgbClr r="0" g="0" b="0"/>
+      </a:effectRef>
+      <a:fontRef idx="minor"/>
+    </dgm:style>
+  </dgm:styleLbl>
+  <dgm:styleLbl name="fgAcc4">
+    <dgm:scene3d>
+      <a:camera prst="orthographicFront"/>
+      <a:lightRig rig="threePt" dir="t"/>
+    </dgm:scene3d>
+    <dgm:sp3d/>
+    <dgm:txPr/>
+    <dgm:style>
+      <a:lnRef idx="2">
+        <a:scrgbClr r="0" g="0" b="0"/>
+      </a:lnRef>
+      <a:fillRef idx="1">
+        <a:scrgbClr r="0" g="0" b="0"/>
+      </a:fillRef>
+      <a:effectRef idx="0">
+        <a:scrgbClr r="0" g="0" b="0"/>
+      </a:effectRef>
+      <a:fontRef idx="minor"/>
+    </dgm:style>
+  </dgm:styleLbl>
+  <dgm:styleLbl name="bgShp">
+    <dgm:scene3d>
+      <a:camera prst="orthographicFront"/>
+      <a:lightRig rig="threePt" dir="t"/>
+    </dgm:scene3d>
+    <dgm:sp3d/>
+    <dgm:txPr/>
+    <dgm:style>
+      <a:lnRef idx="0">
+        <a:scrgbClr r="0" g="0" b="0"/>
+      </a:lnRef>
+      <a:fillRef idx="1">
+        <a:scrgbClr r="0" g="0" b="0"/>
+      </a:fillRef>
+      <a:effectRef idx="0">
+        <a:scrgbClr r="0" g="0" b="0"/>
+      </a:effectRef>
+      <a:fontRef idx="minor"/>
+    </dgm:style>
+  </dgm:styleLbl>
+  <dgm:styleLbl name="dkBgShp">
+    <dgm:scene3d>
+      <a:camera prst="orthographicFront"/>
+      <a:lightRig rig="threePt" dir="t"/>
+    </dgm:scene3d>
+    <dgm:sp3d/>
+    <dgm:txPr/>
+    <dgm:style>
+      <a:lnRef idx="0">
+        <a:scrgbClr r="0" g="0" b="0"/>
+      </a:lnRef>
+      <a:fillRef idx="1">
+        <a:scrgbClr r="0" g="0" b="0"/>
+      </a:fillRef>
+      <a:effectRef idx="0">
+        <a:scrgbClr r="0" g="0" b="0"/>
+      </a:effectRef>
+      <a:fontRef idx="minor"/>
+    </dgm:style>
+  </dgm:styleLbl>
+  <dgm:styleLbl name="trBgShp">
+    <dgm:scene3d>
+      <a:camera prst="orthographicFront"/>
+      <a:lightRig rig="threePt" dir="t"/>
+    </dgm:scene3d>
+    <dgm:sp3d/>
+    <dgm:txPr/>
+    <dgm:style>
+      <a:lnRef idx="0">
+        <a:scrgbClr r="0" g="0" b="0"/>
+      </a:lnRef>
+      <a:fillRef idx="1">
+        <a:scrgbClr r="0" g="0" b="0"/>
+      </a:fillRef>
+      <a:effectRef idx="0">
+        <a:scrgbClr r="0" g="0" b="0"/>
+      </a:effectRef>
+      <a:fontRef idx="minor"/>
+    </dgm:style>
+  </dgm:styleLbl>
+  <dgm:styleLbl name="fgShp">
+    <dgm:scene3d>
+      <a:camera prst="orthographicFront"/>
+      <a:lightRig rig="threePt" dir="t"/>
+    </dgm:scene3d>
+    <dgm:sp3d/>
+    <dgm:txPr/>
+    <dgm:style>
+      <a:lnRef idx="2">
+        <a:scrgbClr r="0" g="0" b="0"/>
+      </a:lnRef>
+      <a:fillRef idx="1">
+        <a:scrgbClr r="0" g="0" b="0"/>
+      </a:fillRef>
+      <a:effectRef idx="0">
+        <a:scrgbClr r="0" g="0" b="0"/>
+      </a:effectRef>
+      <a:fontRef idx="minor"/>
+    </dgm:style>
+  </dgm:styleLbl>
+  <dgm:styleLbl name="revTx">
+    <dgm:scene3d>
+      <a:camera prst="orthographicFront"/>
+      <a:lightRig rig="threePt" dir="t"/>
+    </dgm:scene3d>
+    <dgm:sp3d/>
+    <dgm:txPr/>
+    <dgm:style>
+      <a:lnRef idx="0">
+        <a:scrgbClr r="0" g="0" b="0"/>
+      </a:lnRef>
+      <a:fillRef idx="0">
+        <a:scrgbClr r="0" g="0" b="0"/>
+      </a:fillRef>
+      <a:effectRef idx="0">
+        <a:scrgbClr r="0" g="0" b="0"/>
+      </a:effectRef>
+      <a:fontRef idx="minor"/>
+    </dgm:style>
+  </dgm:styleLbl>
+</dgm:styleDef>
+</file>
+
+<file path=ppt/diagrams/quickStyle4.xml><?xml version="1.0" encoding="utf-8"?>
 <dgm:styleDef xmlns:dgm="http://schemas.openxmlformats.org/drawingml/2006/diagram" xmlns:a="http://schemas.openxmlformats.org/drawingml/2006/main" uniqueId="urn:microsoft.com/office/officeart/2005/8/quickstyle/simple1">
   <dgm:title val=""/>
   <dgm:desc val=""/>
@@ -13147,13 +16576,13 @@
           <p:nvPr>
             <p:extLst>
               <p:ext uri="{D42A27DB-BD31-4B8C-83A1-F6EECF244321}">
-                <p14:modId xmlns:p14="http://schemas.microsoft.com/office/powerpoint/2010/main" val="2595123634"/>
+                <p14:modId xmlns:p14="http://schemas.microsoft.com/office/powerpoint/2010/main" val="3267013471"/>
               </p:ext>
             </p:extLst>
           </p:nvPr>
         </p:nvGraphicFramePr>
         <p:xfrm>
-          <a:off x="410766" y="2133600"/>
+          <a:off x="411956" y="1879600"/>
           <a:ext cx="8320087" cy="4157664"/>
         </p:xfrm>
         <a:graphic>
@@ -13176,7 +16605,7 @@
         </p:nvSpPr>
         <p:spPr>
           <a:xfrm>
-            <a:off x="0" y="668918"/>
+            <a:off x="0" y="351418"/>
             <a:ext cx="9144000" cy="1051560"/>
           </a:xfrm>
           <a:prstGeom prst="rect">
@@ -13273,7 +16702,7 @@
         </p:nvSpPr>
         <p:spPr>
           <a:xfrm>
-            <a:off x="0" y="668918"/>
+            <a:off x="0" y="330590"/>
             <a:ext cx="9144000" cy="1051560"/>
           </a:xfrm>
           <a:prstGeom prst="rect">
@@ -13321,18 +16750,13 @@
               </a:defRPr>
             </a:pPr>
             <a:r>
-              <a:rPr lang="en-US" sz="3200" b="1">
+              <a:rPr lang="en-US" sz="3200" b="1" dirty="0">
                 <a:solidFill>
                   <a:schemeClr val="bg1"/>
                 </a:solidFill>
               </a:rPr>
               <a:t>What we built?</a:t>
             </a:r>
-            <a:endParaRPr lang="en-US" sz="3200" b="1" dirty="0">
-              <a:solidFill>
-                <a:schemeClr val="bg1"/>
-              </a:solidFill>
-            </a:endParaRPr>
           </a:p>
         </p:txBody>
       </p:sp>
@@ -13349,13 +16773,13 @@
           <p:nvPr>
             <p:extLst>
               <p:ext uri="{D42A27DB-BD31-4B8C-83A1-F6EECF244321}">
-                <p14:modId xmlns:p14="http://schemas.microsoft.com/office/powerpoint/2010/main" val="2688176819"/>
+                <p14:modId xmlns:p14="http://schemas.microsoft.com/office/powerpoint/2010/main" val="3862709544"/>
               </p:ext>
             </p:extLst>
           </p:nvPr>
         </p:nvGraphicFramePr>
         <p:xfrm>
-          <a:off x="1024568" y="2034866"/>
+          <a:off x="914400" y="1550234"/>
           <a:ext cx="7315200" cy="4242351"/>
         </p:xfrm>
         <a:graphic>
@@ -13416,8 +16840,8 @@
         </p:blipFill>
         <p:spPr>
           <a:xfrm>
-            <a:off x="4235645" y="2142349"/>
-            <a:ext cx="4776617" cy="4346721"/>
+            <a:off x="3877131" y="1816101"/>
+            <a:ext cx="5135132" cy="4672970"/>
           </a:xfrm>
           <a:prstGeom prst="rect">
             <a:avLst/>
@@ -13438,7 +16862,7 @@
         </p:nvSpPr>
         <p:spPr>
           <a:xfrm>
-            <a:off x="0" y="668918"/>
+            <a:off x="-2" y="368930"/>
             <a:ext cx="9144000" cy="1051560"/>
           </a:xfrm>
           <a:prstGeom prst="rect">
@@ -13509,14 +16933,14 @@
           <p:nvPr>
             <p:extLst>
               <p:ext uri="{D42A27DB-BD31-4B8C-83A1-F6EECF244321}">
-                <p14:modId xmlns:p14="http://schemas.microsoft.com/office/powerpoint/2010/main" val="925124215"/>
+                <p14:modId xmlns:p14="http://schemas.microsoft.com/office/powerpoint/2010/main" val="939467037"/>
               </p:ext>
             </p:extLst>
           </p:nvPr>
         </p:nvGraphicFramePr>
         <p:xfrm>
-          <a:off x="-2" y="1839816"/>
-          <a:ext cx="4572002" cy="4935557"/>
+          <a:off x="-152400" y="1524000"/>
+          <a:ext cx="4572000" cy="5238673"/>
         </p:xfrm>
         <a:graphic>
           <a:graphicData uri="http://schemas.openxmlformats.org/drawingml/2006/diagram">
@@ -13540,6 +16964,293 @@
 <file path=ppt/slides/slide5.xml><?xml version="1.0" encoding="utf-8"?>
 <p:sld xmlns:a="http://schemas.openxmlformats.org/drawingml/2006/main" xmlns:r="http://schemas.openxmlformats.org/officeDocument/2006/relationships" xmlns:p="http://schemas.openxmlformats.org/presentationml/2006/main">
   <p:cSld>
+    <p:bg>
+      <p:bgPr>
+        <a:solidFill>
+          <a:schemeClr val="bg1"/>
+        </a:solidFill>
+        <a:effectLst/>
+      </p:bgPr>
+    </p:bg>
+    <p:spTree>
+      <p:nvGrpSpPr>
+        <p:cNvPr id="1" name=""/>
+        <p:cNvGrpSpPr/>
+        <p:nvPr/>
+      </p:nvGrpSpPr>
+      <p:grpSpPr>
+        <a:xfrm>
+          <a:off x="0" y="0"/>
+          <a:ext cx="0" cy="0"/>
+          <a:chOff x="0" y="0"/>
+          <a:chExt cx="0" cy="0"/>
+        </a:xfrm>
+      </p:grpSpPr>
+      <p:sp>
+        <p:nvSpPr>
+          <p:cNvPr id="20" name="Rectangle 19">
+            <a:extLst>
+              <a:ext uri="{FF2B5EF4-FFF2-40B4-BE49-F238E27FC236}">
+                <a16:creationId xmlns:a16="http://schemas.microsoft.com/office/drawing/2014/main" id="{42A4FC2C-047E-45A5-965D-8E1E3BF09BC6}"/>
+              </a:ext>
+              <a:ext uri="{C183D7F6-B498-43B3-948B-1728B52AA6E4}">
+                <adec:decorative xmlns:adec="http://schemas.microsoft.com/office/drawing/2017/decorative" val="1"/>
+              </a:ext>
+            </a:extLst>
+          </p:cNvPr>
+          <p:cNvSpPr>
+            <a:spLocks noGrp="1" noRot="1" noChangeAspect="1" noMove="1" noResize="1" noEditPoints="1" noAdjustHandles="1" noChangeArrowheads="1" noChangeShapeType="1" noTextEdit="1"/>
+          </p:cNvSpPr>
+          <p:nvPr>
+            <p:extLst>
+              <p:ext uri="{386F3935-93C4-4BCD-93E2-E3B085C9AB24}">
+                <p16:designElem xmlns:p16="http://schemas.microsoft.com/office/powerpoint/2015/main" val="1"/>
+              </p:ext>
+            </p:extLst>
+          </p:nvPr>
+        </p:nvSpPr>
+        <p:spPr bwMode="white">
+          <a:xfrm>
+            <a:off x="1143" y="0"/>
+            <a:ext cx="9141714" cy="6858000"/>
+          </a:xfrm>
+          <a:prstGeom prst="rect">
+            <a:avLst/>
+          </a:prstGeom>
+          <a:noFill/>
+          <a:ln>
+            <a:noFill/>
+          </a:ln>
+        </p:spPr>
+        <p:style>
+          <a:lnRef idx="2">
+            <a:schemeClr val="accent1">
+              <a:shade val="50000"/>
+            </a:schemeClr>
+          </a:lnRef>
+          <a:fillRef idx="1">
+            <a:schemeClr val="accent1"/>
+          </a:fillRef>
+          <a:effectRef idx="0">
+            <a:schemeClr val="accent1"/>
+          </a:effectRef>
+          <a:fontRef idx="minor">
+            <a:schemeClr val="lt1"/>
+          </a:fontRef>
+        </p:style>
+        <p:txBody>
+          <a:bodyPr rtlCol="0" anchor="ctr"/>
+          <a:lstStyle>
+            <a:defPPr>
+              <a:defRPr lang="en-US"/>
+            </a:defPPr>
+            <a:lvl1pPr marL="0" algn="l" defTabSz="914400" rtl="0" eaLnBrk="1" latinLnBrk="0" hangingPunct="1">
+              <a:defRPr sz="1800" kern="1200">
+                <a:solidFill>
+                  <a:schemeClr val="lt1"/>
+                </a:solidFill>
+                <a:latin typeface="+mn-lt"/>
+                <a:ea typeface="+mn-ea"/>
+                <a:cs typeface="+mn-cs"/>
+              </a:defRPr>
+            </a:lvl1pPr>
+            <a:lvl2pPr marL="457200" algn="l" defTabSz="914400" rtl="0" eaLnBrk="1" latinLnBrk="0" hangingPunct="1">
+              <a:defRPr sz="1800" kern="1200">
+                <a:solidFill>
+                  <a:schemeClr val="lt1"/>
+                </a:solidFill>
+                <a:latin typeface="+mn-lt"/>
+                <a:ea typeface="+mn-ea"/>
+                <a:cs typeface="+mn-cs"/>
+              </a:defRPr>
+            </a:lvl2pPr>
+            <a:lvl3pPr marL="914400" algn="l" defTabSz="914400" rtl="0" eaLnBrk="1" latinLnBrk="0" hangingPunct="1">
+              <a:defRPr sz="1800" kern="1200">
+                <a:solidFill>
+                  <a:schemeClr val="lt1"/>
+                </a:solidFill>
+                <a:latin typeface="+mn-lt"/>
+                <a:ea typeface="+mn-ea"/>
+                <a:cs typeface="+mn-cs"/>
+              </a:defRPr>
+            </a:lvl3pPr>
+            <a:lvl4pPr marL="1371600" algn="l" defTabSz="914400" rtl="0" eaLnBrk="1" latinLnBrk="0" hangingPunct="1">
+              <a:defRPr sz="1800" kern="1200">
+                <a:solidFill>
+                  <a:schemeClr val="lt1"/>
+                </a:solidFill>
+                <a:latin typeface="+mn-lt"/>
+                <a:ea typeface="+mn-ea"/>
+                <a:cs typeface="+mn-cs"/>
+              </a:defRPr>
+            </a:lvl4pPr>
+            <a:lvl5pPr marL="1828800" algn="l" defTabSz="914400" rtl="0" eaLnBrk="1" latinLnBrk="0" hangingPunct="1">
+              <a:defRPr sz="1800" kern="1200">
+                <a:solidFill>
+                  <a:schemeClr val="lt1"/>
+                </a:solidFill>
+                <a:latin typeface="+mn-lt"/>
+                <a:ea typeface="+mn-ea"/>
+                <a:cs typeface="+mn-cs"/>
+              </a:defRPr>
+            </a:lvl5pPr>
+            <a:lvl6pPr marL="2286000" algn="l" defTabSz="914400" rtl="0" eaLnBrk="1" latinLnBrk="0" hangingPunct="1">
+              <a:defRPr sz="1800" kern="1200">
+                <a:solidFill>
+                  <a:schemeClr val="lt1"/>
+                </a:solidFill>
+                <a:latin typeface="+mn-lt"/>
+                <a:ea typeface="+mn-ea"/>
+                <a:cs typeface="+mn-cs"/>
+              </a:defRPr>
+            </a:lvl6pPr>
+            <a:lvl7pPr marL="2743200" algn="l" defTabSz="914400" rtl="0" eaLnBrk="1" latinLnBrk="0" hangingPunct="1">
+              <a:defRPr sz="1800" kern="1200">
+                <a:solidFill>
+                  <a:schemeClr val="lt1"/>
+                </a:solidFill>
+                <a:latin typeface="+mn-lt"/>
+                <a:ea typeface="+mn-ea"/>
+                <a:cs typeface="+mn-cs"/>
+              </a:defRPr>
+            </a:lvl7pPr>
+            <a:lvl8pPr marL="3200400" algn="l" defTabSz="914400" rtl="0" eaLnBrk="1" latinLnBrk="0" hangingPunct="1">
+              <a:defRPr sz="1800" kern="1200">
+                <a:solidFill>
+                  <a:schemeClr val="lt1"/>
+                </a:solidFill>
+                <a:latin typeface="+mn-lt"/>
+                <a:ea typeface="+mn-ea"/>
+                <a:cs typeface="+mn-cs"/>
+              </a:defRPr>
+            </a:lvl8pPr>
+            <a:lvl9pPr marL="3657600" algn="l" defTabSz="914400" rtl="0" eaLnBrk="1" latinLnBrk="0" hangingPunct="1">
+              <a:defRPr sz="1800" kern="1200">
+                <a:solidFill>
+                  <a:schemeClr val="lt1"/>
+                </a:solidFill>
+                <a:latin typeface="+mn-lt"/>
+                <a:ea typeface="+mn-ea"/>
+                <a:cs typeface="+mn-cs"/>
+              </a:defRPr>
+            </a:lvl9pPr>
+          </a:lstStyle>
+          <a:p>
+            <a:pPr algn="ctr"/>
+            <a:endParaRPr lang="en-US"/>
+          </a:p>
+        </p:txBody>
+      </p:sp>
+      <p:graphicFrame>
+        <p:nvGraphicFramePr>
+          <p:cNvPr id="7" name="TextBox 4">
+            <a:extLst>
+              <a:ext uri="{FF2B5EF4-FFF2-40B4-BE49-F238E27FC236}">
+                <a16:creationId xmlns:a16="http://schemas.microsoft.com/office/drawing/2014/main" id="{8422BC5B-093E-C437-A5E2-C2BD4494E2A5}"/>
+              </a:ext>
+            </a:extLst>
+          </p:cNvPr>
+          <p:cNvGraphicFramePr/>
+          <p:nvPr>
+            <p:extLst>
+              <p:ext uri="{D42A27DB-BD31-4B8C-83A1-F6EECF244321}">
+                <p14:modId xmlns:p14="http://schemas.microsoft.com/office/powerpoint/2010/main" val="107056552"/>
+              </p:ext>
+            </p:extLst>
+          </p:nvPr>
+        </p:nvGraphicFramePr>
+        <p:xfrm>
+          <a:off x="495300" y="1524000"/>
+          <a:ext cx="8013192" cy="4648200"/>
+        </p:xfrm>
+        <a:graphic>
+          <a:graphicData uri="http://schemas.openxmlformats.org/drawingml/2006/diagram">
+            <dgm:relIds xmlns:dgm="http://schemas.openxmlformats.org/drawingml/2006/diagram" xmlns:r="http://schemas.openxmlformats.org/officeDocument/2006/relationships" r:dm="rId2" r:lo="rId3" r:qs="rId4" r:cs="rId5"/>
+          </a:graphicData>
+        </a:graphic>
+      </p:graphicFrame>
+      <p:sp>
+        <p:nvSpPr>
+          <p:cNvPr id="6" name="Rectangle 5">
+            <a:extLst>
+              <a:ext uri="{FF2B5EF4-FFF2-40B4-BE49-F238E27FC236}">
+                <a16:creationId xmlns:a16="http://schemas.microsoft.com/office/drawing/2014/main" id="{AB4F5D57-8021-D190-F08F-A35A0B3F3685}"/>
+              </a:ext>
+            </a:extLst>
+          </p:cNvPr>
+          <p:cNvSpPr/>
+          <p:nvPr/>
+        </p:nvSpPr>
+        <p:spPr>
+          <a:xfrm>
+            <a:off x="0" y="450708"/>
+            <a:ext cx="9144000" cy="777240"/>
+          </a:xfrm>
+          <a:prstGeom prst="rect">
+            <a:avLst/>
+          </a:prstGeom>
+          <a:solidFill>
+            <a:srgbClr val="00696B"/>
+          </a:solidFill>
+          <a:ln>
+            <a:noFill/>
+          </a:ln>
+        </p:spPr>
+        <p:style>
+          <a:lnRef idx="1">
+            <a:schemeClr val="accent1"/>
+          </a:lnRef>
+          <a:fillRef idx="3">
+            <a:schemeClr val="accent1"/>
+          </a:fillRef>
+          <a:effectRef idx="2">
+            <a:schemeClr val="accent1"/>
+          </a:effectRef>
+          <a:fontRef idx="minor">
+            <a:schemeClr val="lt1"/>
+          </a:fontRef>
+        </p:style>
+        <p:txBody>
+          <a:bodyPr lIns="457200" rtlCol="0" anchor="ctr"/>
+          <a:lstStyle/>
+          <a:p>
+            <a:pPr algn="ctr">
+              <a:spcAft>
+                <a:spcPts val="600"/>
+              </a:spcAft>
+              <a:defRPr sz="2400" b="1">
+                <a:solidFill>
+                  <a:srgbClr val="FFFFFF"/>
+                </a:solidFill>
+              </a:defRPr>
+            </a:pPr>
+            <a:r>
+              <a:rPr lang="en-IN" sz="2400" dirty="0"/>
+              <a:t>Hardest challenge &amp; how we addressed it</a:t>
+            </a:r>
+            <a:endParaRPr lang="en-IN" dirty="0"/>
+          </a:p>
+        </p:txBody>
+      </p:sp>
+    </p:spTree>
+  </p:cSld>
+  <p:clrMapOvr>
+    <a:masterClrMapping/>
+  </p:clrMapOvr>
+</p:sld>
+</file>
+
+<file path=ppt/slides/slide6.xml><?xml version="1.0" encoding="utf-8"?>
+<p:sld xmlns:a="http://schemas.openxmlformats.org/drawingml/2006/main" xmlns:r="http://schemas.openxmlformats.org/officeDocument/2006/relationships" xmlns:p="http://schemas.openxmlformats.org/presentationml/2006/main">
+  <p:cSld>
+    <p:bg>
+      <p:bgPr>
+        <a:solidFill>
+          <a:srgbClr val="01696B"/>
+        </a:solidFill>
+        <a:effectLst/>
+      </p:bgPr>
+    </p:bg>
     <p:spTree>
       <p:nvGrpSpPr>
         <p:cNvPr id="1" name="">
@@ -13581,7 +17292,7 @@
             <a:avLst/>
           </a:prstGeom>
           <a:solidFill>
-            <a:srgbClr val="00696B"/>
+            <a:schemeClr val="bg1"/>
           </a:solidFill>
           <a:ln>
             <a:noFill/>
@@ -13613,8 +17324,12 @@
               </a:defRPr>
             </a:pPr>
             <a:r>
-              <a:rPr lang="en-IN" dirty="0"/>
-              <a:t>Project --- DEMO</a:t>
+              <a:rPr lang="en-IN" sz="3200" dirty="0">
+                <a:solidFill>
+                  <a:srgbClr val="01696B"/>
+                </a:solidFill>
+              </a:rPr>
+              <a:t>Project Demo</a:t>
             </a:r>
           </a:p>
         </p:txBody>
@@ -13625,413 +17340,6 @@
         <p14:creationId xmlns:p14="http://schemas.microsoft.com/office/powerpoint/2010/main" val="1459694698"/>
       </p:ext>
     </p:extLst>
-  </p:cSld>
-  <p:clrMapOvr>
-    <a:masterClrMapping/>
-  </p:clrMapOvr>
-</p:sld>
-</file>
-
-<file path=ppt/slides/slide6.xml><?xml version="1.0" encoding="utf-8"?>
-<p:sld xmlns:a="http://schemas.openxmlformats.org/drawingml/2006/main" xmlns:r="http://schemas.openxmlformats.org/officeDocument/2006/relationships" xmlns:p="http://schemas.openxmlformats.org/presentationml/2006/main">
-  <p:cSld>
-    <p:spTree>
-      <p:nvGrpSpPr>
-        <p:cNvPr id="1" name=""/>
-        <p:cNvGrpSpPr/>
-        <p:nvPr/>
-      </p:nvGrpSpPr>
-      <p:grpSpPr>
-        <a:xfrm>
-          <a:off x="0" y="0"/>
-          <a:ext cx="0" cy="0"/>
-          <a:chOff x="0" y="0"/>
-          <a:chExt cx="0" cy="0"/>
-        </a:xfrm>
-      </p:grpSpPr>
-      <p:sp>
-        <p:nvSpPr>
-          <p:cNvPr id="2" name="Rectangle 1"/>
-          <p:cNvSpPr/>
-          <p:nvPr/>
-        </p:nvSpPr>
-        <p:spPr>
-          <a:xfrm>
-            <a:off x="0" y="0"/>
-            <a:ext cx="9144000" cy="777240"/>
-          </a:xfrm>
-          <a:prstGeom prst="rect">
-            <a:avLst/>
-          </a:prstGeom>
-          <a:solidFill>
-            <a:srgbClr val="00696B"/>
-          </a:solidFill>
-          <a:ln>
-            <a:noFill/>
-          </a:ln>
-        </p:spPr>
-        <p:style>
-          <a:lnRef idx="1">
-            <a:schemeClr val="accent1"/>
-          </a:lnRef>
-          <a:fillRef idx="3">
-            <a:schemeClr val="accent1"/>
-          </a:fillRef>
-          <a:effectRef idx="2">
-            <a:schemeClr val="accent1"/>
-          </a:effectRef>
-          <a:fontRef idx="minor">
-            <a:schemeClr val="lt1"/>
-          </a:fontRef>
-        </p:style>
-        <p:txBody>
-          <a:bodyPr lIns="457200" rtlCol="0" anchor="ctr"/>
-          <a:lstStyle/>
-          <a:p>
-            <a:pPr algn="ctr">
-              <a:defRPr sz="2400" b="1">
-                <a:solidFill>
-                  <a:srgbClr val="FFFFFF"/>
-                </a:solidFill>
-              </a:defRPr>
-            </a:pPr>
-            <a:r>
-              <a:rPr lang="en-IN" dirty="0"/>
-              <a:t>Implementation highlights</a:t>
-            </a:r>
-          </a:p>
-        </p:txBody>
-      </p:sp>
-      <p:sp>
-        <p:nvSpPr>
-          <p:cNvPr id="3" name="TextBox 2"/>
-          <p:cNvSpPr txBox="1"/>
-          <p:nvPr/>
-        </p:nvSpPr>
-        <p:spPr>
-          <a:xfrm>
-            <a:off x="502920" y="960120"/>
-            <a:ext cx="8138160" cy="5394960"/>
-          </a:xfrm>
-          <a:prstGeom prst="rect">
-            <a:avLst/>
-          </a:prstGeom>
-          <a:noFill/>
-        </p:spPr>
-        <p:txBody>
-          <a:bodyPr wrap="square">
-            <a:spAutoFit/>
-          </a:bodyPr>
-          <a:lstStyle/>
-          <a:p>
-            <a:pPr>
-              <a:spcAft>
-                <a:spcPts val="1300"/>
-              </a:spcAft>
-              <a:defRPr sz="2000">
-                <a:solidFill>
-                  <a:srgbClr val="263238"/>
-                </a:solidFill>
-              </a:defRPr>
-            </a:pPr>
-            <a:r>
-              <a:t>Shared schema &amp; validators (Python) across fog, Lambdas, and pytest.</a:t>
-            </a:r>
-          </a:p>
-          <a:p>
-            <a:pPr>
-              <a:spcAft>
-                <a:spcPts val="1300"/>
-              </a:spcAft>
-              <a:defRPr sz="2000">
-                <a:solidFill>
-                  <a:srgbClr val="263238"/>
-                </a:solidFill>
-              </a:defRPr>
-            </a:pPr>
-            <a:r>
-              <a:t>AWS SAM: multi-Lambda stack, SQS decoupling, Learner Lab–friendly deploy.</a:t>
-            </a:r>
-          </a:p>
-          <a:p>
-            <a:pPr>
-              <a:spcAft>
-                <a:spcPts val="1300"/>
-              </a:spcAft>
-              <a:defRPr sz="2000">
-                <a:solidFill>
-                  <a:srgbClr val="263238"/>
-                </a:solidFill>
-              </a:defRPr>
-            </a:pPr>
-            <a:r>
-              <a:t>CI: GitHub Actions (tests, sam validate, npm build) + Amplify hosting.</a:t>
-            </a:r>
-          </a:p>
-          <a:p>
-            <a:pPr>
-              <a:spcAft>
-                <a:spcPts val="1300"/>
-              </a:spcAft>
-              <a:defRPr sz="2000">
-                <a:solidFill>
-                  <a:srgbClr val="263238"/>
-                </a:solidFill>
-              </a:defRPr>
-            </a:pPr>
-            <a:r>
-              <a:t>SPA: TypeScript + Vite; build-time API base URL is a first-class ops concern.</a:t>
-            </a:r>
-          </a:p>
-        </p:txBody>
-      </p:sp>
-    </p:spTree>
-  </p:cSld>
-  <p:clrMapOvr>
-    <a:masterClrMapping/>
-  </p:clrMapOvr>
-</p:sld>
-</file>
-
-<file path=ppt/slides/slide7.xml><?xml version="1.0" encoding="utf-8"?>
-<p:sld xmlns:a="http://schemas.openxmlformats.org/drawingml/2006/main" xmlns:r="http://schemas.openxmlformats.org/officeDocument/2006/relationships" xmlns:p="http://schemas.openxmlformats.org/presentationml/2006/main">
-  <p:cSld>
-    <p:spTree>
-      <p:nvGrpSpPr>
-        <p:cNvPr id="1" name=""/>
-        <p:cNvGrpSpPr/>
-        <p:nvPr/>
-      </p:nvGrpSpPr>
-      <p:grpSpPr>
-        <a:xfrm>
-          <a:off x="0" y="0"/>
-          <a:ext cx="0" cy="0"/>
-          <a:chOff x="0" y="0"/>
-          <a:chExt cx="0" cy="0"/>
-        </a:xfrm>
-      </p:grpSpPr>
-      <p:sp>
-        <p:nvSpPr>
-          <p:cNvPr id="2" name="Rectangle 1"/>
-          <p:cNvSpPr/>
-          <p:nvPr/>
-        </p:nvSpPr>
-        <p:spPr>
-          <a:xfrm>
-            <a:off x="0" y="0"/>
-            <a:ext cx="9144000" cy="777240"/>
-          </a:xfrm>
-          <a:prstGeom prst="rect">
-            <a:avLst/>
-          </a:prstGeom>
-          <a:solidFill>
-            <a:srgbClr val="00696B"/>
-          </a:solidFill>
-          <a:ln>
-            <a:noFill/>
-          </a:ln>
-        </p:spPr>
-        <p:style>
-          <a:lnRef idx="1">
-            <a:schemeClr val="accent1"/>
-          </a:lnRef>
-          <a:fillRef idx="3">
-            <a:schemeClr val="accent1"/>
-          </a:fillRef>
-          <a:effectRef idx="2">
-            <a:schemeClr val="accent1"/>
-          </a:effectRef>
-          <a:fontRef idx="minor">
-            <a:schemeClr val="lt1"/>
-          </a:fontRef>
-        </p:style>
-        <p:txBody>
-          <a:bodyPr lIns="457200" rtlCol="0" anchor="ctr"/>
-          <a:lstStyle/>
-          <a:p>
-            <a:pPr algn="ctr">
-              <a:defRPr sz="2400" b="1">
-                <a:solidFill>
-                  <a:srgbClr val="FFFFFF"/>
-                </a:solidFill>
-              </a:defRPr>
-            </a:pPr>
-            <a:r>
-              <a:t>Results &amp; takeaway</a:t>
-            </a:r>
-          </a:p>
-        </p:txBody>
-      </p:sp>
-      <p:sp>
-        <p:nvSpPr>
-          <p:cNvPr id="3" name="TextBox 2"/>
-          <p:cNvSpPr txBox="1"/>
-          <p:nvPr/>
-        </p:nvSpPr>
-        <p:spPr>
-          <a:xfrm>
-            <a:off x="502920" y="960120"/>
-            <a:ext cx="8138160" cy="3657600"/>
-          </a:xfrm>
-          <a:prstGeom prst="rect">
-            <a:avLst/>
-          </a:prstGeom>
-          <a:noFill/>
-        </p:spPr>
-        <p:txBody>
-          <a:bodyPr wrap="square">
-            <a:spAutoFit/>
-          </a:bodyPr>
-          <a:lstStyle/>
-          <a:p>
-            <a:pPr>
-              <a:spcAft>
-                <a:spcPts val="1000"/>
-              </a:spcAft>
-              <a:defRPr sz="1800">
-                <a:solidFill>
-                  <a:srgbClr val="263238"/>
-                </a:solidFill>
-              </a:defRPr>
-            </a:pPr>
-            <a:r>
-              <a:t>Working pipeline: simulate → fog → ingest → queue → store → read API → dashboard.</a:t>
-            </a:r>
-          </a:p>
-          <a:p>
-            <a:pPr>
-              <a:spcAft>
-                <a:spcPts val="1000"/>
-              </a:spcAft>
-              <a:defRPr sz="1800">
-                <a:solidFill>
-                  <a:srgbClr val="263238"/>
-                </a:solidFill>
-              </a:defRPr>
-            </a:pPr>
-            <a:r>
-              <a:t>Queues decouple burst ingest from DynamoDB writes; validation shared with tests reduces demo risk.</a:t>
-            </a:r>
-          </a:p>
-          <a:p>
-            <a:pPr>
-              <a:spcAft>
-                <a:spcPts val="1000"/>
-              </a:spcAft>
-              <a:defRPr sz="1800">
-                <a:solidFill>
-                  <a:srgbClr val="263238"/>
-                </a:solidFill>
-              </a:defRPr>
-            </a:pPr>
-            <a:r>
-              <a:t>Lessons: credentials &amp; region discipline; configure VITE_API_BASE_URL before Amplify builds.</a:t>
-            </a:r>
-          </a:p>
-        </p:txBody>
-      </p:sp>
-      <p:sp>
-        <p:nvSpPr>
-          <p:cNvPr id="4" name="TextBox 3"/>
-          <p:cNvSpPr txBox="1"/>
-          <p:nvPr/>
-        </p:nvSpPr>
-        <p:spPr>
-          <a:xfrm>
-            <a:off x="502920" y="4617720"/>
-            <a:ext cx="8138160" cy="1092607"/>
-          </a:xfrm>
-          <a:prstGeom prst="rect">
-            <a:avLst/>
-          </a:prstGeom>
-          <a:noFill/>
-        </p:spPr>
-        <p:txBody>
-          <a:bodyPr wrap="square">
-            <a:spAutoFit/>
-          </a:bodyPr>
-          <a:lstStyle/>
-          <a:p>
-            <a:r>
-              <a:rPr dirty="0"/>
-              <a:t>Links</a:t>
-            </a:r>
-            <a:br>
-              <a:rPr lang="en-US" dirty="0"/>
-            </a:br>
-            <a:r>
-              <a:rPr lang="en-IN" sz="1100" dirty="0"/>
-              <a:t>Deployed App: https://main.d12jcq31pcipw0.amplifyapp.com/</a:t>
-            </a:r>
-          </a:p>
-          <a:p>
-            <a:r>
-              <a:rPr lang="en-IN" sz="1100" dirty="0"/>
-              <a:t>Base API URL: https://zzxm3e4tq1.execute-api.us-east-1.amazonaws.com</a:t>
-            </a:r>
-          </a:p>
-          <a:p>
-            <a:r>
-              <a:rPr lang="en-IN" sz="1100" dirty="0"/>
-              <a:t>GitHub URL: https://</a:t>
-            </a:r>
-            <a:r>
-              <a:rPr lang="en-IN" sz="1100" dirty="0" err="1"/>
-              <a:t>github.com</a:t>
-            </a:r>
-            <a:r>
-              <a:rPr lang="en-IN" sz="1100" dirty="0"/>
-              <a:t>/Wasiullah26/Smart-waste-bin</a:t>
-            </a:r>
-          </a:p>
-          <a:p>
-            <a:pPr>
-              <a:defRPr sz="1400" b="1">
-                <a:solidFill>
-                  <a:srgbClr val="00696B"/>
-                </a:solidFill>
-              </a:defRPr>
-            </a:pPr>
-            <a:endParaRPr dirty="0"/>
-          </a:p>
-        </p:txBody>
-      </p:sp>
-      <p:sp>
-        <p:nvSpPr>
-          <p:cNvPr id="5" name="TextBox 4"/>
-          <p:cNvSpPr txBox="1"/>
-          <p:nvPr/>
-        </p:nvSpPr>
-        <p:spPr>
-          <a:xfrm>
-            <a:off x="457200" y="6355080"/>
-            <a:ext cx="8229600" cy="411480"/>
-          </a:xfrm>
-          <a:prstGeom prst="rect">
-            <a:avLst/>
-          </a:prstGeom>
-          <a:noFill/>
-        </p:spPr>
-        <p:txBody>
-          <a:bodyPr wrap="none">
-            <a:spAutoFit/>
-          </a:bodyPr>
-          <a:lstStyle/>
-          <a:p>
-            <a:pPr algn="ctr">
-              <a:defRPr sz="1600" b="1">
-                <a:solidFill>
-                  <a:srgbClr val="00696B"/>
-                </a:solidFill>
-              </a:defRPr>
-            </a:pPr>
-            <a:r>
-              <a:t>Thank you · Questions?</a:t>
-            </a:r>
-          </a:p>
-        </p:txBody>
-      </p:sp>
-    </p:spTree>
   </p:cSld>
   <p:clrMapOvr>
     <a:masterClrMapping/>
